--- a/public/fun/pack/pptx/birthday/돌잔치_25_첫번째이야기중심_연꽃연못.pptx
+++ b/public/fun/pack/pptx/birthday/돌잔치_25_첫번째이야기중심_연꽃연못.pptx
@@ -3286,14 +3286,6 @@
 <file path=ppt/slides/slide1.xml><?xml version="1.0" encoding="utf-8"?>
 <p:sld xmlns:a="http://schemas.openxmlformats.org/drawingml/2006/main" xmlns:p="http://schemas.openxmlformats.org/presentationml/2006/main" xmlns:r="http://schemas.openxmlformats.org/officeDocument/2006/relationships">
   <p:cSld>
-    <p:bg>
-      <p:bgPr>
-        <a:solidFill>
-          <a:srgbClr val="7B3759"/>
-        </a:solidFill>
-        <a:effectLst/>
-      </p:bgPr>
-    </p:bg>
     <p:spTree>
       <p:nvGrpSpPr>
         <p:cNvPr id="1" name=""/>
@@ -3301,559 +3293,30 @@
         <p:nvPr/>
       </p:nvGrpSpPr>
       <p:grpSpPr/>
-      <p:sp>
-        <p:nvSpPr>
-          <p:cNvPr id="3" name="장식"/>
-          <p:cNvSpPr/>
+      <p:pic>
+        <p:nvPicPr>
+          <p:cNvPr id="3" name="표지 그림" descr="birthday-25.jpg"/>
+          <p:cNvPicPr>
+            <a:picLocks noChangeAspect="1"/>
+          </p:cNvPicPr>
           <p:nvPr/>
-        </p:nvSpPr>
-        <p:spPr>
-          <a:xfrm>
-            <a:off x="457200" y="457200"/>
-            <a:ext cx="11277295" cy="5943600"/>
-          </a:xfrm>
-          <a:prstGeom prst="roundRect">
-            <a:avLst>
-              <a:gd name="adj" fmla="val 5000"/>
-            </a:avLst>
-          </a:prstGeom>
-          <a:solidFill>
-            <a:srgbClr val="FFFFFF"/>
-          </a:solidFill>
-          <a:ln>
-            <a:noFill/>
-          </a:ln>
-        </p:spPr>
-        <p:txBody>
-          <a:bodyPr rtlCol="0" anchor="ctr"/>
-          <a:lstStyle/>
-          <a:p>
-            <a:pPr algn="ctr"/>
-          </a:p>
-        </p:txBody>
-      </p:sp>
-      <p:sp>
-        <p:nvSpPr>
-          <p:cNvPr id="4" name="장식"/>
-          <p:cNvSpPr/>
-          <p:nvPr/>
-        </p:nvSpPr>
-        <p:spPr>
-          <a:xfrm>
-            <a:off x="5892165" y="662482"/>
-            <a:ext cx="407365" cy="633679"/>
-          </a:xfrm>
-          <a:prstGeom prst="ellipse">
+        </p:nvPicPr>
+        <p:blipFill>
+          <a:blip r:embed="rId2"/>
+          <a:stretch>
+            <a:fillRect/>
+          </a:stretch>
+        </p:blipFill>
+        <p:spPr>
+          <a:xfrm>
+            <a:off x="0" y="0"/>
+            <a:ext cx="12191695" cy="6858000"/>
+          </a:xfrm>
+          <a:prstGeom prst="rect">
             <a:avLst/>
           </a:prstGeom>
-          <a:solidFill>
-            <a:srgbClr val="B8618C"/>
-          </a:solidFill>
-          <a:ln>
-            <a:noFill/>
-          </a:ln>
-        </p:spPr>
-        <p:txBody>
-          <a:bodyPr rtlCol="0" anchor="ctr"/>
-          <a:lstStyle/>
-          <a:p>
-            <a:pPr algn="ctr"/>
-          </a:p>
-        </p:txBody>
-      </p:sp>
-      <p:sp>
-        <p:nvSpPr>
-          <p:cNvPr id="5" name="장식"/>
-          <p:cNvSpPr/>
-          <p:nvPr/>
-        </p:nvSpPr>
-        <p:spPr>
-          <a:xfrm rot="4320000">
-            <a:off x="6265243" y="933539"/>
-            <a:ext cx="407365" cy="633679"/>
-          </a:xfrm>
-          <a:prstGeom prst="ellipse">
-            <a:avLst/>
-          </a:prstGeom>
-          <a:solidFill>
-            <a:srgbClr val="EED3E0"/>
-          </a:solidFill>
-          <a:ln>
-            <a:noFill/>
-          </a:ln>
-        </p:spPr>
-        <p:txBody>
-          <a:bodyPr rtlCol="0" anchor="ctr"/>
-          <a:lstStyle/>
-          <a:p>
-            <a:pPr algn="ctr"/>
-          </a:p>
-        </p:txBody>
-      </p:sp>
-      <p:sp>
-        <p:nvSpPr>
-          <p:cNvPr id="6" name="장식"/>
-          <p:cNvSpPr/>
-          <p:nvPr/>
-        </p:nvSpPr>
-        <p:spPr>
-          <a:xfrm rot="8640000">
-            <a:off x="6122739" y="1372119"/>
-            <a:ext cx="407365" cy="633679"/>
-          </a:xfrm>
-          <a:prstGeom prst="ellipse">
-            <a:avLst/>
-          </a:prstGeom>
-          <a:solidFill>
-            <a:srgbClr val="B8618C"/>
-          </a:solidFill>
-          <a:ln>
-            <a:noFill/>
-          </a:ln>
-        </p:spPr>
-        <p:txBody>
-          <a:bodyPr rtlCol="0" anchor="ctr"/>
-          <a:lstStyle/>
-          <a:p>
-            <a:pPr algn="ctr"/>
-          </a:p>
-        </p:txBody>
-      </p:sp>
-      <p:sp>
-        <p:nvSpPr>
-          <p:cNvPr id="7" name="장식"/>
-          <p:cNvSpPr/>
-          <p:nvPr/>
-        </p:nvSpPr>
-        <p:spPr>
-          <a:xfrm rot="12960000">
-            <a:off x="5661590" y="1372119"/>
-            <a:ext cx="407365" cy="633679"/>
-          </a:xfrm>
-          <a:prstGeom prst="ellipse">
-            <a:avLst/>
-          </a:prstGeom>
-          <a:solidFill>
-            <a:srgbClr val="EED3E0"/>
-          </a:solidFill>
-          <a:ln>
-            <a:noFill/>
-          </a:ln>
-        </p:spPr>
-        <p:txBody>
-          <a:bodyPr rtlCol="0" anchor="ctr"/>
-          <a:lstStyle/>
-          <a:p>
-            <a:pPr algn="ctr"/>
-          </a:p>
-        </p:txBody>
-      </p:sp>
-      <p:sp>
-        <p:nvSpPr>
-          <p:cNvPr id="8" name="장식"/>
-          <p:cNvSpPr/>
-          <p:nvPr/>
-        </p:nvSpPr>
-        <p:spPr>
-          <a:xfrm rot="17280000">
-            <a:off x="5519086" y="933539"/>
-            <a:ext cx="407365" cy="633679"/>
-          </a:xfrm>
-          <a:prstGeom prst="ellipse">
-            <a:avLst/>
-          </a:prstGeom>
-          <a:solidFill>
-            <a:srgbClr val="B8618C"/>
-          </a:solidFill>
-          <a:ln>
-            <a:noFill/>
-          </a:ln>
-        </p:spPr>
-        <p:txBody>
-          <a:bodyPr rtlCol="0" anchor="ctr"/>
-          <a:lstStyle/>
-          <a:p>
-            <a:pPr algn="ctr"/>
-          </a:p>
-        </p:txBody>
-      </p:sp>
-      <p:sp>
-        <p:nvSpPr>
-          <p:cNvPr id="9" name="장식"/>
-          <p:cNvSpPr/>
-          <p:nvPr/>
-        </p:nvSpPr>
-        <p:spPr>
-          <a:xfrm>
-            <a:off x="5960059" y="1235811"/>
-            <a:ext cx="271576" cy="271576"/>
-          </a:xfrm>
-          <a:prstGeom prst="ellipse">
-            <a:avLst/>
-          </a:prstGeom>
-          <a:solidFill>
-            <a:srgbClr val="3F8D3F"/>
-          </a:solidFill>
-          <a:ln>
-            <a:noFill/>
-          </a:ln>
-        </p:spPr>
-        <p:txBody>
-          <a:bodyPr rtlCol="0" anchor="ctr"/>
-          <a:lstStyle/>
-          <a:p>
-            <a:pPr algn="ctr"/>
-          </a:p>
-        </p:txBody>
-      </p:sp>
-      <p:sp>
-        <p:nvSpPr>
-          <p:cNvPr id="10" name="장식"/>
-          <p:cNvSpPr/>
-          <p:nvPr/>
-        </p:nvSpPr>
-        <p:spPr>
-          <a:xfrm rot="1200000">
-            <a:off x="5231271" y="1707812"/>
-            <a:ext cx="203682" cy="316839"/>
-          </a:xfrm>
-          <a:prstGeom prst="ellipse">
-            <a:avLst/>
-          </a:prstGeom>
-          <a:solidFill>
-            <a:srgbClr val="B8618C"/>
-          </a:solidFill>
-          <a:ln>
-            <a:noFill/>
-          </a:ln>
-        </p:spPr>
-        <p:txBody>
-          <a:bodyPr rtlCol="0" anchor="ctr"/>
-          <a:lstStyle/>
-          <a:p>
-            <a:pPr algn="ctr"/>
-          </a:p>
-        </p:txBody>
-      </p:sp>
-      <p:sp>
-        <p:nvSpPr>
-          <p:cNvPr id="11" name="장식"/>
-          <p:cNvSpPr/>
-          <p:nvPr/>
-        </p:nvSpPr>
-        <p:spPr>
-          <a:xfrm rot="5520000">
-            <a:off x="5360207" y="1898967"/>
-            <a:ext cx="203682" cy="316839"/>
-          </a:xfrm>
-          <a:prstGeom prst="ellipse">
-            <a:avLst/>
-          </a:prstGeom>
-          <a:solidFill>
-            <a:srgbClr val="EED3E0"/>
-          </a:solidFill>
-          <a:ln>
-            <a:noFill/>
-          </a:ln>
-        </p:spPr>
-        <p:txBody>
-          <a:bodyPr rtlCol="0" anchor="ctr"/>
-          <a:lstStyle/>
-          <a:p>
-            <a:pPr algn="ctr"/>
-          </a:p>
-        </p:txBody>
-      </p:sp>
-      <p:sp>
-        <p:nvSpPr>
-          <p:cNvPr id="12" name="장식"/>
-          <p:cNvSpPr/>
-          <p:nvPr/>
-        </p:nvSpPr>
-        <p:spPr>
-          <a:xfrm rot="9840000">
-            <a:off x="5218251" y="2080662"/>
-            <a:ext cx="203682" cy="316839"/>
-          </a:xfrm>
-          <a:prstGeom prst="ellipse">
-            <a:avLst/>
-          </a:prstGeom>
-          <a:solidFill>
-            <a:srgbClr val="B8618C"/>
-          </a:solidFill>
-          <a:ln>
-            <a:noFill/>
-          </a:ln>
-        </p:spPr>
-        <p:txBody>
-          <a:bodyPr rtlCol="0" anchor="ctr"/>
-          <a:lstStyle/>
-          <a:p>
-            <a:pPr algn="ctr"/>
-          </a:p>
-        </p:txBody>
-      </p:sp>
-      <p:sp>
-        <p:nvSpPr>
-          <p:cNvPr id="13" name="장식"/>
-          <p:cNvSpPr/>
-          <p:nvPr/>
-        </p:nvSpPr>
-        <p:spPr>
-          <a:xfrm rot="14160000">
-            <a:off x="5001581" y="2001801"/>
-            <a:ext cx="203682" cy="316839"/>
-          </a:xfrm>
-          <a:prstGeom prst="ellipse">
-            <a:avLst/>
-          </a:prstGeom>
-          <a:solidFill>
-            <a:srgbClr val="EED3E0"/>
-          </a:solidFill>
-          <a:ln>
-            <a:noFill/>
-          </a:ln>
-        </p:spPr>
-        <p:txBody>
-          <a:bodyPr rtlCol="0" anchor="ctr"/>
-          <a:lstStyle/>
-          <a:p>
-            <a:pPr algn="ctr"/>
-          </a:p>
-        </p:txBody>
-      </p:sp>
-      <p:sp>
-        <p:nvSpPr>
-          <p:cNvPr id="14" name="장식"/>
-          <p:cNvSpPr/>
-          <p:nvPr/>
-        </p:nvSpPr>
-        <p:spPr>
-          <a:xfrm rot="18480000">
-            <a:off x="5009628" y="1771367"/>
-            <a:ext cx="203682" cy="316839"/>
-          </a:xfrm>
-          <a:prstGeom prst="ellipse">
-            <a:avLst/>
-          </a:prstGeom>
-          <a:solidFill>
-            <a:srgbClr val="B8618C"/>
-          </a:solidFill>
-          <a:ln>
-            <a:noFill/>
-          </a:ln>
-        </p:spPr>
-        <p:txBody>
-          <a:bodyPr rtlCol="0" anchor="ctr"/>
-          <a:lstStyle/>
-          <a:p>
-            <a:pPr algn="ctr"/>
-          </a:p>
-        </p:txBody>
-      </p:sp>
-      <p:sp>
-        <p:nvSpPr>
-          <p:cNvPr id="15" name="장식"/>
-          <p:cNvSpPr/>
-          <p:nvPr/>
-        </p:nvSpPr>
-        <p:spPr>
-          <a:xfrm>
-            <a:off x="5198135" y="1982647"/>
-            <a:ext cx="135788" cy="135788"/>
-          </a:xfrm>
-          <a:prstGeom prst="ellipse">
-            <a:avLst/>
-          </a:prstGeom>
-          <a:solidFill>
-            <a:srgbClr val="3F8D3F"/>
-          </a:solidFill>
-          <a:ln>
-            <a:noFill/>
-          </a:ln>
-        </p:spPr>
-        <p:txBody>
-          <a:bodyPr rtlCol="0" anchor="ctr"/>
-          <a:lstStyle/>
-          <a:p>
-            <a:pPr algn="ctr"/>
-          </a:p>
-        </p:txBody>
-      </p:sp>
-      <p:sp>
-        <p:nvSpPr>
-          <p:cNvPr id="16" name="장식"/>
-          <p:cNvSpPr/>
-          <p:nvPr/>
-        </p:nvSpPr>
-        <p:spPr>
-          <a:xfrm rot="2400000">
-            <a:off x="6946022" y="1866696"/>
-            <a:ext cx="171093" cy="266145"/>
-          </a:xfrm>
-          <a:prstGeom prst="ellipse">
-            <a:avLst/>
-          </a:prstGeom>
-          <a:solidFill>
-            <a:srgbClr val="B8618C"/>
-          </a:solidFill>
-          <a:ln>
-            <a:noFill/>
-          </a:ln>
-        </p:spPr>
-        <p:txBody>
-          <a:bodyPr rtlCol="0" anchor="ctr"/>
-          <a:lstStyle/>
-          <a:p>
-            <a:pPr algn="ctr"/>
-          </a:p>
-        </p:txBody>
-      </p:sp>
-      <p:sp>
-        <p:nvSpPr>
-          <p:cNvPr id="17" name="장식"/>
-          <p:cNvSpPr/>
-          <p:nvPr/>
-        </p:nvSpPr>
-        <p:spPr>
-          <a:xfrm rot="6720000">
-            <a:off x="6992878" y="2054626"/>
-            <a:ext cx="171093" cy="266145"/>
-          </a:xfrm>
-          <a:prstGeom prst="ellipse">
-            <a:avLst/>
-          </a:prstGeom>
-          <a:solidFill>
-            <a:srgbClr val="EED3E0"/>
-          </a:solidFill>
-          <a:ln>
-            <a:noFill/>
-          </a:ln>
-        </p:spPr>
-        <p:txBody>
-          <a:bodyPr rtlCol="0" anchor="ctr"/>
-          <a:lstStyle/>
-          <a:p>
-            <a:pPr algn="ctr"/>
-          </a:p>
-        </p:txBody>
-      </p:sp>
-      <p:sp>
-        <p:nvSpPr>
-          <p:cNvPr id="18" name="장식"/>
-          <p:cNvSpPr/>
-          <p:nvPr/>
-        </p:nvSpPr>
-        <p:spPr>
-          <a:xfrm rot="11040000">
-            <a:off x="6828626" y="2157262"/>
-            <a:ext cx="171093" cy="266145"/>
-          </a:xfrm>
-          <a:prstGeom prst="ellipse">
-            <a:avLst/>
-          </a:prstGeom>
-          <a:solidFill>
-            <a:srgbClr val="B8618C"/>
-          </a:solidFill>
-          <a:ln>
-            <a:noFill/>
-          </a:ln>
-        </p:spPr>
-        <p:txBody>
-          <a:bodyPr rtlCol="0" anchor="ctr"/>
-          <a:lstStyle/>
-          <a:p>
-            <a:pPr algn="ctr"/>
-          </a:p>
-        </p:txBody>
-      </p:sp>
-      <p:sp>
-        <p:nvSpPr>
-          <p:cNvPr id="19" name="장식"/>
-          <p:cNvSpPr/>
-          <p:nvPr/>
-        </p:nvSpPr>
-        <p:spPr>
-          <a:xfrm rot="15360000">
-            <a:off x="6680256" y="2032765"/>
-            <a:ext cx="171093" cy="266145"/>
-          </a:xfrm>
-          <a:prstGeom prst="ellipse">
-            <a:avLst/>
-          </a:prstGeom>
-          <a:solidFill>
-            <a:srgbClr val="EED3E0"/>
-          </a:solidFill>
-          <a:ln>
-            <a:noFill/>
-          </a:ln>
-        </p:spPr>
-        <p:txBody>
-          <a:bodyPr rtlCol="0" anchor="ctr"/>
-          <a:lstStyle/>
-          <a:p>
-            <a:pPr algn="ctr"/>
-          </a:p>
-        </p:txBody>
-      </p:sp>
-      <p:sp>
-        <p:nvSpPr>
-          <p:cNvPr id="20" name="장식"/>
-          <p:cNvSpPr/>
-          <p:nvPr/>
-        </p:nvSpPr>
-        <p:spPr>
-          <a:xfrm rot="19680000">
-            <a:off x="6752811" y="1853185"/>
-            <a:ext cx="171093" cy="266145"/>
-          </a:xfrm>
-          <a:prstGeom prst="ellipse">
-            <a:avLst/>
-          </a:prstGeom>
-          <a:solidFill>
-            <a:srgbClr val="B8618C"/>
-          </a:solidFill>
-          <a:ln>
-            <a:noFill/>
-          </a:ln>
-        </p:spPr>
-        <p:txBody>
-          <a:bodyPr rtlCol="0" anchor="ctr"/>
-          <a:lstStyle/>
-          <a:p>
-            <a:pPr algn="ctr"/>
-          </a:p>
-        </p:txBody>
-      </p:sp>
-      <p:sp>
-        <p:nvSpPr>
-          <p:cNvPr id="21" name="장식"/>
-          <p:cNvSpPr/>
-          <p:nvPr/>
-        </p:nvSpPr>
-        <p:spPr>
-          <a:xfrm>
-            <a:off x="6868634" y="2068948"/>
-            <a:ext cx="114062" cy="114062"/>
-          </a:xfrm>
-          <a:prstGeom prst="ellipse">
-            <a:avLst/>
-          </a:prstGeom>
-          <a:solidFill>
-            <a:srgbClr val="3F8D3F"/>
-          </a:solidFill>
-          <a:ln>
-            <a:noFill/>
-          </a:ln>
-        </p:spPr>
-        <p:txBody>
-          <a:bodyPr rtlCol="0" anchor="ctr"/>
-          <a:lstStyle/>
-          <a:p>
-            <a:pPr algn="ctr"/>
-          </a:p>
-        </p:txBody>
-      </p:sp>
+        </p:spPr>
+      </p:pic>
       <p:sp>
         <p:nvSpPr>
           <p:cNvPr id="2" name="Title 1"/>
@@ -3866,8 +3329,8 @@
         </p:nvSpPr>
         <p:spPr>
           <a:xfrm>
-            <a:off x="1463003" y="2263140"/>
-            <a:ext cx="9265688" cy="1371600"/>
+            <a:off x="853418" y="2057400"/>
+            <a:ext cx="6095847" cy="1554480"/>
           </a:xfrm>
         </p:spPr>
         <p:txBody>
@@ -3876,7 +3339,7 @@
           </a:bodyPr>
           <a:lstStyle/>
           <a:p>
-            <a:pPr algn="ctr">
+            <a:pPr algn="l">
               <a:lnSpc>
                 <a:spcPct val="105000"/>
               </a:lnSpc>
@@ -3894,14 +3357,14 @@
       </p:sp>
       <p:sp>
         <p:nvSpPr>
-          <p:cNvPr id="22" name="한 줄 문구"/>
+          <p:cNvPr id="4" name="한 줄 문구"/>
           <p:cNvSpPr txBox="1"/>
           <p:nvPr/>
         </p:nvSpPr>
         <p:spPr>
           <a:xfrm>
-            <a:off x="1463003" y="3726180"/>
-            <a:ext cx="9265688" cy="822960"/>
+            <a:off x="853418" y="3749039"/>
+            <a:ext cx="6095847" cy="822960"/>
           </a:xfrm>
           <a:prstGeom prst="rect">
             <a:avLst/>
@@ -3914,7 +3377,7 @@
           </a:bodyPr>
           <a:lstStyle/>
           <a:p>
-            <a:pPr algn="ctr">
+            <a:pPr algn="l">
               <a:lnSpc>
                 <a:spcPct val="115000"/>
               </a:lnSpc>
@@ -3925,21 +3388,21 @@
                   <a:srgbClr val="7B3759"/>
                 </a:solidFill>
               </a:rPr>
-              <a:t>연꽃처럼 깨끗한 마음으로 자라렴</a:t>
-            </a:r>
-          </a:p>
-        </p:txBody>
-      </p:sp>
-      <p:sp>
-        <p:nvSpPr>
-          <p:cNvPr id="23" name="안내 문구"/>
+              <a:t>태어나서 처음 맞은 여름 이야기입니다</a:t>
+            </a:r>
+          </a:p>
+        </p:txBody>
+      </p:sp>
+      <p:sp>
+        <p:nvSpPr>
+          <p:cNvPr id="5" name="안내 문구"/>
           <p:cNvSpPr txBox="1"/>
           <p:nvPr/>
         </p:nvSpPr>
         <p:spPr>
           <a:xfrm>
-            <a:off x="1463003" y="4594860"/>
-            <a:ext cx="9265688" cy="914400"/>
+            <a:off x="853418" y="4617720"/>
+            <a:ext cx="6095847" cy="914400"/>
           </a:xfrm>
           <a:prstGeom prst="rect">
             <a:avLst/>
@@ -3952,7 +3415,7 @@
           </a:bodyPr>
           <a:lstStyle/>
           <a:p>
-            <a:pPr algn="ctr">
+            <a:pPr algn="l">
               <a:lnSpc>
                 <a:spcPct val="115000"/>
               </a:lnSpc>
@@ -3963,11 +3426,11 @@
                   <a:srgbClr val="666666"/>
                 </a:solidFill>
               </a:rPr>
-              <a:t>아기 이름 · 2026. 00. 00</a:t>
-            </a:r>
-          </a:p>
-          <a:p>
-            <a:pPr algn="ctr">
+              <a:t>아기 이름 · 2027. 00. 00</a:t>
+            </a:r>
+          </a:p>
+          <a:p>
+            <a:pPr algn="l">
               <a:lnSpc>
                 <a:spcPct val="115000"/>
               </a:lnSpc>
@@ -4042,528 +3505,6 @@
       </p:sp>
       <p:sp>
         <p:nvSpPr>
-          <p:cNvPr id="4" name="장식"/>
-          <p:cNvSpPr/>
-          <p:nvPr/>
-        </p:nvSpPr>
-        <p:spPr>
-          <a:xfrm>
-            <a:off x="10879531" y="530352"/>
-            <a:ext cx="246888" cy="384048"/>
-          </a:xfrm>
-          <a:prstGeom prst="ellipse">
-            <a:avLst/>
-          </a:prstGeom>
-          <a:solidFill>
-            <a:srgbClr val="B8618C"/>
-          </a:solidFill>
-          <a:ln>
-            <a:noFill/>
-          </a:ln>
-        </p:spPr>
-        <p:txBody>
-          <a:bodyPr rtlCol="0" anchor="ctr"/>
-          <a:lstStyle/>
-          <a:p>
-            <a:pPr algn="ctr"/>
-          </a:p>
-        </p:txBody>
-      </p:sp>
-      <p:sp>
-        <p:nvSpPr>
-          <p:cNvPr id="5" name="장식"/>
-          <p:cNvSpPr/>
-          <p:nvPr/>
-        </p:nvSpPr>
-        <p:spPr>
-          <a:xfrm rot="4320000">
-            <a:off x="11105639" y="694629"/>
-            <a:ext cx="246888" cy="384048"/>
-          </a:xfrm>
-          <a:prstGeom prst="ellipse">
-            <a:avLst/>
-          </a:prstGeom>
-          <a:solidFill>
-            <a:srgbClr val="EED3E0"/>
-          </a:solidFill>
-          <a:ln>
-            <a:noFill/>
-          </a:ln>
-        </p:spPr>
-        <p:txBody>
-          <a:bodyPr rtlCol="0" anchor="ctr"/>
-          <a:lstStyle/>
-          <a:p>
-            <a:pPr algn="ctr"/>
-          </a:p>
-        </p:txBody>
-      </p:sp>
-      <p:sp>
-        <p:nvSpPr>
-          <p:cNvPr id="6" name="장식"/>
-          <p:cNvSpPr/>
-          <p:nvPr/>
-        </p:nvSpPr>
-        <p:spPr>
-          <a:xfrm rot="8640000">
-            <a:off x="11019273" y="960434"/>
-            <a:ext cx="246888" cy="384048"/>
-          </a:xfrm>
-          <a:prstGeom prst="ellipse">
-            <a:avLst/>
-          </a:prstGeom>
-          <a:solidFill>
-            <a:srgbClr val="B8618C"/>
-          </a:solidFill>
-          <a:ln>
-            <a:noFill/>
-          </a:ln>
-        </p:spPr>
-        <p:txBody>
-          <a:bodyPr rtlCol="0" anchor="ctr"/>
-          <a:lstStyle/>
-          <a:p>
-            <a:pPr algn="ctr"/>
-          </a:p>
-        </p:txBody>
-      </p:sp>
-      <p:sp>
-        <p:nvSpPr>
-          <p:cNvPr id="7" name="장식"/>
-          <p:cNvSpPr/>
-          <p:nvPr/>
-        </p:nvSpPr>
-        <p:spPr>
-          <a:xfrm rot="12960000">
-            <a:off x="10739788" y="960434"/>
-            <a:ext cx="246888" cy="384048"/>
-          </a:xfrm>
-          <a:prstGeom prst="ellipse">
-            <a:avLst/>
-          </a:prstGeom>
-          <a:solidFill>
-            <a:srgbClr val="EED3E0"/>
-          </a:solidFill>
-          <a:ln>
-            <a:noFill/>
-          </a:ln>
-        </p:spPr>
-        <p:txBody>
-          <a:bodyPr rtlCol="0" anchor="ctr"/>
-          <a:lstStyle/>
-          <a:p>
-            <a:pPr algn="ctr"/>
-          </a:p>
-        </p:txBody>
-      </p:sp>
-      <p:sp>
-        <p:nvSpPr>
-          <p:cNvPr id="8" name="장식"/>
-          <p:cNvSpPr/>
-          <p:nvPr/>
-        </p:nvSpPr>
-        <p:spPr>
-          <a:xfrm rot="17280000">
-            <a:off x="10653423" y="694629"/>
-            <a:ext cx="246888" cy="384048"/>
-          </a:xfrm>
-          <a:prstGeom prst="ellipse">
-            <a:avLst/>
-          </a:prstGeom>
-          <a:solidFill>
-            <a:srgbClr val="B8618C"/>
-          </a:solidFill>
-          <a:ln>
-            <a:noFill/>
-          </a:ln>
-        </p:spPr>
-        <p:txBody>
-          <a:bodyPr rtlCol="0" anchor="ctr"/>
-          <a:lstStyle/>
-          <a:p>
-            <a:pPr algn="ctr"/>
-          </a:p>
-        </p:txBody>
-      </p:sp>
-      <p:sp>
-        <p:nvSpPr>
-          <p:cNvPr id="9" name="장식"/>
-          <p:cNvSpPr/>
-          <p:nvPr/>
-        </p:nvSpPr>
-        <p:spPr>
-          <a:xfrm>
-            <a:off x="10920679" y="877824"/>
-            <a:ext cx="164592" cy="164592"/>
-          </a:xfrm>
-          <a:prstGeom prst="ellipse">
-            <a:avLst/>
-          </a:prstGeom>
-          <a:solidFill>
-            <a:srgbClr val="3F8D3F"/>
-          </a:solidFill>
-          <a:ln>
-            <a:noFill/>
-          </a:ln>
-        </p:spPr>
-        <p:txBody>
-          <a:bodyPr rtlCol="0" anchor="ctr"/>
-          <a:lstStyle/>
-          <a:p>
-            <a:pPr algn="ctr"/>
-          </a:p>
-        </p:txBody>
-      </p:sp>
-      <p:sp>
-        <p:nvSpPr>
-          <p:cNvPr id="10" name="장식"/>
-          <p:cNvSpPr/>
-          <p:nvPr/>
-        </p:nvSpPr>
-        <p:spPr>
-          <a:xfrm rot="1200000">
-            <a:off x="10478989" y="1163884"/>
-            <a:ext cx="123444" cy="192024"/>
-          </a:xfrm>
-          <a:prstGeom prst="ellipse">
-            <a:avLst/>
-          </a:prstGeom>
-          <a:solidFill>
-            <a:srgbClr val="B8618C"/>
-          </a:solidFill>
-          <a:ln>
-            <a:noFill/>
-          </a:ln>
-        </p:spPr>
-        <p:txBody>
-          <a:bodyPr rtlCol="0" anchor="ctr"/>
-          <a:lstStyle/>
-          <a:p>
-            <a:pPr algn="ctr"/>
-          </a:p>
-        </p:txBody>
-      </p:sp>
-      <p:sp>
-        <p:nvSpPr>
-          <p:cNvPr id="11" name="장식"/>
-          <p:cNvSpPr/>
-          <p:nvPr/>
-        </p:nvSpPr>
-        <p:spPr>
-          <a:xfrm rot="5520000">
-            <a:off x="10557132" y="1279736"/>
-            <a:ext cx="123444" cy="192024"/>
-          </a:xfrm>
-          <a:prstGeom prst="ellipse">
-            <a:avLst/>
-          </a:prstGeom>
-          <a:solidFill>
-            <a:srgbClr val="EED3E0"/>
-          </a:solidFill>
-          <a:ln>
-            <a:noFill/>
-          </a:ln>
-        </p:spPr>
-        <p:txBody>
-          <a:bodyPr rtlCol="0" anchor="ctr"/>
-          <a:lstStyle/>
-          <a:p>
-            <a:pPr algn="ctr"/>
-          </a:p>
-        </p:txBody>
-      </p:sp>
-      <p:sp>
-        <p:nvSpPr>
-          <p:cNvPr id="12" name="장식"/>
-          <p:cNvSpPr/>
-          <p:nvPr/>
-        </p:nvSpPr>
-        <p:spPr>
-          <a:xfrm rot="9840000">
-            <a:off x="10471098" y="1389855"/>
-            <a:ext cx="123444" cy="192024"/>
-          </a:xfrm>
-          <a:prstGeom prst="ellipse">
-            <a:avLst/>
-          </a:prstGeom>
-          <a:solidFill>
-            <a:srgbClr val="B8618C"/>
-          </a:solidFill>
-          <a:ln>
-            <a:noFill/>
-          </a:ln>
-        </p:spPr>
-        <p:txBody>
-          <a:bodyPr rtlCol="0" anchor="ctr"/>
-          <a:lstStyle/>
-          <a:p>
-            <a:pPr algn="ctr"/>
-          </a:p>
-        </p:txBody>
-      </p:sp>
-      <p:sp>
-        <p:nvSpPr>
-          <p:cNvPr id="13" name="장식"/>
-          <p:cNvSpPr/>
-          <p:nvPr/>
-        </p:nvSpPr>
-        <p:spPr>
-          <a:xfrm rot="14160000">
-            <a:off x="10339783" y="1342060"/>
-            <a:ext cx="123444" cy="192024"/>
-          </a:xfrm>
-          <a:prstGeom prst="ellipse">
-            <a:avLst/>
-          </a:prstGeom>
-          <a:solidFill>
-            <a:srgbClr val="EED3E0"/>
-          </a:solidFill>
-          <a:ln>
-            <a:noFill/>
-          </a:ln>
-        </p:spPr>
-        <p:txBody>
-          <a:bodyPr rtlCol="0" anchor="ctr"/>
-          <a:lstStyle/>
-          <a:p>
-            <a:pPr algn="ctr"/>
-          </a:p>
-        </p:txBody>
-      </p:sp>
-      <p:sp>
-        <p:nvSpPr>
-          <p:cNvPr id="14" name="장식"/>
-          <p:cNvSpPr/>
-          <p:nvPr/>
-        </p:nvSpPr>
-        <p:spPr>
-          <a:xfrm rot="18480000">
-            <a:off x="10344660" y="1202403"/>
-            <a:ext cx="123444" cy="192024"/>
-          </a:xfrm>
-          <a:prstGeom prst="ellipse">
-            <a:avLst/>
-          </a:prstGeom>
-          <a:solidFill>
-            <a:srgbClr val="B8618C"/>
-          </a:solidFill>
-          <a:ln>
-            <a:noFill/>
-          </a:ln>
-        </p:spPr>
-        <p:txBody>
-          <a:bodyPr rtlCol="0" anchor="ctr"/>
-          <a:lstStyle/>
-          <a:p>
-            <a:pPr algn="ctr"/>
-          </a:p>
-        </p:txBody>
-      </p:sp>
-      <p:sp>
-        <p:nvSpPr>
-          <p:cNvPr id="15" name="장식"/>
-          <p:cNvSpPr/>
-          <p:nvPr/>
-        </p:nvSpPr>
-        <p:spPr>
-          <a:xfrm>
-            <a:off x="10458907" y="1330452"/>
-            <a:ext cx="82296" cy="82296"/>
-          </a:xfrm>
-          <a:prstGeom prst="ellipse">
-            <a:avLst/>
-          </a:prstGeom>
-          <a:solidFill>
-            <a:srgbClr val="3F8D3F"/>
-          </a:solidFill>
-          <a:ln>
-            <a:noFill/>
-          </a:ln>
-        </p:spPr>
-        <p:txBody>
-          <a:bodyPr rtlCol="0" anchor="ctr"/>
-          <a:lstStyle/>
-          <a:p>
-            <a:pPr algn="ctr"/>
-          </a:p>
-        </p:txBody>
-      </p:sp>
-      <p:sp>
-        <p:nvSpPr>
-          <p:cNvPr id="16" name="장식"/>
-          <p:cNvSpPr/>
-          <p:nvPr/>
-        </p:nvSpPr>
-        <p:spPr>
-          <a:xfrm rot="2400000">
-            <a:off x="11518232" y="1260178"/>
-            <a:ext cx="103692" cy="161300"/>
-          </a:xfrm>
-          <a:prstGeom prst="ellipse">
-            <a:avLst/>
-          </a:prstGeom>
-          <a:solidFill>
-            <a:srgbClr val="B8618C"/>
-          </a:solidFill>
-          <a:ln>
-            <a:noFill/>
-          </a:ln>
-        </p:spPr>
-        <p:txBody>
-          <a:bodyPr rtlCol="0" anchor="ctr"/>
-          <a:lstStyle/>
-          <a:p>
-            <a:pPr algn="ctr"/>
-          </a:p>
-        </p:txBody>
-      </p:sp>
-      <p:sp>
-        <p:nvSpPr>
-          <p:cNvPr id="17" name="장식"/>
-          <p:cNvSpPr/>
-          <p:nvPr/>
-        </p:nvSpPr>
-        <p:spPr>
-          <a:xfrm rot="6720000">
-            <a:off x="11546630" y="1374075"/>
-            <a:ext cx="103692" cy="161300"/>
-          </a:xfrm>
-          <a:prstGeom prst="ellipse">
-            <a:avLst/>
-          </a:prstGeom>
-          <a:solidFill>
-            <a:srgbClr val="EED3E0"/>
-          </a:solidFill>
-          <a:ln>
-            <a:noFill/>
-          </a:ln>
-        </p:spPr>
-        <p:txBody>
-          <a:bodyPr rtlCol="0" anchor="ctr"/>
-          <a:lstStyle/>
-          <a:p>
-            <a:pPr algn="ctr"/>
-          </a:p>
-        </p:txBody>
-      </p:sp>
-      <p:sp>
-        <p:nvSpPr>
-          <p:cNvPr id="18" name="장식"/>
-          <p:cNvSpPr/>
-          <p:nvPr/>
-        </p:nvSpPr>
-        <p:spPr>
-          <a:xfrm rot="11040000">
-            <a:off x="11447083" y="1436279"/>
-            <a:ext cx="103692" cy="161300"/>
-          </a:xfrm>
-          <a:prstGeom prst="ellipse">
-            <a:avLst/>
-          </a:prstGeom>
-          <a:solidFill>
-            <a:srgbClr val="B8618C"/>
-          </a:solidFill>
-          <a:ln>
-            <a:noFill/>
-          </a:ln>
-        </p:spPr>
-        <p:txBody>
-          <a:bodyPr rtlCol="0" anchor="ctr"/>
-          <a:lstStyle/>
-          <a:p>
-            <a:pPr algn="ctr"/>
-          </a:p>
-        </p:txBody>
-      </p:sp>
-      <p:sp>
-        <p:nvSpPr>
-          <p:cNvPr id="19" name="장식"/>
-          <p:cNvSpPr/>
-          <p:nvPr/>
-        </p:nvSpPr>
-        <p:spPr>
-          <a:xfrm rot="15360000">
-            <a:off x="11357162" y="1360826"/>
-            <a:ext cx="103692" cy="161300"/>
-          </a:xfrm>
-          <a:prstGeom prst="ellipse">
-            <a:avLst/>
-          </a:prstGeom>
-          <a:solidFill>
-            <a:srgbClr val="EED3E0"/>
-          </a:solidFill>
-          <a:ln>
-            <a:noFill/>
-          </a:ln>
-        </p:spPr>
-        <p:txBody>
-          <a:bodyPr rtlCol="0" anchor="ctr"/>
-          <a:lstStyle/>
-          <a:p>
-            <a:pPr algn="ctr"/>
-          </a:p>
-        </p:txBody>
-      </p:sp>
-      <p:sp>
-        <p:nvSpPr>
-          <p:cNvPr id="20" name="장식"/>
-          <p:cNvSpPr/>
-          <p:nvPr/>
-        </p:nvSpPr>
-        <p:spPr>
-          <a:xfrm rot="19680000">
-            <a:off x="11401134" y="1251990"/>
-            <a:ext cx="103692" cy="161300"/>
-          </a:xfrm>
-          <a:prstGeom prst="ellipse">
-            <a:avLst/>
-          </a:prstGeom>
-          <a:solidFill>
-            <a:srgbClr val="B8618C"/>
-          </a:solidFill>
-          <a:ln>
-            <a:noFill/>
-          </a:ln>
-        </p:spPr>
-        <p:txBody>
-          <a:bodyPr rtlCol="0" anchor="ctr"/>
-          <a:lstStyle/>
-          <a:p>
-            <a:pPr algn="ctr"/>
-          </a:p>
-        </p:txBody>
-      </p:sp>
-      <p:sp>
-        <p:nvSpPr>
-          <p:cNvPr id="21" name="장식"/>
-          <p:cNvSpPr/>
-          <p:nvPr/>
-        </p:nvSpPr>
-        <p:spPr>
-          <a:xfrm>
-            <a:off x="11471330" y="1382755"/>
-            <a:ext cx="69128" cy="69128"/>
-          </a:xfrm>
-          <a:prstGeom prst="ellipse">
-            <a:avLst/>
-          </a:prstGeom>
-          <a:solidFill>
-            <a:srgbClr val="3F8D3F"/>
-          </a:solidFill>
-          <a:ln>
-            <a:noFill/>
-          </a:ln>
-        </p:spPr>
-        <p:txBody>
-          <a:bodyPr rtlCol="0" anchor="ctr"/>
-          <a:lstStyle/>
-          <a:p>
-            <a:pPr algn="ctr"/>
-          </a:p>
-        </p:txBody>
-      </p:sp>
-      <p:sp>
-        <p:nvSpPr>
           <p:cNvPr id="2" name="Title 1"/>
           <p:cNvSpPr>
             <a:spLocks noGrp="1"/>
@@ -4602,7 +3543,7 @@
       </p:sp>
       <p:sp>
         <p:nvSpPr>
-          <p:cNvPr id="22" name="사진 자리"/>
+          <p:cNvPr id="4" name="사진 자리"/>
           <p:cNvSpPr/>
           <p:nvPr/>
         </p:nvSpPr>
@@ -4650,7 +3591,7 @@
       </p:sp>
       <p:graphicFrame>
         <p:nvGraphicFramePr>
-          <p:cNvPr id="23" name="표"/>
+          <p:cNvPr id="5" name="표"/>
           <p:cNvGraphicFramePr>
             <a:graphicFrameLocks noGrp="1"/>
           </p:cNvGraphicFramePr>
@@ -5297,528 +4238,6 @@
       </p:sp>
       <p:sp>
         <p:nvSpPr>
-          <p:cNvPr id="4" name="장식"/>
-          <p:cNvSpPr/>
-          <p:nvPr/>
-        </p:nvSpPr>
-        <p:spPr>
-          <a:xfrm>
-            <a:off x="10879531" y="530352"/>
-            <a:ext cx="246888" cy="384048"/>
-          </a:xfrm>
-          <a:prstGeom prst="ellipse">
-            <a:avLst/>
-          </a:prstGeom>
-          <a:solidFill>
-            <a:srgbClr val="B8618C"/>
-          </a:solidFill>
-          <a:ln>
-            <a:noFill/>
-          </a:ln>
-        </p:spPr>
-        <p:txBody>
-          <a:bodyPr rtlCol="0" anchor="ctr"/>
-          <a:lstStyle/>
-          <a:p>
-            <a:pPr algn="ctr"/>
-          </a:p>
-        </p:txBody>
-      </p:sp>
-      <p:sp>
-        <p:nvSpPr>
-          <p:cNvPr id="5" name="장식"/>
-          <p:cNvSpPr/>
-          <p:nvPr/>
-        </p:nvSpPr>
-        <p:spPr>
-          <a:xfrm rot="4320000">
-            <a:off x="11105639" y="694629"/>
-            <a:ext cx="246888" cy="384048"/>
-          </a:xfrm>
-          <a:prstGeom prst="ellipse">
-            <a:avLst/>
-          </a:prstGeom>
-          <a:solidFill>
-            <a:srgbClr val="EED3E0"/>
-          </a:solidFill>
-          <a:ln>
-            <a:noFill/>
-          </a:ln>
-        </p:spPr>
-        <p:txBody>
-          <a:bodyPr rtlCol="0" anchor="ctr"/>
-          <a:lstStyle/>
-          <a:p>
-            <a:pPr algn="ctr"/>
-          </a:p>
-        </p:txBody>
-      </p:sp>
-      <p:sp>
-        <p:nvSpPr>
-          <p:cNvPr id="6" name="장식"/>
-          <p:cNvSpPr/>
-          <p:nvPr/>
-        </p:nvSpPr>
-        <p:spPr>
-          <a:xfrm rot="8640000">
-            <a:off x="11019273" y="960434"/>
-            <a:ext cx="246888" cy="384048"/>
-          </a:xfrm>
-          <a:prstGeom prst="ellipse">
-            <a:avLst/>
-          </a:prstGeom>
-          <a:solidFill>
-            <a:srgbClr val="B8618C"/>
-          </a:solidFill>
-          <a:ln>
-            <a:noFill/>
-          </a:ln>
-        </p:spPr>
-        <p:txBody>
-          <a:bodyPr rtlCol="0" anchor="ctr"/>
-          <a:lstStyle/>
-          <a:p>
-            <a:pPr algn="ctr"/>
-          </a:p>
-        </p:txBody>
-      </p:sp>
-      <p:sp>
-        <p:nvSpPr>
-          <p:cNvPr id="7" name="장식"/>
-          <p:cNvSpPr/>
-          <p:nvPr/>
-        </p:nvSpPr>
-        <p:spPr>
-          <a:xfrm rot="12960000">
-            <a:off x="10739788" y="960434"/>
-            <a:ext cx="246888" cy="384048"/>
-          </a:xfrm>
-          <a:prstGeom prst="ellipse">
-            <a:avLst/>
-          </a:prstGeom>
-          <a:solidFill>
-            <a:srgbClr val="EED3E0"/>
-          </a:solidFill>
-          <a:ln>
-            <a:noFill/>
-          </a:ln>
-        </p:spPr>
-        <p:txBody>
-          <a:bodyPr rtlCol="0" anchor="ctr"/>
-          <a:lstStyle/>
-          <a:p>
-            <a:pPr algn="ctr"/>
-          </a:p>
-        </p:txBody>
-      </p:sp>
-      <p:sp>
-        <p:nvSpPr>
-          <p:cNvPr id="8" name="장식"/>
-          <p:cNvSpPr/>
-          <p:nvPr/>
-        </p:nvSpPr>
-        <p:spPr>
-          <a:xfrm rot="17280000">
-            <a:off x="10653423" y="694629"/>
-            <a:ext cx="246888" cy="384048"/>
-          </a:xfrm>
-          <a:prstGeom prst="ellipse">
-            <a:avLst/>
-          </a:prstGeom>
-          <a:solidFill>
-            <a:srgbClr val="B8618C"/>
-          </a:solidFill>
-          <a:ln>
-            <a:noFill/>
-          </a:ln>
-        </p:spPr>
-        <p:txBody>
-          <a:bodyPr rtlCol="0" anchor="ctr"/>
-          <a:lstStyle/>
-          <a:p>
-            <a:pPr algn="ctr"/>
-          </a:p>
-        </p:txBody>
-      </p:sp>
-      <p:sp>
-        <p:nvSpPr>
-          <p:cNvPr id="9" name="장식"/>
-          <p:cNvSpPr/>
-          <p:nvPr/>
-        </p:nvSpPr>
-        <p:spPr>
-          <a:xfrm>
-            <a:off x="10920679" y="877824"/>
-            <a:ext cx="164592" cy="164592"/>
-          </a:xfrm>
-          <a:prstGeom prst="ellipse">
-            <a:avLst/>
-          </a:prstGeom>
-          <a:solidFill>
-            <a:srgbClr val="3F8D3F"/>
-          </a:solidFill>
-          <a:ln>
-            <a:noFill/>
-          </a:ln>
-        </p:spPr>
-        <p:txBody>
-          <a:bodyPr rtlCol="0" anchor="ctr"/>
-          <a:lstStyle/>
-          <a:p>
-            <a:pPr algn="ctr"/>
-          </a:p>
-        </p:txBody>
-      </p:sp>
-      <p:sp>
-        <p:nvSpPr>
-          <p:cNvPr id="10" name="장식"/>
-          <p:cNvSpPr/>
-          <p:nvPr/>
-        </p:nvSpPr>
-        <p:spPr>
-          <a:xfrm rot="1200000">
-            <a:off x="10478989" y="1163884"/>
-            <a:ext cx="123444" cy="192024"/>
-          </a:xfrm>
-          <a:prstGeom prst="ellipse">
-            <a:avLst/>
-          </a:prstGeom>
-          <a:solidFill>
-            <a:srgbClr val="B8618C"/>
-          </a:solidFill>
-          <a:ln>
-            <a:noFill/>
-          </a:ln>
-        </p:spPr>
-        <p:txBody>
-          <a:bodyPr rtlCol="0" anchor="ctr"/>
-          <a:lstStyle/>
-          <a:p>
-            <a:pPr algn="ctr"/>
-          </a:p>
-        </p:txBody>
-      </p:sp>
-      <p:sp>
-        <p:nvSpPr>
-          <p:cNvPr id="11" name="장식"/>
-          <p:cNvSpPr/>
-          <p:nvPr/>
-        </p:nvSpPr>
-        <p:spPr>
-          <a:xfrm rot="5520000">
-            <a:off x="10557132" y="1279736"/>
-            <a:ext cx="123444" cy="192024"/>
-          </a:xfrm>
-          <a:prstGeom prst="ellipse">
-            <a:avLst/>
-          </a:prstGeom>
-          <a:solidFill>
-            <a:srgbClr val="EED3E0"/>
-          </a:solidFill>
-          <a:ln>
-            <a:noFill/>
-          </a:ln>
-        </p:spPr>
-        <p:txBody>
-          <a:bodyPr rtlCol="0" anchor="ctr"/>
-          <a:lstStyle/>
-          <a:p>
-            <a:pPr algn="ctr"/>
-          </a:p>
-        </p:txBody>
-      </p:sp>
-      <p:sp>
-        <p:nvSpPr>
-          <p:cNvPr id="12" name="장식"/>
-          <p:cNvSpPr/>
-          <p:nvPr/>
-        </p:nvSpPr>
-        <p:spPr>
-          <a:xfrm rot="9840000">
-            <a:off x="10471098" y="1389855"/>
-            <a:ext cx="123444" cy="192024"/>
-          </a:xfrm>
-          <a:prstGeom prst="ellipse">
-            <a:avLst/>
-          </a:prstGeom>
-          <a:solidFill>
-            <a:srgbClr val="B8618C"/>
-          </a:solidFill>
-          <a:ln>
-            <a:noFill/>
-          </a:ln>
-        </p:spPr>
-        <p:txBody>
-          <a:bodyPr rtlCol="0" anchor="ctr"/>
-          <a:lstStyle/>
-          <a:p>
-            <a:pPr algn="ctr"/>
-          </a:p>
-        </p:txBody>
-      </p:sp>
-      <p:sp>
-        <p:nvSpPr>
-          <p:cNvPr id="13" name="장식"/>
-          <p:cNvSpPr/>
-          <p:nvPr/>
-        </p:nvSpPr>
-        <p:spPr>
-          <a:xfrm rot="14160000">
-            <a:off x="10339783" y="1342060"/>
-            <a:ext cx="123444" cy="192024"/>
-          </a:xfrm>
-          <a:prstGeom prst="ellipse">
-            <a:avLst/>
-          </a:prstGeom>
-          <a:solidFill>
-            <a:srgbClr val="EED3E0"/>
-          </a:solidFill>
-          <a:ln>
-            <a:noFill/>
-          </a:ln>
-        </p:spPr>
-        <p:txBody>
-          <a:bodyPr rtlCol="0" anchor="ctr"/>
-          <a:lstStyle/>
-          <a:p>
-            <a:pPr algn="ctr"/>
-          </a:p>
-        </p:txBody>
-      </p:sp>
-      <p:sp>
-        <p:nvSpPr>
-          <p:cNvPr id="14" name="장식"/>
-          <p:cNvSpPr/>
-          <p:nvPr/>
-        </p:nvSpPr>
-        <p:spPr>
-          <a:xfrm rot="18480000">
-            <a:off x="10344660" y="1202403"/>
-            <a:ext cx="123444" cy="192024"/>
-          </a:xfrm>
-          <a:prstGeom prst="ellipse">
-            <a:avLst/>
-          </a:prstGeom>
-          <a:solidFill>
-            <a:srgbClr val="B8618C"/>
-          </a:solidFill>
-          <a:ln>
-            <a:noFill/>
-          </a:ln>
-        </p:spPr>
-        <p:txBody>
-          <a:bodyPr rtlCol="0" anchor="ctr"/>
-          <a:lstStyle/>
-          <a:p>
-            <a:pPr algn="ctr"/>
-          </a:p>
-        </p:txBody>
-      </p:sp>
-      <p:sp>
-        <p:nvSpPr>
-          <p:cNvPr id="15" name="장식"/>
-          <p:cNvSpPr/>
-          <p:nvPr/>
-        </p:nvSpPr>
-        <p:spPr>
-          <a:xfrm>
-            <a:off x="10458907" y="1330452"/>
-            <a:ext cx="82296" cy="82296"/>
-          </a:xfrm>
-          <a:prstGeom prst="ellipse">
-            <a:avLst/>
-          </a:prstGeom>
-          <a:solidFill>
-            <a:srgbClr val="3F8D3F"/>
-          </a:solidFill>
-          <a:ln>
-            <a:noFill/>
-          </a:ln>
-        </p:spPr>
-        <p:txBody>
-          <a:bodyPr rtlCol="0" anchor="ctr"/>
-          <a:lstStyle/>
-          <a:p>
-            <a:pPr algn="ctr"/>
-          </a:p>
-        </p:txBody>
-      </p:sp>
-      <p:sp>
-        <p:nvSpPr>
-          <p:cNvPr id="16" name="장식"/>
-          <p:cNvSpPr/>
-          <p:nvPr/>
-        </p:nvSpPr>
-        <p:spPr>
-          <a:xfrm rot="2400000">
-            <a:off x="11518232" y="1260178"/>
-            <a:ext cx="103692" cy="161300"/>
-          </a:xfrm>
-          <a:prstGeom prst="ellipse">
-            <a:avLst/>
-          </a:prstGeom>
-          <a:solidFill>
-            <a:srgbClr val="B8618C"/>
-          </a:solidFill>
-          <a:ln>
-            <a:noFill/>
-          </a:ln>
-        </p:spPr>
-        <p:txBody>
-          <a:bodyPr rtlCol="0" anchor="ctr"/>
-          <a:lstStyle/>
-          <a:p>
-            <a:pPr algn="ctr"/>
-          </a:p>
-        </p:txBody>
-      </p:sp>
-      <p:sp>
-        <p:nvSpPr>
-          <p:cNvPr id="17" name="장식"/>
-          <p:cNvSpPr/>
-          <p:nvPr/>
-        </p:nvSpPr>
-        <p:spPr>
-          <a:xfrm rot="6720000">
-            <a:off x="11546630" y="1374075"/>
-            <a:ext cx="103692" cy="161300"/>
-          </a:xfrm>
-          <a:prstGeom prst="ellipse">
-            <a:avLst/>
-          </a:prstGeom>
-          <a:solidFill>
-            <a:srgbClr val="EED3E0"/>
-          </a:solidFill>
-          <a:ln>
-            <a:noFill/>
-          </a:ln>
-        </p:spPr>
-        <p:txBody>
-          <a:bodyPr rtlCol="0" anchor="ctr"/>
-          <a:lstStyle/>
-          <a:p>
-            <a:pPr algn="ctr"/>
-          </a:p>
-        </p:txBody>
-      </p:sp>
-      <p:sp>
-        <p:nvSpPr>
-          <p:cNvPr id="18" name="장식"/>
-          <p:cNvSpPr/>
-          <p:nvPr/>
-        </p:nvSpPr>
-        <p:spPr>
-          <a:xfrm rot="11040000">
-            <a:off x="11447083" y="1436279"/>
-            <a:ext cx="103692" cy="161300"/>
-          </a:xfrm>
-          <a:prstGeom prst="ellipse">
-            <a:avLst/>
-          </a:prstGeom>
-          <a:solidFill>
-            <a:srgbClr val="B8618C"/>
-          </a:solidFill>
-          <a:ln>
-            <a:noFill/>
-          </a:ln>
-        </p:spPr>
-        <p:txBody>
-          <a:bodyPr rtlCol="0" anchor="ctr"/>
-          <a:lstStyle/>
-          <a:p>
-            <a:pPr algn="ctr"/>
-          </a:p>
-        </p:txBody>
-      </p:sp>
-      <p:sp>
-        <p:nvSpPr>
-          <p:cNvPr id="19" name="장식"/>
-          <p:cNvSpPr/>
-          <p:nvPr/>
-        </p:nvSpPr>
-        <p:spPr>
-          <a:xfrm rot="15360000">
-            <a:off x="11357162" y="1360826"/>
-            <a:ext cx="103692" cy="161300"/>
-          </a:xfrm>
-          <a:prstGeom prst="ellipse">
-            <a:avLst/>
-          </a:prstGeom>
-          <a:solidFill>
-            <a:srgbClr val="EED3E0"/>
-          </a:solidFill>
-          <a:ln>
-            <a:noFill/>
-          </a:ln>
-        </p:spPr>
-        <p:txBody>
-          <a:bodyPr rtlCol="0" anchor="ctr"/>
-          <a:lstStyle/>
-          <a:p>
-            <a:pPr algn="ctr"/>
-          </a:p>
-        </p:txBody>
-      </p:sp>
-      <p:sp>
-        <p:nvSpPr>
-          <p:cNvPr id="20" name="장식"/>
-          <p:cNvSpPr/>
-          <p:nvPr/>
-        </p:nvSpPr>
-        <p:spPr>
-          <a:xfrm rot="19680000">
-            <a:off x="11401134" y="1251990"/>
-            <a:ext cx="103692" cy="161300"/>
-          </a:xfrm>
-          <a:prstGeom prst="ellipse">
-            <a:avLst/>
-          </a:prstGeom>
-          <a:solidFill>
-            <a:srgbClr val="B8618C"/>
-          </a:solidFill>
-          <a:ln>
-            <a:noFill/>
-          </a:ln>
-        </p:spPr>
-        <p:txBody>
-          <a:bodyPr rtlCol="0" anchor="ctr"/>
-          <a:lstStyle/>
-          <a:p>
-            <a:pPr algn="ctr"/>
-          </a:p>
-        </p:txBody>
-      </p:sp>
-      <p:sp>
-        <p:nvSpPr>
-          <p:cNvPr id="21" name="장식"/>
-          <p:cNvSpPr/>
-          <p:nvPr/>
-        </p:nvSpPr>
-        <p:spPr>
-          <a:xfrm>
-            <a:off x="11471330" y="1382755"/>
-            <a:ext cx="69128" cy="69128"/>
-          </a:xfrm>
-          <a:prstGeom prst="ellipse">
-            <a:avLst/>
-          </a:prstGeom>
-          <a:solidFill>
-            <a:srgbClr val="3F8D3F"/>
-          </a:solidFill>
-          <a:ln>
-            <a:noFill/>
-          </a:ln>
-        </p:spPr>
-        <p:txBody>
-          <a:bodyPr rtlCol="0" anchor="ctr"/>
-          <a:lstStyle/>
-          <a:p>
-            <a:pPr algn="ctr"/>
-          </a:p>
-        </p:txBody>
-      </p:sp>
-      <p:sp>
-        <p:nvSpPr>
           <p:cNvPr id="2" name="Title 1"/>
           <p:cNvSpPr>
             <a:spLocks noGrp="1"/>
@@ -5857,7 +4276,7 @@
       </p:sp>
       <p:sp>
         <p:nvSpPr>
-          <p:cNvPr id="22" name="타임라인 선"/>
+          <p:cNvPr id="4" name="타임라인 선"/>
           <p:cNvSpPr/>
           <p:nvPr/>
         </p:nvSpPr>
@@ -5886,7 +4305,7 @@
       </p:sp>
       <p:sp>
         <p:nvSpPr>
-          <p:cNvPr id="23" name="때 1"/>
+          <p:cNvPr id="5" name="때 1"/>
           <p:cNvSpPr/>
           <p:nvPr/>
         </p:nvSpPr>
@@ -5917,7 +4336,7 @@
       </p:sp>
       <p:sp>
         <p:nvSpPr>
-          <p:cNvPr id="24" name="TextBox 23"/>
+          <p:cNvPr id="6" name="TextBox 5"/>
           <p:cNvSpPr txBox="1"/>
           <p:nvPr/>
         </p:nvSpPr>
@@ -5955,7 +4374,7 @@
       </p:sp>
       <p:sp>
         <p:nvSpPr>
-          <p:cNvPr id="25" name="TextBox 24"/>
+          <p:cNvPr id="7" name="TextBox 6"/>
           <p:cNvSpPr txBox="1"/>
           <p:nvPr/>
         </p:nvSpPr>
@@ -5993,7 +4412,7 @@
       </p:sp>
       <p:sp>
         <p:nvSpPr>
-          <p:cNvPr id="26" name="TextBox 25"/>
+          <p:cNvPr id="8" name="TextBox 7"/>
           <p:cNvSpPr txBox="1"/>
           <p:nvPr/>
         </p:nvSpPr>
@@ -6031,7 +4450,7 @@
       </p:sp>
       <p:sp>
         <p:nvSpPr>
-          <p:cNvPr id="27" name="때 2"/>
+          <p:cNvPr id="9" name="때 2"/>
           <p:cNvSpPr/>
           <p:nvPr/>
         </p:nvSpPr>
@@ -6062,7 +4481,7 @@
       </p:sp>
       <p:sp>
         <p:nvSpPr>
-          <p:cNvPr id="28" name="TextBox 27"/>
+          <p:cNvPr id="10" name="TextBox 9"/>
           <p:cNvSpPr txBox="1"/>
           <p:nvPr/>
         </p:nvSpPr>
@@ -6100,7 +4519,7 @@
       </p:sp>
       <p:sp>
         <p:nvSpPr>
-          <p:cNvPr id="29" name="TextBox 28"/>
+          <p:cNvPr id="11" name="TextBox 10"/>
           <p:cNvSpPr txBox="1"/>
           <p:nvPr/>
         </p:nvSpPr>
@@ -6138,7 +4557,7 @@
       </p:sp>
       <p:sp>
         <p:nvSpPr>
-          <p:cNvPr id="30" name="TextBox 29"/>
+          <p:cNvPr id="12" name="TextBox 11"/>
           <p:cNvSpPr txBox="1"/>
           <p:nvPr/>
         </p:nvSpPr>
@@ -6176,7 +4595,7 @@
       </p:sp>
       <p:sp>
         <p:nvSpPr>
-          <p:cNvPr id="31" name="때 3"/>
+          <p:cNvPr id="13" name="때 3"/>
           <p:cNvSpPr/>
           <p:nvPr/>
         </p:nvSpPr>
@@ -6207,7 +4626,7 @@
       </p:sp>
       <p:sp>
         <p:nvSpPr>
-          <p:cNvPr id="32" name="TextBox 31"/>
+          <p:cNvPr id="14" name="TextBox 13"/>
           <p:cNvSpPr txBox="1"/>
           <p:nvPr/>
         </p:nvSpPr>
@@ -6245,7 +4664,7 @@
       </p:sp>
       <p:sp>
         <p:nvSpPr>
-          <p:cNvPr id="33" name="TextBox 32"/>
+          <p:cNvPr id="15" name="TextBox 14"/>
           <p:cNvSpPr txBox="1"/>
           <p:nvPr/>
         </p:nvSpPr>
@@ -6283,7 +4702,7 @@
       </p:sp>
       <p:sp>
         <p:nvSpPr>
-          <p:cNvPr id="34" name="TextBox 33"/>
+          <p:cNvPr id="16" name="TextBox 15"/>
           <p:cNvSpPr txBox="1"/>
           <p:nvPr/>
         </p:nvSpPr>
@@ -6321,7 +4740,7 @@
       </p:sp>
       <p:sp>
         <p:nvSpPr>
-          <p:cNvPr id="35" name="때 4"/>
+          <p:cNvPr id="17" name="때 4"/>
           <p:cNvSpPr/>
           <p:nvPr/>
         </p:nvSpPr>
@@ -6352,7 +4771,7 @@
       </p:sp>
       <p:sp>
         <p:nvSpPr>
-          <p:cNvPr id="36" name="TextBox 35"/>
+          <p:cNvPr id="18" name="TextBox 17"/>
           <p:cNvSpPr txBox="1"/>
           <p:nvPr/>
         </p:nvSpPr>
@@ -6390,7 +4809,7 @@
       </p:sp>
       <p:sp>
         <p:nvSpPr>
-          <p:cNvPr id="37" name="TextBox 36"/>
+          <p:cNvPr id="19" name="TextBox 18"/>
           <p:cNvSpPr txBox="1"/>
           <p:nvPr/>
         </p:nvSpPr>
@@ -6428,7 +4847,7 @@
       </p:sp>
       <p:sp>
         <p:nvSpPr>
-          <p:cNvPr id="38" name="TextBox 37"/>
+          <p:cNvPr id="20" name="TextBox 19"/>
           <p:cNvSpPr txBox="1"/>
           <p:nvPr/>
         </p:nvSpPr>
@@ -6523,528 +4942,6 @@
       </p:sp>
       <p:sp>
         <p:nvSpPr>
-          <p:cNvPr id="4" name="장식"/>
-          <p:cNvSpPr/>
-          <p:nvPr/>
-        </p:nvSpPr>
-        <p:spPr>
-          <a:xfrm>
-            <a:off x="10879531" y="530352"/>
-            <a:ext cx="246888" cy="384048"/>
-          </a:xfrm>
-          <a:prstGeom prst="ellipse">
-            <a:avLst/>
-          </a:prstGeom>
-          <a:solidFill>
-            <a:srgbClr val="B8618C"/>
-          </a:solidFill>
-          <a:ln>
-            <a:noFill/>
-          </a:ln>
-        </p:spPr>
-        <p:txBody>
-          <a:bodyPr rtlCol="0" anchor="ctr"/>
-          <a:lstStyle/>
-          <a:p>
-            <a:pPr algn="ctr"/>
-          </a:p>
-        </p:txBody>
-      </p:sp>
-      <p:sp>
-        <p:nvSpPr>
-          <p:cNvPr id="5" name="장식"/>
-          <p:cNvSpPr/>
-          <p:nvPr/>
-        </p:nvSpPr>
-        <p:spPr>
-          <a:xfrm rot="4320000">
-            <a:off x="11105639" y="694629"/>
-            <a:ext cx="246888" cy="384048"/>
-          </a:xfrm>
-          <a:prstGeom prst="ellipse">
-            <a:avLst/>
-          </a:prstGeom>
-          <a:solidFill>
-            <a:srgbClr val="EED3E0"/>
-          </a:solidFill>
-          <a:ln>
-            <a:noFill/>
-          </a:ln>
-        </p:spPr>
-        <p:txBody>
-          <a:bodyPr rtlCol="0" anchor="ctr"/>
-          <a:lstStyle/>
-          <a:p>
-            <a:pPr algn="ctr"/>
-          </a:p>
-        </p:txBody>
-      </p:sp>
-      <p:sp>
-        <p:nvSpPr>
-          <p:cNvPr id="6" name="장식"/>
-          <p:cNvSpPr/>
-          <p:nvPr/>
-        </p:nvSpPr>
-        <p:spPr>
-          <a:xfrm rot="8640000">
-            <a:off x="11019273" y="960434"/>
-            <a:ext cx="246888" cy="384048"/>
-          </a:xfrm>
-          <a:prstGeom prst="ellipse">
-            <a:avLst/>
-          </a:prstGeom>
-          <a:solidFill>
-            <a:srgbClr val="B8618C"/>
-          </a:solidFill>
-          <a:ln>
-            <a:noFill/>
-          </a:ln>
-        </p:spPr>
-        <p:txBody>
-          <a:bodyPr rtlCol="0" anchor="ctr"/>
-          <a:lstStyle/>
-          <a:p>
-            <a:pPr algn="ctr"/>
-          </a:p>
-        </p:txBody>
-      </p:sp>
-      <p:sp>
-        <p:nvSpPr>
-          <p:cNvPr id="7" name="장식"/>
-          <p:cNvSpPr/>
-          <p:nvPr/>
-        </p:nvSpPr>
-        <p:spPr>
-          <a:xfrm rot="12960000">
-            <a:off x="10739788" y="960434"/>
-            <a:ext cx="246888" cy="384048"/>
-          </a:xfrm>
-          <a:prstGeom prst="ellipse">
-            <a:avLst/>
-          </a:prstGeom>
-          <a:solidFill>
-            <a:srgbClr val="EED3E0"/>
-          </a:solidFill>
-          <a:ln>
-            <a:noFill/>
-          </a:ln>
-        </p:spPr>
-        <p:txBody>
-          <a:bodyPr rtlCol="0" anchor="ctr"/>
-          <a:lstStyle/>
-          <a:p>
-            <a:pPr algn="ctr"/>
-          </a:p>
-        </p:txBody>
-      </p:sp>
-      <p:sp>
-        <p:nvSpPr>
-          <p:cNvPr id="8" name="장식"/>
-          <p:cNvSpPr/>
-          <p:nvPr/>
-        </p:nvSpPr>
-        <p:spPr>
-          <a:xfrm rot="17280000">
-            <a:off x="10653423" y="694629"/>
-            <a:ext cx="246888" cy="384048"/>
-          </a:xfrm>
-          <a:prstGeom prst="ellipse">
-            <a:avLst/>
-          </a:prstGeom>
-          <a:solidFill>
-            <a:srgbClr val="B8618C"/>
-          </a:solidFill>
-          <a:ln>
-            <a:noFill/>
-          </a:ln>
-        </p:spPr>
-        <p:txBody>
-          <a:bodyPr rtlCol="0" anchor="ctr"/>
-          <a:lstStyle/>
-          <a:p>
-            <a:pPr algn="ctr"/>
-          </a:p>
-        </p:txBody>
-      </p:sp>
-      <p:sp>
-        <p:nvSpPr>
-          <p:cNvPr id="9" name="장식"/>
-          <p:cNvSpPr/>
-          <p:nvPr/>
-        </p:nvSpPr>
-        <p:spPr>
-          <a:xfrm>
-            <a:off x="10920679" y="877824"/>
-            <a:ext cx="164592" cy="164592"/>
-          </a:xfrm>
-          <a:prstGeom prst="ellipse">
-            <a:avLst/>
-          </a:prstGeom>
-          <a:solidFill>
-            <a:srgbClr val="3F8D3F"/>
-          </a:solidFill>
-          <a:ln>
-            <a:noFill/>
-          </a:ln>
-        </p:spPr>
-        <p:txBody>
-          <a:bodyPr rtlCol="0" anchor="ctr"/>
-          <a:lstStyle/>
-          <a:p>
-            <a:pPr algn="ctr"/>
-          </a:p>
-        </p:txBody>
-      </p:sp>
-      <p:sp>
-        <p:nvSpPr>
-          <p:cNvPr id="10" name="장식"/>
-          <p:cNvSpPr/>
-          <p:nvPr/>
-        </p:nvSpPr>
-        <p:spPr>
-          <a:xfrm rot="1200000">
-            <a:off x="10478989" y="1163884"/>
-            <a:ext cx="123444" cy="192024"/>
-          </a:xfrm>
-          <a:prstGeom prst="ellipse">
-            <a:avLst/>
-          </a:prstGeom>
-          <a:solidFill>
-            <a:srgbClr val="B8618C"/>
-          </a:solidFill>
-          <a:ln>
-            <a:noFill/>
-          </a:ln>
-        </p:spPr>
-        <p:txBody>
-          <a:bodyPr rtlCol="0" anchor="ctr"/>
-          <a:lstStyle/>
-          <a:p>
-            <a:pPr algn="ctr"/>
-          </a:p>
-        </p:txBody>
-      </p:sp>
-      <p:sp>
-        <p:nvSpPr>
-          <p:cNvPr id="11" name="장식"/>
-          <p:cNvSpPr/>
-          <p:nvPr/>
-        </p:nvSpPr>
-        <p:spPr>
-          <a:xfrm rot="5520000">
-            <a:off x="10557132" y="1279736"/>
-            <a:ext cx="123444" cy="192024"/>
-          </a:xfrm>
-          <a:prstGeom prst="ellipse">
-            <a:avLst/>
-          </a:prstGeom>
-          <a:solidFill>
-            <a:srgbClr val="EED3E0"/>
-          </a:solidFill>
-          <a:ln>
-            <a:noFill/>
-          </a:ln>
-        </p:spPr>
-        <p:txBody>
-          <a:bodyPr rtlCol="0" anchor="ctr"/>
-          <a:lstStyle/>
-          <a:p>
-            <a:pPr algn="ctr"/>
-          </a:p>
-        </p:txBody>
-      </p:sp>
-      <p:sp>
-        <p:nvSpPr>
-          <p:cNvPr id="12" name="장식"/>
-          <p:cNvSpPr/>
-          <p:nvPr/>
-        </p:nvSpPr>
-        <p:spPr>
-          <a:xfrm rot="9840000">
-            <a:off x="10471098" y="1389855"/>
-            <a:ext cx="123444" cy="192024"/>
-          </a:xfrm>
-          <a:prstGeom prst="ellipse">
-            <a:avLst/>
-          </a:prstGeom>
-          <a:solidFill>
-            <a:srgbClr val="B8618C"/>
-          </a:solidFill>
-          <a:ln>
-            <a:noFill/>
-          </a:ln>
-        </p:spPr>
-        <p:txBody>
-          <a:bodyPr rtlCol="0" anchor="ctr"/>
-          <a:lstStyle/>
-          <a:p>
-            <a:pPr algn="ctr"/>
-          </a:p>
-        </p:txBody>
-      </p:sp>
-      <p:sp>
-        <p:nvSpPr>
-          <p:cNvPr id="13" name="장식"/>
-          <p:cNvSpPr/>
-          <p:nvPr/>
-        </p:nvSpPr>
-        <p:spPr>
-          <a:xfrm rot="14160000">
-            <a:off x="10339783" y="1342060"/>
-            <a:ext cx="123444" cy="192024"/>
-          </a:xfrm>
-          <a:prstGeom prst="ellipse">
-            <a:avLst/>
-          </a:prstGeom>
-          <a:solidFill>
-            <a:srgbClr val="EED3E0"/>
-          </a:solidFill>
-          <a:ln>
-            <a:noFill/>
-          </a:ln>
-        </p:spPr>
-        <p:txBody>
-          <a:bodyPr rtlCol="0" anchor="ctr"/>
-          <a:lstStyle/>
-          <a:p>
-            <a:pPr algn="ctr"/>
-          </a:p>
-        </p:txBody>
-      </p:sp>
-      <p:sp>
-        <p:nvSpPr>
-          <p:cNvPr id="14" name="장식"/>
-          <p:cNvSpPr/>
-          <p:nvPr/>
-        </p:nvSpPr>
-        <p:spPr>
-          <a:xfrm rot="18480000">
-            <a:off x="10344660" y="1202403"/>
-            <a:ext cx="123444" cy="192024"/>
-          </a:xfrm>
-          <a:prstGeom prst="ellipse">
-            <a:avLst/>
-          </a:prstGeom>
-          <a:solidFill>
-            <a:srgbClr val="B8618C"/>
-          </a:solidFill>
-          <a:ln>
-            <a:noFill/>
-          </a:ln>
-        </p:spPr>
-        <p:txBody>
-          <a:bodyPr rtlCol="0" anchor="ctr"/>
-          <a:lstStyle/>
-          <a:p>
-            <a:pPr algn="ctr"/>
-          </a:p>
-        </p:txBody>
-      </p:sp>
-      <p:sp>
-        <p:nvSpPr>
-          <p:cNvPr id="15" name="장식"/>
-          <p:cNvSpPr/>
-          <p:nvPr/>
-        </p:nvSpPr>
-        <p:spPr>
-          <a:xfrm>
-            <a:off x="10458907" y="1330452"/>
-            <a:ext cx="82296" cy="82296"/>
-          </a:xfrm>
-          <a:prstGeom prst="ellipse">
-            <a:avLst/>
-          </a:prstGeom>
-          <a:solidFill>
-            <a:srgbClr val="3F8D3F"/>
-          </a:solidFill>
-          <a:ln>
-            <a:noFill/>
-          </a:ln>
-        </p:spPr>
-        <p:txBody>
-          <a:bodyPr rtlCol="0" anchor="ctr"/>
-          <a:lstStyle/>
-          <a:p>
-            <a:pPr algn="ctr"/>
-          </a:p>
-        </p:txBody>
-      </p:sp>
-      <p:sp>
-        <p:nvSpPr>
-          <p:cNvPr id="16" name="장식"/>
-          <p:cNvSpPr/>
-          <p:nvPr/>
-        </p:nvSpPr>
-        <p:spPr>
-          <a:xfrm rot="2400000">
-            <a:off x="11518232" y="1260178"/>
-            <a:ext cx="103692" cy="161300"/>
-          </a:xfrm>
-          <a:prstGeom prst="ellipse">
-            <a:avLst/>
-          </a:prstGeom>
-          <a:solidFill>
-            <a:srgbClr val="B8618C"/>
-          </a:solidFill>
-          <a:ln>
-            <a:noFill/>
-          </a:ln>
-        </p:spPr>
-        <p:txBody>
-          <a:bodyPr rtlCol="0" anchor="ctr"/>
-          <a:lstStyle/>
-          <a:p>
-            <a:pPr algn="ctr"/>
-          </a:p>
-        </p:txBody>
-      </p:sp>
-      <p:sp>
-        <p:nvSpPr>
-          <p:cNvPr id="17" name="장식"/>
-          <p:cNvSpPr/>
-          <p:nvPr/>
-        </p:nvSpPr>
-        <p:spPr>
-          <a:xfrm rot="6720000">
-            <a:off x="11546630" y="1374075"/>
-            <a:ext cx="103692" cy="161300"/>
-          </a:xfrm>
-          <a:prstGeom prst="ellipse">
-            <a:avLst/>
-          </a:prstGeom>
-          <a:solidFill>
-            <a:srgbClr val="EED3E0"/>
-          </a:solidFill>
-          <a:ln>
-            <a:noFill/>
-          </a:ln>
-        </p:spPr>
-        <p:txBody>
-          <a:bodyPr rtlCol="0" anchor="ctr"/>
-          <a:lstStyle/>
-          <a:p>
-            <a:pPr algn="ctr"/>
-          </a:p>
-        </p:txBody>
-      </p:sp>
-      <p:sp>
-        <p:nvSpPr>
-          <p:cNvPr id="18" name="장식"/>
-          <p:cNvSpPr/>
-          <p:nvPr/>
-        </p:nvSpPr>
-        <p:spPr>
-          <a:xfrm rot="11040000">
-            <a:off x="11447083" y="1436279"/>
-            <a:ext cx="103692" cy="161300"/>
-          </a:xfrm>
-          <a:prstGeom prst="ellipse">
-            <a:avLst/>
-          </a:prstGeom>
-          <a:solidFill>
-            <a:srgbClr val="B8618C"/>
-          </a:solidFill>
-          <a:ln>
-            <a:noFill/>
-          </a:ln>
-        </p:spPr>
-        <p:txBody>
-          <a:bodyPr rtlCol="0" anchor="ctr"/>
-          <a:lstStyle/>
-          <a:p>
-            <a:pPr algn="ctr"/>
-          </a:p>
-        </p:txBody>
-      </p:sp>
-      <p:sp>
-        <p:nvSpPr>
-          <p:cNvPr id="19" name="장식"/>
-          <p:cNvSpPr/>
-          <p:nvPr/>
-        </p:nvSpPr>
-        <p:spPr>
-          <a:xfrm rot="15360000">
-            <a:off x="11357162" y="1360826"/>
-            <a:ext cx="103692" cy="161300"/>
-          </a:xfrm>
-          <a:prstGeom prst="ellipse">
-            <a:avLst/>
-          </a:prstGeom>
-          <a:solidFill>
-            <a:srgbClr val="EED3E0"/>
-          </a:solidFill>
-          <a:ln>
-            <a:noFill/>
-          </a:ln>
-        </p:spPr>
-        <p:txBody>
-          <a:bodyPr rtlCol="0" anchor="ctr"/>
-          <a:lstStyle/>
-          <a:p>
-            <a:pPr algn="ctr"/>
-          </a:p>
-        </p:txBody>
-      </p:sp>
-      <p:sp>
-        <p:nvSpPr>
-          <p:cNvPr id="20" name="장식"/>
-          <p:cNvSpPr/>
-          <p:nvPr/>
-        </p:nvSpPr>
-        <p:spPr>
-          <a:xfrm rot="19680000">
-            <a:off x="11401134" y="1251990"/>
-            <a:ext cx="103692" cy="161300"/>
-          </a:xfrm>
-          <a:prstGeom prst="ellipse">
-            <a:avLst/>
-          </a:prstGeom>
-          <a:solidFill>
-            <a:srgbClr val="B8618C"/>
-          </a:solidFill>
-          <a:ln>
-            <a:noFill/>
-          </a:ln>
-        </p:spPr>
-        <p:txBody>
-          <a:bodyPr rtlCol="0" anchor="ctr"/>
-          <a:lstStyle/>
-          <a:p>
-            <a:pPr algn="ctr"/>
-          </a:p>
-        </p:txBody>
-      </p:sp>
-      <p:sp>
-        <p:nvSpPr>
-          <p:cNvPr id="21" name="장식"/>
-          <p:cNvSpPr/>
-          <p:nvPr/>
-        </p:nvSpPr>
-        <p:spPr>
-          <a:xfrm>
-            <a:off x="11471330" y="1382755"/>
-            <a:ext cx="69128" cy="69128"/>
-          </a:xfrm>
-          <a:prstGeom prst="ellipse">
-            <a:avLst/>
-          </a:prstGeom>
-          <a:solidFill>
-            <a:srgbClr val="3F8D3F"/>
-          </a:solidFill>
-          <a:ln>
-            <a:noFill/>
-          </a:ln>
-        </p:spPr>
-        <p:txBody>
-          <a:bodyPr rtlCol="0" anchor="ctr"/>
-          <a:lstStyle/>
-          <a:p>
-            <a:pPr algn="ctr"/>
-          </a:p>
-        </p:txBody>
-      </p:sp>
-      <p:sp>
-        <p:nvSpPr>
           <p:cNvPr id="2" name="Title 1"/>
           <p:cNvSpPr>
             <a:spLocks noGrp="1"/>
@@ -7083,7 +4980,7 @@
       </p:sp>
       <p:sp>
         <p:nvSpPr>
-          <p:cNvPr id="22" name="카드 1"/>
+          <p:cNvPr id="4" name="카드 1"/>
           <p:cNvSpPr/>
           <p:nvPr/>
         </p:nvSpPr>
@@ -7116,7 +5013,7 @@
       </p:sp>
       <p:sp>
         <p:nvSpPr>
-          <p:cNvPr id="23" name="번호 1"/>
+          <p:cNvPr id="5" name="번호 1"/>
           <p:cNvSpPr/>
           <p:nvPr/>
         </p:nvSpPr>
@@ -7159,7 +5056,7 @@
       </p:sp>
       <p:sp>
         <p:nvSpPr>
-          <p:cNvPr id="24" name="TextBox 23"/>
+          <p:cNvPr id="6" name="TextBox 5"/>
           <p:cNvSpPr txBox="1"/>
           <p:nvPr/>
         </p:nvSpPr>
@@ -7197,7 +5094,7 @@
       </p:sp>
       <p:sp>
         <p:nvSpPr>
-          <p:cNvPr id="25" name="TextBox 24"/>
+          <p:cNvPr id="7" name="TextBox 6"/>
           <p:cNvSpPr txBox="1"/>
           <p:nvPr/>
         </p:nvSpPr>
@@ -7235,7 +5132,7 @@
       </p:sp>
       <p:sp>
         <p:nvSpPr>
-          <p:cNvPr id="26" name="카드 2"/>
+          <p:cNvPr id="8" name="카드 2"/>
           <p:cNvSpPr/>
           <p:nvPr/>
         </p:nvSpPr>
@@ -7268,7 +5165,7 @@
       </p:sp>
       <p:sp>
         <p:nvSpPr>
-          <p:cNvPr id="27" name="번호 2"/>
+          <p:cNvPr id="9" name="번호 2"/>
           <p:cNvSpPr/>
           <p:nvPr/>
         </p:nvSpPr>
@@ -7311,7 +5208,7 @@
       </p:sp>
       <p:sp>
         <p:nvSpPr>
-          <p:cNvPr id="28" name="TextBox 27"/>
+          <p:cNvPr id="10" name="TextBox 9"/>
           <p:cNvSpPr txBox="1"/>
           <p:nvPr/>
         </p:nvSpPr>
@@ -7349,7 +5246,7 @@
       </p:sp>
       <p:sp>
         <p:nvSpPr>
-          <p:cNvPr id="29" name="TextBox 28"/>
+          <p:cNvPr id="11" name="TextBox 10"/>
           <p:cNvSpPr txBox="1"/>
           <p:nvPr/>
         </p:nvSpPr>
@@ -7387,7 +5284,7 @@
       </p:sp>
       <p:sp>
         <p:nvSpPr>
-          <p:cNvPr id="30" name="카드 3"/>
+          <p:cNvPr id="12" name="카드 3"/>
           <p:cNvSpPr/>
           <p:nvPr/>
         </p:nvSpPr>
@@ -7420,7 +5317,7 @@
       </p:sp>
       <p:sp>
         <p:nvSpPr>
-          <p:cNvPr id="31" name="번호 3"/>
+          <p:cNvPr id="13" name="번호 3"/>
           <p:cNvSpPr/>
           <p:nvPr/>
         </p:nvSpPr>
@@ -7463,7 +5360,7 @@
       </p:sp>
       <p:sp>
         <p:nvSpPr>
-          <p:cNvPr id="32" name="TextBox 31"/>
+          <p:cNvPr id="14" name="TextBox 13"/>
           <p:cNvSpPr txBox="1"/>
           <p:nvPr/>
         </p:nvSpPr>
@@ -7501,7 +5398,7 @@
       </p:sp>
       <p:sp>
         <p:nvSpPr>
-          <p:cNvPr id="33" name="TextBox 32"/>
+          <p:cNvPr id="15" name="TextBox 14"/>
           <p:cNvSpPr txBox="1"/>
           <p:nvPr/>
         </p:nvSpPr>
@@ -7539,7 +5436,7 @@
       </p:sp>
       <p:sp>
         <p:nvSpPr>
-          <p:cNvPr id="34" name="카드 4"/>
+          <p:cNvPr id="16" name="카드 4"/>
           <p:cNvSpPr/>
           <p:nvPr/>
         </p:nvSpPr>
@@ -7572,7 +5469,7 @@
       </p:sp>
       <p:sp>
         <p:nvSpPr>
-          <p:cNvPr id="35" name="번호 4"/>
+          <p:cNvPr id="17" name="번호 4"/>
           <p:cNvSpPr/>
           <p:nvPr/>
         </p:nvSpPr>
@@ -7615,7 +5512,7 @@
       </p:sp>
       <p:sp>
         <p:nvSpPr>
-          <p:cNvPr id="36" name="TextBox 35"/>
+          <p:cNvPr id="18" name="TextBox 17"/>
           <p:cNvSpPr txBox="1"/>
           <p:nvPr/>
         </p:nvSpPr>
@@ -7653,7 +5550,7 @@
       </p:sp>
       <p:sp>
         <p:nvSpPr>
-          <p:cNvPr id="37" name="TextBox 36"/>
+          <p:cNvPr id="19" name="TextBox 18"/>
           <p:cNvSpPr txBox="1"/>
           <p:nvPr/>
         </p:nvSpPr>
@@ -7748,528 +5645,6 @@
       </p:sp>
       <p:sp>
         <p:nvSpPr>
-          <p:cNvPr id="4" name="장식"/>
-          <p:cNvSpPr/>
-          <p:nvPr/>
-        </p:nvSpPr>
-        <p:spPr>
-          <a:xfrm>
-            <a:off x="10879531" y="530352"/>
-            <a:ext cx="246888" cy="384048"/>
-          </a:xfrm>
-          <a:prstGeom prst="ellipse">
-            <a:avLst/>
-          </a:prstGeom>
-          <a:solidFill>
-            <a:srgbClr val="B8618C"/>
-          </a:solidFill>
-          <a:ln>
-            <a:noFill/>
-          </a:ln>
-        </p:spPr>
-        <p:txBody>
-          <a:bodyPr rtlCol="0" anchor="ctr"/>
-          <a:lstStyle/>
-          <a:p>
-            <a:pPr algn="ctr"/>
-          </a:p>
-        </p:txBody>
-      </p:sp>
-      <p:sp>
-        <p:nvSpPr>
-          <p:cNvPr id="5" name="장식"/>
-          <p:cNvSpPr/>
-          <p:nvPr/>
-        </p:nvSpPr>
-        <p:spPr>
-          <a:xfrm rot="4320000">
-            <a:off x="11105639" y="694629"/>
-            <a:ext cx="246888" cy="384048"/>
-          </a:xfrm>
-          <a:prstGeom prst="ellipse">
-            <a:avLst/>
-          </a:prstGeom>
-          <a:solidFill>
-            <a:srgbClr val="EED3E0"/>
-          </a:solidFill>
-          <a:ln>
-            <a:noFill/>
-          </a:ln>
-        </p:spPr>
-        <p:txBody>
-          <a:bodyPr rtlCol="0" anchor="ctr"/>
-          <a:lstStyle/>
-          <a:p>
-            <a:pPr algn="ctr"/>
-          </a:p>
-        </p:txBody>
-      </p:sp>
-      <p:sp>
-        <p:nvSpPr>
-          <p:cNvPr id="6" name="장식"/>
-          <p:cNvSpPr/>
-          <p:nvPr/>
-        </p:nvSpPr>
-        <p:spPr>
-          <a:xfrm rot="8640000">
-            <a:off x="11019273" y="960434"/>
-            <a:ext cx="246888" cy="384048"/>
-          </a:xfrm>
-          <a:prstGeom prst="ellipse">
-            <a:avLst/>
-          </a:prstGeom>
-          <a:solidFill>
-            <a:srgbClr val="B8618C"/>
-          </a:solidFill>
-          <a:ln>
-            <a:noFill/>
-          </a:ln>
-        </p:spPr>
-        <p:txBody>
-          <a:bodyPr rtlCol="0" anchor="ctr"/>
-          <a:lstStyle/>
-          <a:p>
-            <a:pPr algn="ctr"/>
-          </a:p>
-        </p:txBody>
-      </p:sp>
-      <p:sp>
-        <p:nvSpPr>
-          <p:cNvPr id="7" name="장식"/>
-          <p:cNvSpPr/>
-          <p:nvPr/>
-        </p:nvSpPr>
-        <p:spPr>
-          <a:xfrm rot="12960000">
-            <a:off x="10739788" y="960434"/>
-            <a:ext cx="246888" cy="384048"/>
-          </a:xfrm>
-          <a:prstGeom prst="ellipse">
-            <a:avLst/>
-          </a:prstGeom>
-          <a:solidFill>
-            <a:srgbClr val="EED3E0"/>
-          </a:solidFill>
-          <a:ln>
-            <a:noFill/>
-          </a:ln>
-        </p:spPr>
-        <p:txBody>
-          <a:bodyPr rtlCol="0" anchor="ctr"/>
-          <a:lstStyle/>
-          <a:p>
-            <a:pPr algn="ctr"/>
-          </a:p>
-        </p:txBody>
-      </p:sp>
-      <p:sp>
-        <p:nvSpPr>
-          <p:cNvPr id="8" name="장식"/>
-          <p:cNvSpPr/>
-          <p:nvPr/>
-        </p:nvSpPr>
-        <p:spPr>
-          <a:xfrm rot="17280000">
-            <a:off x="10653423" y="694629"/>
-            <a:ext cx="246888" cy="384048"/>
-          </a:xfrm>
-          <a:prstGeom prst="ellipse">
-            <a:avLst/>
-          </a:prstGeom>
-          <a:solidFill>
-            <a:srgbClr val="B8618C"/>
-          </a:solidFill>
-          <a:ln>
-            <a:noFill/>
-          </a:ln>
-        </p:spPr>
-        <p:txBody>
-          <a:bodyPr rtlCol="0" anchor="ctr"/>
-          <a:lstStyle/>
-          <a:p>
-            <a:pPr algn="ctr"/>
-          </a:p>
-        </p:txBody>
-      </p:sp>
-      <p:sp>
-        <p:nvSpPr>
-          <p:cNvPr id="9" name="장식"/>
-          <p:cNvSpPr/>
-          <p:nvPr/>
-        </p:nvSpPr>
-        <p:spPr>
-          <a:xfrm>
-            <a:off x="10920679" y="877824"/>
-            <a:ext cx="164592" cy="164592"/>
-          </a:xfrm>
-          <a:prstGeom prst="ellipse">
-            <a:avLst/>
-          </a:prstGeom>
-          <a:solidFill>
-            <a:srgbClr val="3F8D3F"/>
-          </a:solidFill>
-          <a:ln>
-            <a:noFill/>
-          </a:ln>
-        </p:spPr>
-        <p:txBody>
-          <a:bodyPr rtlCol="0" anchor="ctr"/>
-          <a:lstStyle/>
-          <a:p>
-            <a:pPr algn="ctr"/>
-          </a:p>
-        </p:txBody>
-      </p:sp>
-      <p:sp>
-        <p:nvSpPr>
-          <p:cNvPr id="10" name="장식"/>
-          <p:cNvSpPr/>
-          <p:nvPr/>
-        </p:nvSpPr>
-        <p:spPr>
-          <a:xfrm rot="1200000">
-            <a:off x="10478989" y="1163884"/>
-            <a:ext cx="123444" cy="192024"/>
-          </a:xfrm>
-          <a:prstGeom prst="ellipse">
-            <a:avLst/>
-          </a:prstGeom>
-          <a:solidFill>
-            <a:srgbClr val="B8618C"/>
-          </a:solidFill>
-          <a:ln>
-            <a:noFill/>
-          </a:ln>
-        </p:spPr>
-        <p:txBody>
-          <a:bodyPr rtlCol="0" anchor="ctr"/>
-          <a:lstStyle/>
-          <a:p>
-            <a:pPr algn="ctr"/>
-          </a:p>
-        </p:txBody>
-      </p:sp>
-      <p:sp>
-        <p:nvSpPr>
-          <p:cNvPr id="11" name="장식"/>
-          <p:cNvSpPr/>
-          <p:nvPr/>
-        </p:nvSpPr>
-        <p:spPr>
-          <a:xfrm rot="5520000">
-            <a:off x="10557132" y="1279736"/>
-            <a:ext cx="123444" cy="192024"/>
-          </a:xfrm>
-          <a:prstGeom prst="ellipse">
-            <a:avLst/>
-          </a:prstGeom>
-          <a:solidFill>
-            <a:srgbClr val="EED3E0"/>
-          </a:solidFill>
-          <a:ln>
-            <a:noFill/>
-          </a:ln>
-        </p:spPr>
-        <p:txBody>
-          <a:bodyPr rtlCol="0" anchor="ctr"/>
-          <a:lstStyle/>
-          <a:p>
-            <a:pPr algn="ctr"/>
-          </a:p>
-        </p:txBody>
-      </p:sp>
-      <p:sp>
-        <p:nvSpPr>
-          <p:cNvPr id="12" name="장식"/>
-          <p:cNvSpPr/>
-          <p:nvPr/>
-        </p:nvSpPr>
-        <p:spPr>
-          <a:xfrm rot="9840000">
-            <a:off x="10471098" y="1389855"/>
-            <a:ext cx="123444" cy="192024"/>
-          </a:xfrm>
-          <a:prstGeom prst="ellipse">
-            <a:avLst/>
-          </a:prstGeom>
-          <a:solidFill>
-            <a:srgbClr val="B8618C"/>
-          </a:solidFill>
-          <a:ln>
-            <a:noFill/>
-          </a:ln>
-        </p:spPr>
-        <p:txBody>
-          <a:bodyPr rtlCol="0" anchor="ctr"/>
-          <a:lstStyle/>
-          <a:p>
-            <a:pPr algn="ctr"/>
-          </a:p>
-        </p:txBody>
-      </p:sp>
-      <p:sp>
-        <p:nvSpPr>
-          <p:cNvPr id="13" name="장식"/>
-          <p:cNvSpPr/>
-          <p:nvPr/>
-        </p:nvSpPr>
-        <p:spPr>
-          <a:xfrm rot="14160000">
-            <a:off x="10339783" y="1342060"/>
-            <a:ext cx="123444" cy="192024"/>
-          </a:xfrm>
-          <a:prstGeom prst="ellipse">
-            <a:avLst/>
-          </a:prstGeom>
-          <a:solidFill>
-            <a:srgbClr val="EED3E0"/>
-          </a:solidFill>
-          <a:ln>
-            <a:noFill/>
-          </a:ln>
-        </p:spPr>
-        <p:txBody>
-          <a:bodyPr rtlCol="0" anchor="ctr"/>
-          <a:lstStyle/>
-          <a:p>
-            <a:pPr algn="ctr"/>
-          </a:p>
-        </p:txBody>
-      </p:sp>
-      <p:sp>
-        <p:nvSpPr>
-          <p:cNvPr id="14" name="장식"/>
-          <p:cNvSpPr/>
-          <p:nvPr/>
-        </p:nvSpPr>
-        <p:spPr>
-          <a:xfrm rot="18480000">
-            <a:off x="10344660" y="1202403"/>
-            <a:ext cx="123444" cy="192024"/>
-          </a:xfrm>
-          <a:prstGeom prst="ellipse">
-            <a:avLst/>
-          </a:prstGeom>
-          <a:solidFill>
-            <a:srgbClr val="B8618C"/>
-          </a:solidFill>
-          <a:ln>
-            <a:noFill/>
-          </a:ln>
-        </p:spPr>
-        <p:txBody>
-          <a:bodyPr rtlCol="0" anchor="ctr"/>
-          <a:lstStyle/>
-          <a:p>
-            <a:pPr algn="ctr"/>
-          </a:p>
-        </p:txBody>
-      </p:sp>
-      <p:sp>
-        <p:nvSpPr>
-          <p:cNvPr id="15" name="장식"/>
-          <p:cNvSpPr/>
-          <p:nvPr/>
-        </p:nvSpPr>
-        <p:spPr>
-          <a:xfrm>
-            <a:off x="10458907" y="1330452"/>
-            <a:ext cx="82296" cy="82296"/>
-          </a:xfrm>
-          <a:prstGeom prst="ellipse">
-            <a:avLst/>
-          </a:prstGeom>
-          <a:solidFill>
-            <a:srgbClr val="3F8D3F"/>
-          </a:solidFill>
-          <a:ln>
-            <a:noFill/>
-          </a:ln>
-        </p:spPr>
-        <p:txBody>
-          <a:bodyPr rtlCol="0" anchor="ctr"/>
-          <a:lstStyle/>
-          <a:p>
-            <a:pPr algn="ctr"/>
-          </a:p>
-        </p:txBody>
-      </p:sp>
-      <p:sp>
-        <p:nvSpPr>
-          <p:cNvPr id="16" name="장식"/>
-          <p:cNvSpPr/>
-          <p:nvPr/>
-        </p:nvSpPr>
-        <p:spPr>
-          <a:xfrm rot="2400000">
-            <a:off x="11518232" y="1260178"/>
-            <a:ext cx="103692" cy="161300"/>
-          </a:xfrm>
-          <a:prstGeom prst="ellipse">
-            <a:avLst/>
-          </a:prstGeom>
-          <a:solidFill>
-            <a:srgbClr val="B8618C"/>
-          </a:solidFill>
-          <a:ln>
-            <a:noFill/>
-          </a:ln>
-        </p:spPr>
-        <p:txBody>
-          <a:bodyPr rtlCol="0" anchor="ctr"/>
-          <a:lstStyle/>
-          <a:p>
-            <a:pPr algn="ctr"/>
-          </a:p>
-        </p:txBody>
-      </p:sp>
-      <p:sp>
-        <p:nvSpPr>
-          <p:cNvPr id="17" name="장식"/>
-          <p:cNvSpPr/>
-          <p:nvPr/>
-        </p:nvSpPr>
-        <p:spPr>
-          <a:xfrm rot="6720000">
-            <a:off x="11546630" y="1374075"/>
-            <a:ext cx="103692" cy="161300"/>
-          </a:xfrm>
-          <a:prstGeom prst="ellipse">
-            <a:avLst/>
-          </a:prstGeom>
-          <a:solidFill>
-            <a:srgbClr val="EED3E0"/>
-          </a:solidFill>
-          <a:ln>
-            <a:noFill/>
-          </a:ln>
-        </p:spPr>
-        <p:txBody>
-          <a:bodyPr rtlCol="0" anchor="ctr"/>
-          <a:lstStyle/>
-          <a:p>
-            <a:pPr algn="ctr"/>
-          </a:p>
-        </p:txBody>
-      </p:sp>
-      <p:sp>
-        <p:nvSpPr>
-          <p:cNvPr id="18" name="장식"/>
-          <p:cNvSpPr/>
-          <p:nvPr/>
-        </p:nvSpPr>
-        <p:spPr>
-          <a:xfrm rot="11040000">
-            <a:off x="11447083" y="1436279"/>
-            <a:ext cx="103692" cy="161300"/>
-          </a:xfrm>
-          <a:prstGeom prst="ellipse">
-            <a:avLst/>
-          </a:prstGeom>
-          <a:solidFill>
-            <a:srgbClr val="B8618C"/>
-          </a:solidFill>
-          <a:ln>
-            <a:noFill/>
-          </a:ln>
-        </p:spPr>
-        <p:txBody>
-          <a:bodyPr rtlCol="0" anchor="ctr"/>
-          <a:lstStyle/>
-          <a:p>
-            <a:pPr algn="ctr"/>
-          </a:p>
-        </p:txBody>
-      </p:sp>
-      <p:sp>
-        <p:nvSpPr>
-          <p:cNvPr id="19" name="장식"/>
-          <p:cNvSpPr/>
-          <p:nvPr/>
-        </p:nvSpPr>
-        <p:spPr>
-          <a:xfrm rot="15360000">
-            <a:off x="11357162" y="1360826"/>
-            <a:ext cx="103692" cy="161300"/>
-          </a:xfrm>
-          <a:prstGeom prst="ellipse">
-            <a:avLst/>
-          </a:prstGeom>
-          <a:solidFill>
-            <a:srgbClr val="EED3E0"/>
-          </a:solidFill>
-          <a:ln>
-            <a:noFill/>
-          </a:ln>
-        </p:spPr>
-        <p:txBody>
-          <a:bodyPr rtlCol="0" anchor="ctr"/>
-          <a:lstStyle/>
-          <a:p>
-            <a:pPr algn="ctr"/>
-          </a:p>
-        </p:txBody>
-      </p:sp>
-      <p:sp>
-        <p:nvSpPr>
-          <p:cNvPr id="20" name="장식"/>
-          <p:cNvSpPr/>
-          <p:nvPr/>
-        </p:nvSpPr>
-        <p:spPr>
-          <a:xfrm rot="19680000">
-            <a:off x="11401134" y="1251990"/>
-            <a:ext cx="103692" cy="161300"/>
-          </a:xfrm>
-          <a:prstGeom prst="ellipse">
-            <a:avLst/>
-          </a:prstGeom>
-          <a:solidFill>
-            <a:srgbClr val="B8618C"/>
-          </a:solidFill>
-          <a:ln>
-            <a:noFill/>
-          </a:ln>
-        </p:spPr>
-        <p:txBody>
-          <a:bodyPr rtlCol="0" anchor="ctr"/>
-          <a:lstStyle/>
-          <a:p>
-            <a:pPr algn="ctr"/>
-          </a:p>
-        </p:txBody>
-      </p:sp>
-      <p:sp>
-        <p:nvSpPr>
-          <p:cNvPr id="21" name="장식"/>
-          <p:cNvSpPr/>
-          <p:nvPr/>
-        </p:nvSpPr>
-        <p:spPr>
-          <a:xfrm>
-            <a:off x="11471330" y="1382755"/>
-            <a:ext cx="69128" cy="69128"/>
-          </a:xfrm>
-          <a:prstGeom prst="ellipse">
-            <a:avLst/>
-          </a:prstGeom>
-          <a:solidFill>
-            <a:srgbClr val="3F8D3F"/>
-          </a:solidFill>
-          <a:ln>
-            <a:noFill/>
-          </a:ln>
-        </p:spPr>
-        <p:txBody>
-          <a:bodyPr rtlCol="0" anchor="ctr"/>
-          <a:lstStyle/>
-          <a:p>
-            <a:pPr algn="ctr"/>
-          </a:p>
-        </p:txBody>
-      </p:sp>
-      <p:sp>
-        <p:nvSpPr>
           <p:cNvPr id="2" name="Title 1"/>
           <p:cNvSpPr>
             <a:spLocks noGrp="1"/>
@@ -8308,7 +5683,7 @@
       </p:sp>
       <p:sp>
         <p:nvSpPr>
-          <p:cNvPr id="22" name="사진 자리"/>
+          <p:cNvPr id="4" name="사진 자리"/>
           <p:cNvSpPr/>
           <p:nvPr/>
         </p:nvSpPr>
@@ -8356,7 +5731,7 @@
       </p:sp>
       <p:sp>
         <p:nvSpPr>
-          <p:cNvPr id="23" name="사진 자리"/>
+          <p:cNvPr id="5" name="사진 자리"/>
           <p:cNvSpPr/>
           <p:nvPr/>
         </p:nvSpPr>
@@ -8404,7 +5779,7 @@
       </p:sp>
       <p:sp>
         <p:nvSpPr>
-          <p:cNvPr id="24" name="사진 자리"/>
+          <p:cNvPr id="6" name="사진 자리"/>
           <p:cNvSpPr/>
           <p:nvPr/>
         </p:nvSpPr>
@@ -8452,7 +5827,7 @@
       </p:sp>
       <p:sp>
         <p:nvSpPr>
-          <p:cNvPr id="25" name="사진 자리"/>
+          <p:cNvPr id="7" name="사진 자리"/>
           <p:cNvSpPr/>
           <p:nvPr/>
         </p:nvSpPr>
@@ -8500,7 +5875,7 @@
       </p:sp>
       <p:sp>
         <p:nvSpPr>
-          <p:cNvPr id="26" name="사진 자리"/>
+          <p:cNvPr id="8" name="사진 자리"/>
           <p:cNvSpPr/>
           <p:nvPr/>
         </p:nvSpPr>
@@ -8548,7 +5923,7 @@
       </p:sp>
       <p:sp>
         <p:nvSpPr>
-          <p:cNvPr id="27" name="사진 자리"/>
+          <p:cNvPr id="9" name="사진 자리"/>
           <p:cNvSpPr/>
           <p:nvPr/>
         </p:nvSpPr>
@@ -8596,7 +5971,7 @@
       </p:sp>
       <p:sp>
         <p:nvSpPr>
-          <p:cNvPr id="28" name="사진 자리"/>
+          <p:cNvPr id="10" name="사진 자리"/>
           <p:cNvSpPr/>
           <p:nvPr/>
         </p:nvSpPr>
@@ -8644,7 +6019,7 @@
       </p:sp>
       <p:sp>
         <p:nvSpPr>
-          <p:cNvPr id="29" name="사진 자리"/>
+          <p:cNvPr id="11" name="사진 자리"/>
           <p:cNvSpPr/>
           <p:nvPr/>
         </p:nvSpPr>
@@ -8701,14 +6076,6 @@
 <file path=ppt/slides/slide6.xml><?xml version="1.0" encoding="utf-8"?>
 <p:sld xmlns:a="http://schemas.openxmlformats.org/drawingml/2006/main" xmlns:p="http://schemas.openxmlformats.org/presentationml/2006/main" xmlns:r="http://schemas.openxmlformats.org/officeDocument/2006/relationships">
   <p:cSld>
-    <p:bg>
-      <p:bgPr>
-        <a:solidFill>
-          <a:srgbClr val="7B3759"/>
-        </a:solidFill>
-        <a:effectLst/>
-      </p:bgPr>
-    </p:bg>
     <p:spTree>
       <p:nvGrpSpPr>
         <p:cNvPr id="1" name=""/>
@@ -8716,559 +6083,30 @@
         <p:nvPr/>
       </p:nvGrpSpPr>
       <p:grpSpPr/>
-      <p:sp>
-        <p:nvSpPr>
-          <p:cNvPr id="3" name="장식"/>
-          <p:cNvSpPr/>
+      <p:pic>
+        <p:nvPicPr>
+          <p:cNvPr id="3" name="표지 그림" descr="birthday-25.jpg"/>
+          <p:cNvPicPr>
+            <a:picLocks noChangeAspect="1"/>
+          </p:cNvPicPr>
           <p:nvPr/>
-        </p:nvSpPr>
-        <p:spPr>
-          <a:xfrm>
-            <a:off x="457200" y="457200"/>
-            <a:ext cx="11277295" cy="5943600"/>
-          </a:xfrm>
-          <a:prstGeom prst="roundRect">
-            <a:avLst>
-              <a:gd name="adj" fmla="val 5000"/>
-            </a:avLst>
-          </a:prstGeom>
-          <a:solidFill>
-            <a:srgbClr val="FFFFFF"/>
-          </a:solidFill>
-          <a:ln>
-            <a:noFill/>
-          </a:ln>
-        </p:spPr>
-        <p:txBody>
-          <a:bodyPr rtlCol="0" anchor="ctr"/>
-          <a:lstStyle/>
-          <a:p>
-            <a:pPr algn="ctr"/>
-          </a:p>
-        </p:txBody>
-      </p:sp>
-      <p:sp>
-        <p:nvSpPr>
-          <p:cNvPr id="4" name="장식"/>
-          <p:cNvSpPr/>
-          <p:nvPr/>
-        </p:nvSpPr>
-        <p:spPr>
-          <a:xfrm>
-            <a:off x="5892165" y="662482"/>
-            <a:ext cx="407365" cy="633679"/>
-          </a:xfrm>
-          <a:prstGeom prst="ellipse">
+        </p:nvPicPr>
+        <p:blipFill>
+          <a:blip r:embed="rId2"/>
+          <a:stretch>
+            <a:fillRect/>
+          </a:stretch>
+        </p:blipFill>
+        <p:spPr>
+          <a:xfrm>
+            <a:off x="0" y="0"/>
+            <a:ext cx="12191695" cy="6858000"/>
+          </a:xfrm>
+          <a:prstGeom prst="rect">
             <a:avLst/>
           </a:prstGeom>
-          <a:solidFill>
-            <a:srgbClr val="B8618C"/>
-          </a:solidFill>
-          <a:ln>
-            <a:noFill/>
-          </a:ln>
-        </p:spPr>
-        <p:txBody>
-          <a:bodyPr rtlCol="0" anchor="ctr"/>
-          <a:lstStyle/>
-          <a:p>
-            <a:pPr algn="ctr"/>
-          </a:p>
-        </p:txBody>
-      </p:sp>
-      <p:sp>
-        <p:nvSpPr>
-          <p:cNvPr id="5" name="장식"/>
-          <p:cNvSpPr/>
-          <p:nvPr/>
-        </p:nvSpPr>
-        <p:spPr>
-          <a:xfrm rot="4320000">
-            <a:off x="6265243" y="933539"/>
-            <a:ext cx="407365" cy="633679"/>
-          </a:xfrm>
-          <a:prstGeom prst="ellipse">
-            <a:avLst/>
-          </a:prstGeom>
-          <a:solidFill>
-            <a:srgbClr val="EED3E0"/>
-          </a:solidFill>
-          <a:ln>
-            <a:noFill/>
-          </a:ln>
-        </p:spPr>
-        <p:txBody>
-          <a:bodyPr rtlCol="0" anchor="ctr"/>
-          <a:lstStyle/>
-          <a:p>
-            <a:pPr algn="ctr"/>
-          </a:p>
-        </p:txBody>
-      </p:sp>
-      <p:sp>
-        <p:nvSpPr>
-          <p:cNvPr id="6" name="장식"/>
-          <p:cNvSpPr/>
-          <p:nvPr/>
-        </p:nvSpPr>
-        <p:spPr>
-          <a:xfrm rot="8640000">
-            <a:off x="6122739" y="1372119"/>
-            <a:ext cx="407365" cy="633679"/>
-          </a:xfrm>
-          <a:prstGeom prst="ellipse">
-            <a:avLst/>
-          </a:prstGeom>
-          <a:solidFill>
-            <a:srgbClr val="B8618C"/>
-          </a:solidFill>
-          <a:ln>
-            <a:noFill/>
-          </a:ln>
-        </p:spPr>
-        <p:txBody>
-          <a:bodyPr rtlCol="0" anchor="ctr"/>
-          <a:lstStyle/>
-          <a:p>
-            <a:pPr algn="ctr"/>
-          </a:p>
-        </p:txBody>
-      </p:sp>
-      <p:sp>
-        <p:nvSpPr>
-          <p:cNvPr id="7" name="장식"/>
-          <p:cNvSpPr/>
-          <p:nvPr/>
-        </p:nvSpPr>
-        <p:spPr>
-          <a:xfrm rot="12960000">
-            <a:off x="5661590" y="1372119"/>
-            <a:ext cx="407365" cy="633679"/>
-          </a:xfrm>
-          <a:prstGeom prst="ellipse">
-            <a:avLst/>
-          </a:prstGeom>
-          <a:solidFill>
-            <a:srgbClr val="EED3E0"/>
-          </a:solidFill>
-          <a:ln>
-            <a:noFill/>
-          </a:ln>
-        </p:spPr>
-        <p:txBody>
-          <a:bodyPr rtlCol="0" anchor="ctr"/>
-          <a:lstStyle/>
-          <a:p>
-            <a:pPr algn="ctr"/>
-          </a:p>
-        </p:txBody>
-      </p:sp>
-      <p:sp>
-        <p:nvSpPr>
-          <p:cNvPr id="8" name="장식"/>
-          <p:cNvSpPr/>
-          <p:nvPr/>
-        </p:nvSpPr>
-        <p:spPr>
-          <a:xfrm rot="17280000">
-            <a:off x="5519086" y="933539"/>
-            <a:ext cx="407365" cy="633679"/>
-          </a:xfrm>
-          <a:prstGeom prst="ellipse">
-            <a:avLst/>
-          </a:prstGeom>
-          <a:solidFill>
-            <a:srgbClr val="B8618C"/>
-          </a:solidFill>
-          <a:ln>
-            <a:noFill/>
-          </a:ln>
-        </p:spPr>
-        <p:txBody>
-          <a:bodyPr rtlCol="0" anchor="ctr"/>
-          <a:lstStyle/>
-          <a:p>
-            <a:pPr algn="ctr"/>
-          </a:p>
-        </p:txBody>
-      </p:sp>
-      <p:sp>
-        <p:nvSpPr>
-          <p:cNvPr id="9" name="장식"/>
-          <p:cNvSpPr/>
-          <p:nvPr/>
-        </p:nvSpPr>
-        <p:spPr>
-          <a:xfrm>
-            <a:off x="5960059" y="1235811"/>
-            <a:ext cx="271576" cy="271576"/>
-          </a:xfrm>
-          <a:prstGeom prst="ellipse">
-            <a:avLst/>
-          </a:prstGeom>
-          <a:solidFill>
-            <a:srgbClr val="3F8D3F"/>
-          </a:solidFill>
-          <a:ln>
-            <a:noFill/>
-          </a:ln>
-        </p:spPr>
-        <p:txBody>
-          <a:bodyPr rtlCol="0" anchor="ctr"/>
-          <a:lstStyle/>
-          <a:p>
-            <a:pPr algn="ctr"/>
-          </a:p>
-        </p:txBody>
-      </p:sp>
-      <p:sp>
-        <p:nvSpPr>
-          <p:cNvPr id="10" name="장식"/>
-          <p:cNvSpPr/>
-          <p:nvPr/>
-        </p:nvSpPr>
-        <p:spPr>
-          <a:xfrm rot="1200000">
-            <a:off x="5231271" y="1707812"/>
-            <a:ext cx="203682" cy="316839"/>
-          </a:xfrm>
-          <a:prstGeom prst="ellipse">
-            <a:avLst/>
-          </a:prstGeom>
-          <a:solidFill>
-            <a:srgbClr val="B8618C"/>
-          </a:solidFill>
-          <a:ln>
-            <a:noFill/>
-          </a:ln>
-        </p:spPr>
-        <p:txBody>
-          <a:bodyPr rtlCol="0" anchor="ctr"/>
-          <a:lstStyle/>
-          <a:p>
-            <a:pPr algn="ctr"/>
-          </a:p>
-        </p:txBody>
-      </p:sp>
-      <p:sp>
-        <p:nvSpPr>
-          <p:cNvPr id="11" name="장식"/>
-          <p:cNvSpPr/>
-          <p:nvPr/>
-        </p:nvSpPr>
-        <p:spPr>
-          <a:xfrm rot="5520000">
-            <a:off x="5360207" y="1898967"/>
-            <a:ext cx="203682" cy="316839"/>
-          </a:xfrm>
-          <a:prstGeom prst="ellipse">
-            <a:avLst/>
-          </a:prstGeom>
-          <a:solidFill>
-            <a:srgbClr val="EED3E0"/>
-          </a:solidFill>
-          <a:ln>
-            <a:noFill/>
-          </a:ln>
-        </p:spPr>
-        <p:txBody>
-          <a:bodyPr rtlCol="0" anchor="ctr"/>
-          <a:lstStyle/>
-          <a:p>
-            <a:pPr algn="ctr"/>
-          </a:p>
-        </p:txBody>
-      </p:sp>
-      <p:sp>
-        <p:nvSpPr>
-          <p:cNvPr id="12" name="장식"/>
-          <p:cNvSpPr/>
-          <p:nvPr/>
-        </p:nvSpPr>
-        <p:spPr>
-          <a:xfrm rot="9840000">
-            <a:off x="5218251" y="2080662"/>
-            <a:ext cx="203682" cy="316839"/>
-          </a:xfrm>
-          <a:prstGeom prst="ellipse">
-            <a:avLst/>
-          </a:prstGeom>
-          <a:solidFill>
-            <a:srgbClr val="B8618C"/>
-          </a:solidFill>
-          <a:ln>
-            <a:noFill/>
-          </a:ln>
-        </p:spPr>
-        <p:txBody>
-          <a:bodyPr rtlCol="0" anchor="ctr"/>
-          <a:lstStyle/>
-          <a:p>
-            <a:pPr algn="ctr"/>
-          </a:p>
-        </p:txBody>
-      </p:sp>
-      <p:sp>
-        <p:nvSpPr>
-          <p:cNvPr id="13" name="장식"/>
-          <p:cNvSpPr/>
-          <p:nvPr/>
-        </p:nvSpPr>
-        <p:spPr>
-          <a:xfrm rot="14160000">
-            <a:off x="5001581" y="2001801"/>
-            <a:ext cx="203682" cy="316839"/>
-          </a:xfrm>
-          <a:prstGeom prst="ellipse">
-            <a:avLst/>
-          </a:prstGeom>
-          <a:solidFill>
-            <a:srgbClr val="EED3E0"/>
-          </a:solidFill>
-          <a:ln>
-            <a:noFill/>
-          </a:ln>
-        </p:spPr>
-        <p:txBody>
-          <a:bodyPr rtlCol="0" anchor="ctr"/>
-          <a:lstStyle/>
-          <a:p>
-            <a:pPr algn="ctr"/>
-          </a:p>
-        </p:txBody>
-      </p:sp>
-      <p:sp>
-        <p:nvSpPr>
-          <p:cNvPr id="14" name="장식"/>
-          <p:cNvSpPr/>
-          <p:nvPr/>
-        </p:nvSpPr>
-        <p:spPr>
-          <a:xfrm rot="18480000">
-            <a:off x="5009628" y="1771367"/>
-            <a:ext cx="203682" cy="316839"/>
-          </a:xfrm>
-          <a:prstGeom prst="ellipse">
-            <a:avLst/>
-          </a:prstGeom>
-          <a:solidFill>
-            <a:srgbClr val="B8618C"/>
-          </a:solidFill>
-          <a:ln>
-            <a:noFill/>
-          </a:ln>
-        </p:spPr>
-        <p:txBody>
-          <a:bodyPr rtlCol="0" anchor="ctr"/>
-          <a:lstStyle/>
-          <a:p>
-            <a:pPr algn="ctr"/>
-          </a:p>
-        </p:txBody>
-      </p:sp>
-      <p:sp>
-        <p:nvSpPr>
-          <p:cNvPr id="15" name="장식"/>
-          <p:cNvSpPr/>
-          <p:nvPr/>
-        </p:nvSpPr>
-        <p:spPr>
-          <a:xfrm>
-            <a:off x="5198135" y="1982647"/>
-            <a:ext cx="135788" cy="135788"/>
-          </a:xfrm>
-          <a:prstGeom prst="ellipse">
-            <a:avLst/>
-          </a:prstGeom>
-          <a:solidFill>
-            <a:srgbClr val="3F8D3F"/>
-          </a:solidFill>
-          <a:ln>
-            <a:noFill/>
-          </a:ln>
-        </p:spPr>
-        <p:txBody>
-          <a:bodyPr rtlCol="0" anchor="ctr"/>
-          <a:lstStyle/>
-          <a:p>
-            <a:pPr algn="ctr"/>
-          </a:p>
-        </p:txBody>
-      </p:sp>
-      <p:sp>
-        <p:nvSpPr>
-          <p:cNvPr id="16" name="장식"/>
-          <p:cNvSpPr/>
-          <p:nvPr/>
-        </p:nvSpPr>
-        <p:spPr>
-          <a:xfrm rot="2400000">
-            <a:off x="6946022" y="1866696"/>
-            <a:ext cx="171093" cy="266145"/>
-          </a:xfrm>
-          <a:prstGeom prst="ellipse">
-            <a:avLst/>
-          </a:prstGeom>
-          <a:solidFill>
-            <a:srgbClr val="B8618C"/>
-          </a:solidFill>
-          <a:ln>
-            <a:noFill/>
-          </a:ln>
-        </p:spPr>
-        <p:txBody>
-          <a:bodyPr rtlCol="0" anchor="ctr"/>
-          <a:lstStyle/>
-          <a:p>
-            <a:pPr algn="ctr"/>
-          </a:p>
-        </p:txBody>
-      </p:sp>
-      <p:sp>
-        <p:nvSpPr>
-          <p:cNvPr id="17" name="장식"/>
-          <p:cNvSpPr/>
-          <p:nvPr/>
-        </p:nvSpPr>
-        <p:spPr>
-          <a:xfrm rot="6720000">
-            <a:off x="6992878" y="2054626"/>
-            <a:ext cx="171093" cy="266145"/>
-          </a:xfrm>
-          <a:prstGeom prst="ellipse">
-            <a:avLst/>
-          </a:prstGeom>
-          <a:solidFill>
-            <a:srgbClr val="EED3E0"/>
-          </a:solidFill>
-          <a:ln>
-            <a:noFill/>
-          </a:ln>
-        </p:spPr>
-        <p:txBody>
-          <a:bodyPr rtlCol="0" anchor="ctr"/>
-          <a:lstStyle/>
-          <a:p>
-            <a:pPr algn="ctr"/>
-          </a:p>
-        </p:txBody>
-      </p:sp>
-      <p:sp>
-        <p:nvSpPr>
-          <p:cNvPr id="18" name="장식"/>
-          <p:cNvSpPr/>
-          <p:nvPr/>
-        </p:nvSpPr>
-        <p:spPr>
-          <a:xfrm rot="11040000">
-            <a:off x="6828626" y="2157262"/>
-            <a:ext cx="171093" cy="266145"/>
-          </a:xfrm>
-          <a:prstGeom prst="ellipse">
-            <a:avLst/>
-          </a:prstGeom>
-          <a:solidFill>
-            <a:srgbClr val="B8618C"/>
-          </a:solidFill>
-          <a:ln>
-            <a:noFill/>
-          </a:ln>
-        </p:spPr>
-        <p:txBody>
-          <a:bodyPr rtlCol="0" anchor="ctr"/>
-          <a:lstStyle/>
-          <a:p>
-            <a:pPr algn="ctr"/>
-          </a:p>
-        </p:txBody>
-      </p:sp>
-      <p:sp>
-        <p:nvSpPr>
-          <p:cNvPr id="19" name="장식"/>
-          <p:cNvSpPr/>
-          <p:nvPr/>
-        </p:nvSpPr>
-        <p:spPr>
-          <a:xfrm rot="15360000">
-            <a:off x="6680256" y="2032765"/>
-            <a:ext cx="171093" cy="266145"/>
-          </a:xfrm>
-          <a:prstGeom prst="ellipse">
-            <a:avLst/>
-          </a:prstGeom>
-          <a:solidFill>
-            <a:srgbClr val="EED3E0"/>
-          </a:solidFill>
-          <a:ln>
-            <a:noFill/>
-          </a:ln>
-        </p:spPr>
-        <p:txBody>
-          <a:bodyPr rtlCol="0" anchor="ctr"/>
-          <a:lstStyle/>
-          <a:p>
-            <a:pPr algn="ctr"/>
-          </a:p>
-        </p:txBody>
-      </p:sp>
-      <p:sp>
-        <p:nvSpPr>
-          <p:cNvPr id="20" name="장식"/>
-          <p:cNvSpPr/>
-          <p:nvPr/>
-        </p:nvSpPr>
-        <p:spPr>
-          <a:xfrm rot="19680000">
-            <a:off x="6752811" y="1853185"/>
-            <a:ext cx="171093" cy="266145"/>
-          </a:xfrm>
-          <a:prstGeom prst="ellipse">
-            <a:avLst/>
-          </a:prstGeom>
-          <a:solidFill>
-            <a:srgbClr val="B8618C"/>
-          </a:solidFill>
-          <a:ln>
-            <a:noFill/>
-          </a:ln>
-        </p:spPr>
-        <p:txBody>
-          <a:bodyPr rtlCol="0" anchor="ctr"/>
-          <a:lstStyle/>
-          <a:p>
-            <a:pPr algn="ctr"/>
-          </a:p>
-        </p:txBody>
-      </p:sp>
-      <p:sp>
-        <p:nvSpPr>
-          <p:cNvPr id="21" name="장식"/>
-          <p:cNvSpPr/>
-          <p:nvPr/>
-        </p:nvSpPr>
-        <p:spPr>
-          <a:xfrm>
-            <a:off x="6868634" y="2068948"/>
-            <a:ext cx="114062" cy="114062"/>
-          </a:xfrm>
-          <a:prstGeom prst="ellipse">
-            <a:avLst/>
-          </a:prstGeom>
-          <a:solidFill>
-            <a:srgbClr val="3F8D3F"/>
-          </a:solidFill>
-          <a:ln>
-            <a:noFill/>
-          </a:ln>
-        </p:spPr>
-        <p:txBody>
-          <a:bodyPr rtlCol="0" anchor="ctr"/>
-          <a:lstStyle/>
-          <a:p>
-            <a:pPr algn="ctr"/>
-          </a:p>
-        </p:txBody>
-      </p:sp>
+        </p:spPr>
+      </p:pic>
       <p:sp>
         <p:nvSpPr>
           <p:cNvPr id="2" name="Title 1"/>
@@ -9281,8 +6119,8 @@
         </p:nvSpPr>
         <p:spPr>
           <a:xfrm>
-            <a:off x="1463003" y="2263140"/>
-            <a:ext cx="9265688" cy="1371600"/>
+            <a:off x="853418" y="2057400"/>
+            <a:ext cx="6095847" cy="1554480"/>
           </a:xfrm>
         </p:spPr>
         <p:txBody>
@@ -9291,7 +6129,7 @@
           </a:bodyPr>
           <a:lstStyle/>
           <a:p>
-            <a:pPr algn="ctr">
+            <a:pPr algn="l">
               <a:lnSpc>
                 <a:spcPct val="105000"/>
               </a:lnSpc>
@@ -9302,21 +6140,21 @@
                   <a:srgbClr val="7B3759"/>
                 </a:solidFill>
               </a:rPr>
-              <a:t>함께해 주셔서 감사합니다</a:t>
-            </a:r>
-          </a:p>
-        </p:txBody>
-      </p:sp>
-      <p:sp>
-        <p:nvSpPr>
-          <p:cNvPr id="22" name="한 줄 문구"/>
+              <a:t>와 주셔서 고맙습니다</a:t>
+            </a:r>
+          </a:p>
+        </p:txBody>
+      </p:sp>
+      <p:sp>
+        <p:nvSpPr>
+          <p:cNvPr id="4" name="한 줄 문구"/>
           <p:cNvSpPr txBox="1"/>
           <p:nvPr/>
         </p:nvSpPr>
         <p:spPr>
           <a:xfrm>
-            <a:off x="1463003" y="3726180"/>
-            <a:ext cx="9265688" cy="822960"/>
+            <a:off x="853418" y="3749039"/>
+            <a:ext cx="6095847" cy="822960"/>
           </a:xfrm>
           <a:prstGeom prst="rect">
             <a:avLst/>
@@ -9329,7 +6167,7 @@
           </a:bodyPr>
           <a:lstStyle/>
           <a:p>
-            <a:pPr algn="ctr">
+            <a:pPr algn="l">
               <a:lnSpc>
                 <a:spcPct val="115000"/>
               </a:lnSpc>
@@ -9340,21 +6178,21 @@
                   <a:srgbClr val="7B3759"/>
                 </a:solidFill>
               </a:rPr>
-              <a:t>첫 번째 생일을 축하해 주셔서 고맙습니다</a:t>
-            </a:r>
-          </a:p>
-        </p:txBody>
-      </p:sp>
-      <p:sp>
-        <p:nvSpPr>
-          <p:cNvPr id="23" name="안내 문구"/>
+              <a:t>아이가 한 살이 되었습니다</a:t>
+            </a:r>
+          </a:p>
+        </p:txBody>
+      </p:sp>
+      <p:sp>
+        <p:nvSpPr>
+          <p:cNvPr id="5" name="안내 문구"/>
           <p:cNvSpPr txBox="1"/>
           <p:nvPr/>
         </p:nvSpPr>
         <p:spPr>
           <a:xfrm>
-            <a:off x="1463003" y="4594860"/>
-            <a:ext cx="9265688" cy="914400"/>
+            <a:off x="853418" y="4617720"/>
+            <a:ext cx="6095847" cy="914400"/>
           </a:xfrm>
           <a:prstGeom prst="rect">
             <a:avLst/>
@@ -9367,7 +6205,7 @@
           </a:bodyPr>
           <a:lstStyle/>
           <a:p>
-            <a:pPr algn="ctr">
+            <a:pPr algn="l">
               <a:lnSpc>
                 <a:spcPct val="115000"/>
               </a:lnSpc>

--- a/public/fun/pack/pptx/birthday/돌잔치_25_첫번째이야기중심_연꽃연못.pptx
+++ b/public/fun/pack/pptx/birthday/돌잔치_25_첫번째이야기중심_연꽃연못.pptx
@@ -3347,7 +3347,7 @@
             <a:r>
               <a:rPr sz="4000" b="1" i="0">
                 <a:solidFill>
-                  <a:srgbClr val="7B3759"/>
+                  <a:srgbClr val="1D115F"/>
                 </a:solidFill>
               </a:rPr>
               <a:t>첫 번째 생일</a:t>
@@ -3385,7 +3385,7 @@
             <a:r>
               <a:rPr sz="1700" b="0" i="1">
                 <a:solidFill>
-                  <a:srgbClr val="7B3759"/>
+                  <a:srgbClr val="1D115F"/>
                 </a:solidFill>
               </a:rPr>
               <a:t>태어나서 처음 맞은 여름 이야기입니다</a:t>
@@ -3460,7 +3460,7 @@
     <p:bg>
       <p:bgPr>
         <a:solidFill>
-          <a:srgbClr val="B8618C"/>
+          <a:srgbClr val="3D26C5"/>
         </a:solidFill>
         <a:effectLst/>
       </p:bgPr>
@@ -3533,7 +3533,7 @@
             <a:r>
               <a:rPr sz="3000" b="1" i="0">
                 <a:solidFill>
-                  <a:srgbClr val="7B3759"/>
+                  <a:srgbClr val="1D115F"/>
                 </a:solidFill>
               </a:rPr>
               <a:t>우리 아기를 소개합니다</a:t>
@@ -3558,11 +3558,11 @@
             </a:avLst>
           </a:prstGeom>
           <a:solidFill>
-            <a:srgbClr val="EED3E0"/>
+            <a:srgbClr val="D7D1FA"/>
           </a:solidFill>
           <a:ln w="19050">
             <a:solidFill>
-              <a:srgbClr val="B8618C"/>
+              <a:srgbClr val="3D26C5"/>
             </a:solidFill>
             <a:prstDash val="dash"/>
           </a:ln>
@@ -3581,7 +3581,7 @@
             <a:r>
               <a:rPr sz="1400" b="0" i="0">
                 <a:solidFill>
-                  <a:srgbClr val="7B3759"/>
+                  <a:srgbClr val="1D115F"/>
                 </a:solidFill>
               </a:rPr>
               <a:t>아기 사진을 넣어 주세요</a:t>
@@ -3621,7 +3621,7 @@
                       <a:r>
                         <a:rPr sz="1500" b="1">
                           <a:solidFill>
-                            <a:srgbClr val="7B3759"/>
+                            <a:srgbClr val="1D115F"/>
                           </a:solidFill>
                         </a:rPr>
                         <a:t>이름</a:t>
@@ -3631,30 +3631,30 @@
                   <a:tcPr anchor="ctr" marL="73152" marR="73152">
                     <a:lnL w="9525" cap="flat" cmpd="sng" algn="ctr">
                       <a:solidFill>
-                        <a:srgbClr val="EED3E0"/>
+                        <a:srgbClr val="D7D1FA"/>
                       </a:solidFill>
                       <a:prstDash val="solid"/>
                     </a:lnL>
                     <a:lnR w="9525" cap="flat" cmpd="sng" algn="ctr">
                       <a:solidFill>
-                        <a:srgbClr val="EED3E0"/>
+                        <a:srgbClr val="D7D1FA"/>
                       </a:solidFill>
                       <a:prstDash val="solid"/>
                     </a:lnR>
                     <a:lnT w="9525" cap="flat" cmpd="sng" algn="ctr">
                       <a:solidFill>
-                        <a:srgbClr val="EED3E0"/>
+                        <a:srgbClr val="D7D1FA"/>
                       </a:solidFill>
                       <a:prstDash val="solid"/>
                     </a:lnT>
                     <a:lnB w="9525" cap="flat" cmpd="sng" algn="ctr">
                       <a:solidFill>
-                        <a:srgbClr val="EED3E0"/>
+                        <a:srgbClr val="D7D1FA"/>
                       </a:solidFill>
                       <a:prstDash val="solid"/>
                     </a:lnB>
                     <a:solidFill>
-                      <a:srgbClr val="EED3E0"/>
+                      <a:srgbClr val="D7D1FA"/>
                     </a:solidFill>
                   </a:tcPr>
                 </a:tc>
@@ -3677,30 +3677,30 @@
                   <a:tcPr anchor="ctr" marL="73152" marR="73152">
                     <a:lnL w="9525" cap="flat" cmpd="sng" algn="ctr">
                       <a:solidFill>
-                        <a:srgbClr val="EED3E0"/>
+                        <a:srgbClr val="D7D1FA"/>
                       </a:solidFill>
                       <a:prstDash val="solid"/>
                     </a:lnL>
                     <a:lnR w="9525" cap="flat" cmpd="sng" algn="ctr">
                       <a:solidFill>
-                        <a:srgbClr val="EED3E0"/>
+                        <a:srgbClr val="D7D1FA"/>
                       </a:solidFill>
                       <a:prstDash val="solid"/>
                     </a:lnR>
                     <a:lnT w="9525" cap="flat" cmpd="sng" algn="ctr">
                       <a:solidFill>
-                        <a:srgbClr val="EED3E0"/>
+                        <a:srgbClr val="D7D1FA"/>
                       </a:solidFill>
                       <a:prstDash val="solid"/>
                     </a:lnT>
                     <a:lnB w="9525" cap="flat" cmpd="sng" algn="ctr">
                       <a:solidFill>
-                        <a:srgbClr val="EED3E0"/>
+                        <a:srgbClr val="D7D1FA"/>
                       </a:solidFill>
                       <a:prstDash val="solid"/>
                     </a:lnB>
                     <a:solidFill>
-                      <a:srgbClr val="F9F1F5"/>
+                      <a:srgbClr val="F0EEFC"/>
                     </a:solidFill>
                   </a:tcPr>
                 </a:tc>
@@ -3715,7 +3715,7 @@
                       <a:r>
                         <a:rPr sz="1500" b="1">
                           <a:solidFill>
-                            <a:srgbClr val="7B3759"/>
+                            <a:srgbClr val="1D115F"/>
                           </a:solidFill>
                         </a:rPr>
                         <a:t>생일</a:t>
@@ -3725,30 +3725,30 @@
                   <a:tcPr anchor="ctr" marL="73152" marR="73152">
                     <a:lnL w="9525" cap="flat" cmpd="sng" algn="ctr">
                       <a:solidFill>
-                        <a:srgbClr val="EED3E0"/>
+                        <a:srgbClr val="D7D1FA"/>
                       </a:solidFill>
                       <a:prstDash val="solid"/>
                     </a:lnL>
                     <a:lnR w="9525" cap="flat" cmpd="sng" algn="ctr">
                       <a:solidFill>
-                        <a:srgbClr val="EED3E0"/>
+                        <a:srgbClr val="D7D1FA"/>
                       </a:solidFill>
                       <a:prstDash val="solid"/>
                     </a:lnR>
                     <a:lnT w="9525" cap="flat" cmpd="sng" algn="ctr">
                       <a:solidFill>
-                        <a:srgbClr val="EED3E0"/>
+                        <a:srgbClr val="D7D1FA"/>
                       </a:solidFill>
                       <a:prstDash val="solid"/>
                     </a:lnT>
                     <a:lnB w="9525" cap="flat" cmpd="sng" algn="ctr">
                       <a:solidFill>
-                        <a:srgbClr val="EED3E0"/>
+                        <a:srgbClr val="D7D1FA"/>
                       </a:solidFill>
                       <a:prstDash val="solid"/>
                     </a:lnB>
                     <a:solidFill>
-                      <a:srgbClr val="EED3E0"/>
+                      <a:srgbClr val="D7D1FA"/>
                     </a:solidFill>
                   </a:tcPr>
                 </a:tc>
@@ -3771,25 +3771,25 @@
                   <a:tcPr anchor="ctr" marL="73152" marR="73152">
                     <a:lnL w="9525" cap="flat" cmpd="sng" algn="ctr">
                       <a:solidFill>
-                        <a:srgbClr val="EED3E0"/>
+                        <a:srgbClr val="D7D1FA"/>
                       </a:solidFill>
                       <a:prstDash val="solid"/>
                     </a:lnL>
                     <a:lnR w="9525" cap="flat" cmpd="sng" algn="ctr">
                       <a:solidFill>
-                        <a:srgbClr val="EED3E0"/>
+                        <a:srgbClr val="D7D1FA"/>
                       </a:solidFill>
                       <a:prstDash val="solid"/>
                     </a:lnR>
                     <a:lnT w="9525" cap="flat" cmpd="sng" algn="ctr">
                       <a:solidFill>
-                        <a:srgbClr val="EED3E0"/>
+                        <a:srgbClr val="D7D1FA"/>
                       </a:solidFill>
                       <a:prstDash val="solid"/>
                     </a:lnT>
                     <a:lnB w="9525" cap="flat" cmpd="sng" algn="ctr">
                       <a:solidFill>
-                        <a:srgbClr val="EED3E0"/>
+                        <a:srgbClr val="D7D1FA"/>
                       </a:solidFill>
                       <a:prstDash val="solid"/>
                     </a:lnB>
@@ -3809,7 +3809,7 @@
                       <a:r>
                         <a:rPr sz="1500" b="1">
                           <a:solidFill>
-                            <a:srgbClr val="7B3759"/>
+                            <a:srgbClr val="1D115F"/>
                           </a:solidFill>
                         </a:rPr>
                         <a:t>키 · 몸무게</a:t>
@@ -3819,30 +3819,30 @@
                   <a:tcPr anchor="ctr" marL="73152" marR="73152">
                     <a:lnL w="9525" cap="flat" cmpd="sng" algn="ctr">
                       <a:solidFill>
-                        <a:srgbClr val="EED3E0"/>
+                        <a:srgbClr val="D7D1FA"/>
                       </a:solidFill>
                       <a:prstDash val="solid"/>
                     </a:lnL>
                     <a:lnR w="9525" cap="flat" cmpd="sng" algn="ctr">
                       <a:solidFill>
-                        <a:srgbClr val="EED3E0"/>
+                        <a:srgbClr val="D7D1FA"/>
                       </a:solidFill>
                       <a:prstDash val="solid"/>
                     </a:lnR>
                     <a:lnT w="9525" cap="flat" cmpd="sng" algn="ctr">
                       <a:solidFill>
-                        <a:srgbClr val="EED3E0"/>
+                        <a:srgbClr val="D7D1FA"/>
                       </a:solidFill>
                       <a:prstDash val="solid"/>
                     </a:lnT>
                     <a:lnB w="9525" cap="flat" cmpd="sng" algn="ctr">
                       <a:solidFill>
-                        <a:srgbClr val="EED3E0"/>
+                        <a:srgbClr val="D7D1FA"/>
                       </a:solidFill>
                       <a:prstDash val="solid"/>
                     </a:lnB>
                     <a:solidFill>
-                      <a:srgbClr val="EED3E0"/>
+                      <a:srgbClr val="D7D1FA"/>
                     </a:solidFill>
                   </a:tcPr>
                 </a:tc>
@@ -3865,30 +3865,30 @@
                   <a:tcPr anchor="ctr" marL="73152" marR="73152">
                     <a:lnL w="9525" cap="flat" cmpd="sng" algn="ctr">
                       <a:solidFill>
-                        <a:srgbClr val="EED3E0"/>
+                        <a:srgbClr val="D7D1FA"/>
                       </a:solidFill>
                       <a:prstDash val="solid"/>
                     </a:lnL>
                     <a:lnR w="9525" cap="flat" cmpd="sng" algn="ctr">
                       <a:solidFill>
-                        <a:srgbClr val="EED3E0"/>
+                        <a:srgbClr val="D7D1FA"/>
                       </a:solidFill>
                       <a:prstDash val="solid"/>
                     </a:lnR>
                     <a:lnT w="9525" cap="flat" cmpd="sng" algn="ctr">
                       <a:solidFill>
-                        <a:srgbClr val="EED3E0"/>
+                        <a:srgbClr val="D7D1FA"/>
                       </a:solidFill>
                       <a:prstDash val="solid"/>
                     </a:lnT>
                     <a:lnB w="9525" cap="flat" cmpd="sng" algn="ctr">
                       <a:solidFill>
-                        <a:srgbClr val="EED3E0"/>
+                        <a:srgbClr val="D7D1FA"/>
                       </a:solidFill>
                       <a:prstDash val="solid"/>
                     </a:lnB>
                     <a:solidFill>
-                      <a:srgbClr val="F9F1F5"/>
+                      <a:srgbClr val="F0EEFC"/>
                     </a:solidFill>
                   </a:tcPr>
                 </a:tc>
@@ -3903,7 +3903,7 @@
                       <a:r>
                         <a:rPr sz="1500" b="1">
                           <a:solidFill>
-                            <a:srgbClr val="7B3759"/>
+                            <a:srgbClr val="1D115F"/>
                           </a:solidFill>
                         </a:rPr>
                         <a:t>좋아하는 것</a:t>
@@ -3913,30 +3913,30 @@
                   <a:tcPr anchor="ctr" marL="73152" marR="73152">
                     <a:lnL w="9525" cap="flat" cmpd="sng" algn="ctr">
                       <a:solidFill>
-                        <a:srgbClr val="EED3E0"/>
+                        <a:srgbClr val="D7D1FA"/>
                       </a:solidFill>
                       <a:prstDash val="solid"/>
                     </a:lnL>
                     <a:lnR w="9525" cap="flat" cmpd="sng" algn="ctr">
                       <a:solidFill>
-                        <a:srgbClr val="EED3E0"/>
+                        <a:srgbClr val="D7D1FA"/>
                       </a:solidFill>
                       <a:prstDash val="solid"/>
                     </a:lnR>
                     <a:lnT w="9525" cap="flat" cmpd="sng" algn="ctr">
                       <a:solidFill>
-                        <a:srgbClr val="EED3E0"/>
+                        <a:srgbClr val="D7D1FA"/>
                       </a:solidFill>
                       <a:prstDash val="solid"/>
                     </a:lnT>
                     <a:lnB w="9525" cap="flat" cmpd="sng" algn="ctr">
                       <a:solidFill>
-                        <a:srgbClr val="EED3E0"/>
+                        <a:srgbClr val="D7D1FA"/>
                       </a:solidFill>
                       <a:prstDash val="solid"/>
                     </a:lnB>
                     <a:solidFill>
-                      <a:srgbClr val="EED3E0"/>
+                      <a:srgbClr val="D7D1FA"/>
                     </a:solidFill>
                   </a:tcPr>
                 </a:tc>
@@ -3959,25 +3959,25 @@
                   <a:tcPr anchor="ctr" marL="73152" marR="73152">
                     <a:lnL w="9525" cap="flat" cmpd="sng" algn="ctr">
                       <a:solidFill>
-                        <a:srgbClr val="EED3E0"/>
+                        <a:srgbClr val="D7D1FA"/>
                       </a:solidFill>
                       <a:prstDash val="solid"/>
                     </a:lnL>
                     <a:lnR w="9525" cap="flat" cmpd="sng" algn="ctr">
                       <a:solidFill>
-                        <a:srgbClr val="EED3E0"/>
+                        <a:srgbClr val="D7D1FA"/>
                       </a:solidFill>
                       <a:prstDash val="solid"/>
                     </a:lnR>
                     <a:lnT w="9525" cap="flat" cmpd="sng" algn="ctr">
                       <a:solidFill>
-                        <a:srgbClr val="EED3E0"/>
+                        <a:srgbClr val="D7D1FA"/>
                       </a:solidFill>
                       <a:prstDash val="solid"/>
                     </a:lnT>
                     <a:lnB w="9525" cap="flat" cmpd="sng" algn="ctr">
                       <a:solidFill>
-                        <a:srgbClr val="EED3E0"/>
+                        <a:srgbClr val="D7D1FA"/>
                       </a:solidFill>
                       <a:prstDash val="solid"/>
                     </a:lnB>
@@ -3997,7 +3997,7 @@
                       <a:r>
                         <a:rPr sz="1500" b="1">
                           <a:solidFill>
-                            <a:srgbClr val="7B3759"/>
+                            <a:srgbClr val="1D115F"/>
                           </a:solidFill>
                         </a:rPr>
                         <a:t>별명</a:t>
@@ -4007,30 +4007,30 @@
                   <a:tcPr anchor="ctr" marL="73152" marR="73152">
                     <a:lnL w="9525" cap="flat" cmpd="sng" algn="ctr">
                       <a:solidFill>
-                        <a:srgbClr val="EED3E0"/>
+                        <a:srgbClr val="D7D1FA"/>
                       </a:solidFill>
                       <a:prstDash val="solid"/>
                     </a:lnL>
                     <a:lnR w="9525" cap="flat" cmpd="sng" algn="ctr">
                       <a:solidFill>
-                        <a:srgbClr val="EED3E0"/>
+                        <a:srgbClr val="D7D1FA"/>
                       </a:solidFill>
                       <a:prstDash val="solid"/>
                     </a:lnR>
                     <a:lnT w="9525" cap="flat" cmpd="sng" algn="ctr">
                       <a:solidFill>
-                        <a:srgbClr val="EED3E0"/>
+                        <a:srgbClr val="D7D1FA"/>
                       </a:solidFill>
                       <a:prstDash val="solid"/>
                     </a:lnT>
                     <a:lnB w="9525" cap="flat" cmpd="sng" algn="ctr">
                       <a:solidFill>
-                        <a:srgbClr val="EED3E0"/>
+                        <a:srgbClr val="D7D1FA"/>
                       </a:solidFill>
                       <a:prstDash val="solid"/>
                     </a:lnB>
                     <a:solidFill>
-                      <a:srgbClr val="EED3E0"/>
+                      <a:srgbClr val="D7D1FA"/>
                     </a:solidFill>
                   </a:tcPr>
                 </a:tc>
@@ -4053,30 +4053,30 @@
                   <a:tcPr anchor="ctr" marL="73152" marR="73152">
                     <a:lnL w="9525" cap="flat" cmpd="sng" algn="ctr">
                       <a:solidFill>
-                        <a:srgbClr val="EED3E0"/>
+                        <a:srgbClr val="D7D1FA"/>
                       </a:solidFill>
                       <a:prstDash val="solid"/>
                     </a:lnL>
                     <a:lnR w="9525" cap="flat" cmpd="sng" algn="ctr">
                       <a:solidFill>
-                        <a:srgbClr val="EED3E0"/>
+                        <a:srgbClr val="D7D1FA"/>
                       </a:solidFill>
                       <a:prstDash val="solid"/>
                     </a:lnR>
                     <a:lnT w="9525" cap="flat" cmpd="sng" algn="ctr">
                       <a:solidFill>
-                        <a:srgbClr val="EED3E0"/>
+                        <a:srgbClr val="D7D1FA"/>
                       </a:solidFill>
                       <a:prstDash val="solid"/>
                     </a:lnT>
                     <a:lnB w="9525" cap="flat" cmpd="sng" algn="ctr">
                       <a:solidFill>
-                        <a:srgbClr val="EED3E0"/>
+                        <a:srgbClr val="D7D1FA"/>
                       </a:solidFill>
                       <a:prstDash val="solid"/>
                     </a:lnB>
                     <a:solidFill>
-                      <a:srgbClr val="F9F1F5"/>
+                      <a:srgbClr val="F0EEFC"/>
                     </a:solidFill>
                   </a:tcPr>
                 </a:tc>
@@ -4091,7 +4091,7 @@
                       <a:r>
                         <a:rPr sz="1500" b="1">
                           <a:solidFill>
-                            <a:srgbClr val="7B3759"/>
+                            <a:srgbClr val="1D115F"/>
                           </a:solidFill>
                         </a:rPr>
                         <a:t>부모의 마음</a:t>
@@ -4101,30 +4101,30 @@
                   <a:tcPr anchor="ctr" marL="73152" marR="73152">
                     <a:lnL w="9525" cap="flat" cmpd="sng" algn="ctr">
                       <a:solidFill>
-                        <a:srgbClr val="EED3E0"/>
+                        <a:srgbClr val="D7D1FA"/>
                       </a:solidFill>
                       <a:prstDash val="solid"/>
                     </a:lnL>
                     <a:lnR w="9525" cap="flat" cmpd="sng" algn="ctr">
                       <a:solidFill>
-                        <a:srgbClr val="EED3E0"/>
+                        <a:srgbClr val="D7D1FA"/>
                       </a:solidFill>
                       <a:prstDash val="solid"/>
                     </a:lnR>
                     <a:lnT w="9525" cap="flat" cmpd="sng" algn="ctr">
                       <a:solidFill>
-                        <a:srgbClr val="EED3E0"/>
+                        <a:srgbClr val="D7D1FA"/>
                       </a:solidFill>
                       <a:prstDash val="solid"/>
                     </a:lnT>
                     <a:lnB w="9525" cap="flat" cmpd="sng" algn="ctr">
                       <a:solidFill>
-                        <a:srgbClr val="EED3E0"/>
+                        <a:srgbClr val="D7D1FA"/>
                       </a:solidFill>
                       <a:prstDash val="solid"/>
                     </a:lnB>
                     <a:solidFill>
-                      <a:srgbClr val="EED3E0"/>
+                      <a:srgbClr val="D7D1FA"/>
                     </a:solidFill>
                   </a:tcPr>
                 </a:tc>
@@ -4147,25 +4147,25 @@
                   <a:tcPr anchor="ctr" marL="73152" marR="73152">
                     <a:lnL w="9525" cap="flat" cmpd="sng" algn="ctr">
                       <a:solidFill>
-                        <a:srgbClr val="EED3E0"/>
+                        <a:srgbClr val="D7D1FA"/>
                       </a:solidFill>
                       <a:prstDash val="solid"/>
                     </a:lnL>
                     <a:lnR w="9525" cap="flat" cmpd="sng" algn="ctr">
                       <a:solidFill>
-                        <a:srgbClr val="EED3E0"/>
+                        <a:srgbClr val="D7D1FA"/>
                       </a:solidFill>
                       <a:prstDash val="solid"/>
                     </a:lnR>
                     <a:lnT w="9525" cap="flat" cmpd="sng" algn="ctr">
                       <a:solidFill>
-                        <a:srgbClr val="EED3E0"/>
+                        <a:srgbClr val="D7D1FA"/>
                       </a:solidFill>
                       <a:prstDash val="solid"/>
                     </a:lnT>
                     <a:lnB w="9525" cap="flat" cmpd="sng" algn="ctr">
                       <a:solidFill>
-                        <a:srgbClr val="EED3E0"/>
+                        <a:srgbClr val="D7D1FA"/>
                       </a:solidFill>
                       <a:prstDash val="solid"/>
                     </a:lnB>
@@ -4193,7 +4193,7 @@
     <p:bg>
       <p:bgPr>
         <a:solidFill>
-          <a:srgbClr val="B8618C"/>
+          <a:srgbClr val="3D26C5"/>
         </a:solidFill>
         <a:effectLst/>
       </p:bgPr>
@@ -4266,7 +4266,7 @@
             <a:r>
               <a:rPr sz="3000" b="1" i="0">
                 <a:solidFill>
-                  <a:srgbClr val="7B3759"/>
+                  <a:srgbClr val="1D115F"/>
                 </a:solidFill>
               </a:rPr>
               <a:t>태어난 날 이야기</a:t>
@@ -4289,7 +4289,7 @@
             <a:avLst/>
           </a:prstGeom>
           <a:solidFill>
-            <a:srgbClr val="EED3E0"/>
+            <a:srgbClr val="D7D1FA"/>
           </a:solidFill>
           <a:ln>
             <a:noFill/>
@@ -4318,7 +4318,7 @@
             <a:avLst/>
           </a:prstGeom>
           <a:solidFill>
-            <a:srgbClr val="B8618C"/>
+            <a:srgbClr val="3D26C5"/>
           </a:solidFill>
           <a:ln w="38100">
             <a:solidFill>
@@ -4364,7 +4364,7 @@
             <a:r>
               <a:rPr sz="1600" b="1" i="0">
                 <a:solidFill>
-                  <a:srgbClr val="B8618C"/>
+                  <a:srgbClr val="3D26C5"/>
                 </a:solidFill>
               </a:rPr>
               <a:t>임신</a:t>
@@ -4402,7 +4402,7 @@
             <a:r>
               <a:rPr sz="1800" b="1" i="0">
                 <a:solidFill>
-                  <a:srgbClr val="7B3759"/>
+                  <a:srgbClr val="1D115F"/>
                 </a:solidFill>
               </a:rPr>
               <a:t>소식을 들은 날</a:t>
@@ -4463,7 +4463,7 @@
             <a:avLst/>
           </a:prstGeom>
           <a:solidFill>
-            <a:srgbClr val="B8618C"/>
+            <a:srgbClr val="3D26C5"/>
           </a:solidFill>
           <a:ln w="38100">
             <a:solidFill>
@@ -4509,7 +4509,7 @@
             <a:r>
               <a:rPr sz="1600" b="1" i="0">
                 <a:solidFill>
-                  <a:srgbClr val="B8618C"/>
+                  <a:srgbClr val="3D26C5"/>
                 </a:solidFill>
               </a:rPr>
               <a:t>출산</a:t>
@@ -4547,7 +4547,7 @@
             <a:r>
               <a:rPr sz="1800" b="1" i="0">
                 <a:solidFill>
-                  <a:srgbClr val="7B3759"/>
+                  <a:srgbClr val="1D115F"/>
                 </a:solidFill>
               </a:rPr>
               <a:t>태어난 날</a:t>
@@ -4608,7 +4608,7 @@
             <a:avLst/>
           </a:prstGeom>
           <a:solidFill>
-            <a:srgbClr val="B8618C"/>
+            <a:srgbClr val="3D26C5"/>
           </a:solidFill>
           <a:ln w="38100">
             <a:solidFill>
@@ -4654,7 +4654,7 @@
             <a:r>
               <a:rPr sz="1600" b="1" i="0">
                 <a:solidFill>
-                  <a:srgbClr val="B8618C"/>
+                  <a:srgbClr val="3D26C5"/>
                 </a:solidFill>
               </a:rPr>
               <a:t>첫 만남</a:t>
@@ -4692,7 +4692,7 @@
             <a:r>
               <a:rPr sz="1800" b="1" i="0">
                 <a:solidFill>
-                  <a:srgbClr val="7B3759"/>
+                  <a:srgbClr val="1D115F"/>
                 </a:solidFill>
               </a:rPr>
               <a:t>품에 안은 순간</a:t>
@@ -4753,7 +4753,7 @@
             <a:avLst/>
           </a:prstGeom>
           <a:solidFill>
-            <a:srgbClr val="B8618C"/>
+            <a:srgbClr val="3D26C5"/>
           </a:solidFill>
           <a:ln w="38100">
             <a:solidFill>
@@ -4799,7 +4799,7 @@
             <a:r>
               <a:rPr sz="1600" b="1" i="0">
                 <a:solidFill>
-                  <a:srgbClr val="B8618C"/>
+                  <a:srgbClr val="3D26C5"/>
                 </a:solidFill>
               </a:rPr>
               <a:t>집으로</a:t>
@@ -4837,7 +4837,7 @@
             <a:r>
               <a:rPr sz="1800" b="1" i="0">
                 <a:solidFill>
-                  <a:srgbClr val="7B3759"/>
+                  <a:srgbClr val="1D115F"/>
                 </a:solidFill>
               </a:rPr>
               <a:t>함께 돌아온 날</a:t>
@@ -4897,7 +4897,7 @@
     <p:bg>
       <p:bgPr>
         <a:solidFill>
-          <a:srgbClr val="B8618C"/>
+          <a:srgbClr val="3D26C5"/>
         </a:solidFill>
         <a:effectLst/>
       </p:bgPr>
@@ -4970,7 +4970,7 @@
             <a:r>
               <a:rPr sz="3000" b="1" i="0">
                 <a:solidFill>
-                  <a:srgbClr val="7B3759"/>
+                  <a:srgbClr val="1D115F"/>
                 </a:solidFill>
               </a:rPr>
               <a:t>첫 번째 순간들</a:t>
@@ -4995,11 +4995,11 @@
             </a:avLst>
           </a:prstGeom>
           <a:solidFill>
-            <a:srgbClr val="F9F1F5"/>
+            <a:srgbClr val="F0EEFC"/>
           </a:solidFill>
           <a:ln w="15875">
             <a:solidFill>
-              <a:srgbClr val="EED3E0"/>
+              <a:srgbClr val="D7D1FA"/>
             </a:solidFill>
           </a:ln>
         </p:spPr>
@@ -5026,7 +5026,7 @@
             <a:avLst/>
           </a:prstGeom>
           <a:solidFill>
-            <a:srgbClr val="B8618C"/>
+            <a:srgbClr val="3D26C5"/>
           </a:solidFill>
           <a:ln>
             <a:noFill/>
@@ -5084,7 +5084,7 @@
             <a:r>
               <a:rPr sz="1800" b="1" i="0">
                 <a:solidFill>
-                  <a:srgbClr val="7B3759"/>
+                  <a:srgbClr val="1D115F"/>
                 </a:solidFill>
               </a:rPr>
               <a:t>첫 웃음</a:t>
@@ -5147,11 +5147,11 @@
             </a:avLst>
           </a:prstGeom>
           <a:solidFill>
-            <a:srgbClr val="F9F1F5"/>
+            <a:srgbClr val="F0EEFC"/>
           </a:solidFill>
           <a:ln w="15875">
             <a:solidFill>
-              <a:srgbClr val="EED3E0"/>
+              <a:srgbClr val="D7D1FA"/>
             </a:solidFill>
           </a:ln>
         </p:spPr>
@@ -5178,7 +5178,7 @@
             <a:avLst/>
           </a:prstGeom>
           <a:solidFill>
-            <a:srgbClr val="B8618C"/>
+            <a:srgbClr val="3D26C5"/>
           </a:solidFill>
           <a:ln>
             <a:noFill/>
@@ -5236,7 +5236,7 @@
             <a:r>
               <a:rPr sz="1800" b="1" i="0">
                 <a:solidFill>
-                  <a:srgbClr val="7B3759"/>
+                  <a:srgbClr val="1D115F"/>
                 </a:solidFill>
               </a:rPr>
               <a:t>첫 뒤집기</a:t>
@@ -5299,11 +5299,11 @@
             </a:avLst>
           </a:prstGeom>
           <a:solidFill>
-            <a:srgbClr val="F9F1F5"/>
+            <a:srgbClr val="F0EEFC"/>
           </a:solidFill>
           <a:ln w="15875">
             <a:solidFill>
-              <a:srgbClr val="EED3E0"/>
+              <a:srgbClr val="D7D1FA"/>
             </a:solidFill>
           </a:ln>
         </p:spPr>
@@ -5330,7 +5330,7 @@
             <a:avLst/>
           </a:prstGeom>
           <a:solidFill>
-            <a:srgbClr val="B8618C"/>
+            <a:srgbClr val="3D26C5"/>
           </a:solidFill>
           <a:ln>
             <a:noFill/>
@@ -5388,7 +5388,7 @@
             <a:r>
               <a:rPr sz="1800" b="1" i="0">
                 <a:solidFill>
-                  <a:srgbClr val="7B3759"/>
+                  <a:srgbClr val="1D115F"/>
                 </a:solidFill>
               </a:rPr>
               <a:t>첫 이</a:t>
@@ -5451,11 +5451,11 @@
             </a:avLst>
           </a:prstGeom>
           <a:solidFill>
-            <a:srgbClr val="F9F1F5"/>
+            <a:srgbClr val="F0EEFC"/>
           </a:solidFill>
           <a:ln w="15875">
             <a:solidFill>
-              <a:srgbClr val="EED3E0"/>
+              <a:srgbClr val="D7D1FA"/>
             </a:solidFill>
           </a:ln>
         </p:spPr>
@@ -5482,7 +5482,7 @@
             <a:avLst/>
           </a:prstGeom>
           <a:solidFill>
-            <a:srgbClr val="B8618C"/>
+            <a:srgbClr val="3D26C5"/>
           </a:solidFill>
           <a:ln>
             <a:noFill/>
@@ -5540,7 +5540,7 @@
             <a:r>
               <a:rPr sz="1800" b="1" i="0">
                 <a:solidFill>
-                  <a:srgbClr val="7B3759"/>
+                  <a:srgbClr val="1D115F"/>
                 </a:solidFill>
               </a:rPr>
               <a:t>첫 걸음</a:t>
@@ -5600,7 +5600,7 @@
     <p:bg>
       <p:bgPr>
         <a:solidFill>
-          <a:srgbClr val="B8618C"/>
+          <a:srgbClr val="3D26C5"/>
         </a:solidFill>
         <a:effectLst/>
       </p:bgPr>
@@ -5673,7 +5673,7 @@
             <a:r>
               <a:rPr sz="3000" b="1" i="0">
                 <a:solidFill>
-                  <a:srgbClr val="7B3759"/>
+                  <a:srgbClr val="1D115F"/>
                 </a:solidFill>
               </a:rPr>
               <a:t>사진 모음</a:t>
@@ -5698,11 +5698,11 @@
             </a:avLst>
           </a:prstGeom>
           <a:solidFill>
-            <a:srgbClr val="EED3E0"/>
+            <a:srgbClr val="D7D1FA"/>
           </a:solidFill>
           <a:ln w="19050">
             <a:solidFill>
-              <a:srgbClr val="B8618C"/>
+              <a:srgbClr val="3D26C5"/>
             </a:solidFill>
             <a:prstDash val="dash"/>
           </a:ln>
@@ -5721,7 +5721,7 @@
             <a:r>
               <a:rPr sz="1200" b="0" i="0">
                 <a:solidFill>
-                  <a:srgbClr val="7B3759"/>
+                  <a:srgbClr val="1D115F"/>
                 </a:solidFill>
               </a:rPr>
               <a:t>사진 1</a:t>
@@ -5746,11 +5746,11 @@
             </a:avLst>
           </a:prstGeom>
           <a:solidFill>
-            <a:srgbClr val="EED3E0"/>
+            <a:srgbClr val="D7D1FA"/>
           </a:solidFill>
           <a:ln w="19050">
             <a:solidFill>
-              <a:srgbClr val="B8618C"/>
+              <a:srgbClr val="3D26C5"/>
             </a:solidFill>
             <a:prstDash val="dash"/>
           </a:ln>
@@ -5769,7 +5769,7 @@
             <a:r>
               <a:rPr sz="1200" b="0" i="0">
                 <a:solidFill>
-                  <a:srgbClr val="7B3759"/>
+                  <a:srgbClr val="1D115F"/>
                 </a:solidFill>
               </a:rPr>
               <a:t>사진 2</a:t>
@@ -5794,11 +5794,11 @@
             </a:avLst>
           </a:prstGeom>
           <a:solidFill>
-            <a:srgbClr val="EED3E0"/>
+            <a:srgbClr val="D7D1FA"/>
           </a:solidFill>
           <a:ln w="19050">
             <a:solidFill>
-              <a:srgbClr val="B8618C"/>
+              <a:srgbClr val="3D26C5"/>
             </a:solidFill>
             <a:prstDash val="dash"/>
           </a:ln>
@@ -5817,7 +5817,7 @@
             <a:r>
               <a:rPr sz="1200" b="0" i="0">
                 <a:solidFill>
-                  <a:srgbClr val="7B3759"/>
+                  <a:srgbClr val="1D115F"/>
                 </a:solidFill>
               </a:rPr>
               <a:t>사진 3</a:t>
@@ -5842,11 +5842,11 @@
             </a:avLst>
           </a:prstGeom>
           <a:solidFill>
-            <a:srgbClr val="EED3E0"/>
+            <a:srgbClr val="D7D1FA"/>
           </a:solidFill>
           <a:ln w="19050">
             <a:solidFill>
-              <a:srgbClr val="B8618C"/>
+              <a:srgbClr val="3D26C5"/>
             </a:solidFill>
             <a:prstDash val="dash"/>
           </a:ln>
@@ -5865,7 +5865,7 @@
             <a:r>
               <a:rPr sz="1200" b="0" i="0">
                 <a:solidFill>
-                  <a:srgbClr val="7B3759"/>
+                  <a:srgbClr val="1D115F"/>
                 </a:solidFill>
               </a:rPr>
               <a:t>사진 4</a:t>
@@ -5890,11 +5890,11 @@
             </a:avLst>
           </a:prstGeom>
           <a:solidFill>
-            <a:srgbClr val="EED3E0"/>
+            <a:srgbClr val="D7D1FA"/>
           </a:solidFill>
           <a:ln w="19050">
             <a:solidFill>
-              <a:srgbClr val="B8618C"/>
+              <a:srgbClr val="3D26C5"/>
             </a:solidFill>
             <a:prstDash val="dash"/>
           </a:ln>
@@ -5913,7 +5913,7 @@
             <a:r>
               <a:rPr sz="1200" b="0" i="0">
                 <a:solidFill>
-                  <a:srgbClr val="7B3759"/>
+                  <a:srgbClr val="1D115F"/>
                 </a:solidFill>
               </a:rPr>
               <a:t>사진 5</a:t>
@@ -5938,11 +5938,11 @@
             </a:avLst>
           </a:prstGeom>
           <a:solidFill>
-            <a:srgbClr val="EED3E0"/>
+            <a:srgbClr val="D7D1FA"/>
           </a:solidFill>
           <a:ln w="19050">
             <a:solidFill>
-              <a:srgbClr val="B8618C"/>
+              <a:srgbClr val="3D26C5"/>
             </a:solidFill>
             <a:prstDash val="dash"/>
           </a:ln>
@@ -5961,7 +5961,7 @@
             <a:r>
               <a:rPr sz="1200" b="0" i="0">
                 <a:solidFill>
-                  <a:srgbClr val="7B3759"/>
+                  <a:srgbClr val="1D115F"/>
                 </a:solidFill>
               </a:rPr>
               <a:t>사진 6</a:t>
@@ -5986,11 +5986,11 @@
             </a:avLst>
           </a:prstGeom>
           <a:solidFill>
-            <a:srgbClr val="EED3E0"/>
+            <a:srgbClr val="D7D1FA"/>
           </a:solidFill>
           <a:ln w="19050">
             <a:solidFill>
-              <a:srgbClr val="B8618C"/>
+              <a:srgbClr val="3D26C5"/>
             </a:solidFill>
             <a:prstDash val="dash"/>
           </a:ln>
@@ -6009,7 +6009,7 @@
             <a:r>
               <a:rPr sz="1200" b="0" i="0">
                 <a:solidFill>
-                  <a:srgbClr val="7B3759"/>
+                  <a:srgbClr val="1D115F"/>
                 </a:solidFill>
               </a:rPr>
               <a:t>사진 7</a:t>
@@ -6034,11 +6034,11 @@
             </a:avLst>
           </a:prstGeom>
           <a:solidFill>
-            <a:srgbClr val="EED3E0"/>
+            <a:srgbClr val="D7D1FA"/>
           </a:solidFill>
           <a:ln w="19050">
             <a:solidFill>
-              <a:srgbClr val="B8618C"/>
+              <a:srgbClr val="3D26C5"/>
             </a:solidFill>
             <a:prstDash val="dash"/>
           </a:ln>
@@ -6057,7 +6057,7 @@
             <a:r>
               <a:rPr sz="1200" b="0" i="0">
                 <a:solidFill>
-                  <a:srgbClr val="7B3759"/>
+                  <a:srgbClr val="1D115F"/>
                 </a:solidFill>
               </a:rPr>
               <a:t>사진 8</a:t>
@@ -6137,7 +6137,7 @@
             <a:r>
               <a:rPr sz="3400" b="1" i="0">
                 <a:solidFill>
-                  <a:srgbClr val="7B3759"/>
+                  <a:srgbClr val="1D115F"/>
                 </a:solidFill>
               </a:rPr>
               <a:t>와 주셔서 고맙습니다</a:t>
@@ -6175,7 +6175,7 @@
             <a:r>
               <a:rPr sz="1700" b="0" i="1">
                 <a:solidFill>
-                  <a:srgbClr val="7B3759"/>
+                  <a:srgbClr val="1D115F"/>
                 </a:solidFill>
               </a:rPr>
               <a:t>아이가 한 살이 되었습니다</a:t>
@@ -6240,34 +6240,34 @@
         <a:sysClr val="window" lastClr="FFFFFF"/>
       </a:lt1>
       <a:dk2>
-        <a:srgbClr val="7B3759"/>
+        <a:srgbClr val="1D115F"/>
       </a:dk2>
       <a:lt2>
-        <a:srgbClr val="F9F1F5"/>
+        <a:srgbClr val="F0EEFC"/>
       </a:lt2>
       <a:accent1>
-        <a:srgbClr val="B8618C"/>
+        <a:srgbClr val="3D26C5"/>
       </a:accent1>
       <a:accent2>
-        <a:srgbClr val="3F8D3F"/>
+        <a:srgbClr val="209DB6"/>
       </a:accent2>
       <a:accent3>
-        <a:srgbClr val="7B3759"/>
+        <a:srgbClr val="1D115F"/>
       </a:accent3>
       <a:accent4>
-        <a:srgbClr val="EED3E0"/>
+        <a:srgbClr val="D7D1FA"/>
       </a:accent4>
       <a:accent5>
-        <a:srgbClr val="7C7766"/>
+        <a:srgbClr val="2E62BE"/>
       </a:accent5>
       <a:accent6>
-        <a:srgbClr val="B0879B"/>
+        <a:srgbClr val="77709F"/>
       </a:accent6>
       <a:hlink>
-        <a:srgbClr val="B8618C"/>
+        <a:srgbClr val="3D26C5"/>
       </a:hlink>
       <a:folHlink>
-        <a:srgbClr val="7B3759"/>
+        <a:srgbClr val="1D115F"/>
       </a:folHlink>
     </a:clrScheme>
     <a:fontScheme name="Office">

--- a/public/fun/pack/pptx/birthday/돌잔치_25_첫번째이야기중심_연꽃연못.pptx
+++ b/public/fun/pack/pptx/birthday/돌잔치_25_첫번째이야기중심_연꽃연못.pptx
@@ -3286,6 +3286,14 @@
 <file path=ppt/slides/slide1.xml><?xml version="1.0" encoding="utf-8"?>
 <p:sld xmlns:a="http://schemas.openxmlformats.org/drawingml/2006/main" xmlns:p="http://schemas.openxmlformats.org/presentationml/2006/main" xmlns:r="http://schemas.openxmlformats.org/officeDocument/2006/relationships">
   <p:cSld>
+    <p:bg>
+      <p:bgPr>
+        <a:solidFill>
+          <a:srgbClr val="FDEAF4"/>
+        </a:solidFill>
+        <a:effectLst/>
+      </p:bgPr>
+    </p:bg>
     <p:spTree>
       <p:nvGrpSpPr>
         <p:cNvPr id="1" name=""/>
@@ -3293,30 +3301,116 @@
         <p:nvPr/>
       </p:nvGrpSpPr>
       <p:grpSpPr/>
-      <p:pic>
-        <p:nvPicPr>
-          <p:cNvPr id="3" name="표지 그림" descr="birthday-25.jpg"/>
-          <p:cNvPicPr>
-            <a:picLocks noChangeAspect="1"/>
-          </p:cNvPicPr>
+      <p:sp>
+        <p:nvSpPr>
+          <p:cNvPr id="3" name="사진 자리"/>
+          <p:cNvSpPr/>
           <p:nvPr/>
-        </p:nvPicPr>
-        <p:blipFill>
-          <a:blip r:embed="rId2"/>
-          <a:stretch>
-            <a:fillRect/>
-          </a:stretch>
-        </p:blipFill>
-        <p:spPr>
-          <a:xfrm>
-            <a:off x="0" y="0"/>
-            <a:ext cx="12191695" cy="6858000"/>
+        </p:nvSpPr>
+        <p:spPr>
+          <a:xfrm>
+            <a:off x="7802684" y="0"/>
+            <a:ext cx="4389010" cy="6858000"/>
           </a:xfrm>
           <a:prstGeom prst="rect">
             <a:avLst/>
           </a:prstGeom>
-        </p:spPr>
-      </p:pic>
+          <a:solidFill>
+            <a:srgbClr val="F3A5CC"/>
+          </a:solidFill>
+          <a:ln>
+            <a:noFill/>
+          </a:ln>
+        </p:spPr>
+        <p:txBody>
+          <a:bodyPr rtlCol="0" anchor="ctr" wrap="square" lIns="54864" rIns="54864" tIns="27432" bIns="27432">
+            <a:noAutofit/>
+          </a:bodyPr>
+          <a:lstStyle/>
+          <a:p>
+            <a:pPr algn="ctr">
+              <a:lnSpc>
+                <a:spcPct val="100000"/>
+              </a:lnSpc>
+            </a:pPr>
+            <a:r>
+              <a:rPr sz="1400" b="0" i="0">
+                <a:solidFill>
+                  <a:srgbClr val="492738"/>
+                </a:solidFill>
+              </a:rPr>
+              <a:t>사진을 넣어 주세요</a:t>
+            </a:r>
+          </a:p>
+        </p:txBody>
+      </p:sp>
+      <p:sp>
+        <p:nvSpPr>
+          <p:cNvPr id="4" name="장식"/>
+          <p:cNvSpPr/>
+          <p:nvPr/>
+        </p:nvSpPr>
+        <p:spPr>
+          <a:xfrm>
+            <a:off x="8168435" y="365760"/>
+            <a:ext cx="3657508" cy="6126480"/>
+          </a:xfrm>
+          <a:prstGeom prst="rect">
+            <a:avLst/>
+          </a:prstGeom>
+          <a:noFill/>
+          <a:ln w="9525">
+            <a:solidFill>
+              <a:srgbClr val="26231F"/>
+            </a:solidFill>
+          </a:ln>
+        </p:spPr>
+        <p:txBody>
+          <a:bodyPr rtlCol="0" anchor="ctr"/>
+          <a:lstStyle/>
+          <a:p>
+            <a:pPr algn="ctr"/>
+          </a:p>
+        </p:txBody>
+      </p:sp>
+      <p:sp>
+        <p:nvSpPr>
+          <p:cNvPr id="5" name="라벨"/>
+          <p:cNvSpPr txBox="1"/>
+          <p:nvPr/>
+        </p:nvSpPr>
+        <p:spPr>
+          <a:xfrm>
+            <a:off x="822960" y="2148840"/>
+            <a:ext cx="5608179" cy="274320"/>
+          </a:xfrm>
+          <a:prstGeom prst="rect">
+            <a:avLst/>
+          </a:prstGeom>
+          <a:noFill/>
+        </p:spPr>
+        <p:txBody>
+          <a:bodyPr wrap="square" lIns="54864" rIns="54864" tIns="27432" bIns="27432" anchor="t">
+            <a:noAutofit/>
+          </a:bodyPr>
+          <a:lstStyle/>
+          <a:p>
+            <a:pPr algn="l">
+              <a:lnSpc>
+                <a:spcPct val="115000"/>
+              </a:lnSpc>
+            </a:pPr>
+            <a:r>
+              <a:rPr sz="1000" b="1" i="0" spc="250">
+                <a:solidFill>
+                  <a:srgbClr val="26231F"/>
+                </a:solidFill>
+              </a:rPr>
+              <a:t>FIRST BIRTHDAY</a:t>
+            </a:r>
+          </a:p>
+        </p:txBody>
+      </p:sp>
       <p:sp>
         <p:nvSpPr>
           <p:cNvPr id="2" name="Title 1"/>
@@ -3329,8 +3423,8 @@
         </p:nvSpPr>
         <p:spPr>
           <a:xfrm>
-            <a:off x="853418" y="2057400"/>
-            <a:ext cx="6095847" cy="1554480"/>
+            <a:off x="822960" y="2606040"/>
+            <a:ext cx="5608179" cy="1188720"/>
           </a:xfrm>
         </p:spPr>
         <p:txBody>
@@ -3347,7 +3441,7 @@
             <a:r>
               <a:rPr sz="4000" b="1" i="0">
                 <a:solidFill>
-                  <a:srgbClr val="1D115F"/>
+                  <a:srgbClr val="26231F"/>
                 </a:solidFill>
               </a:rPr>
               <a:t>첫 번째 생일</a:t>
@@ -3357,14 +3451,14 @@
       </p:sp>
       <p:sp>
         <p:nvSpPr>
-          <p:cNvPr id="4" name="한 줄 문구"/>
+          <p:cNvPr id="6" name="한 줄 문구"/>
           <p:cNvSpPr txBox="1"/>
           <p:nvPr/>
         </p:nvSpPr>
         <p:spPr>
           <a:xfrm>
-            <a:off x="853418" y="3749039"/>
-            <a:ext cx="6095847" cy="822960"/>
+            <a:off x="822960" y="3886200"/>
+            <a:ext cx="5608179" cy="822960"/>
           </a:xfrm>
           <a:prstGeom prst="rect">
             <a:avLst/>
@@ -3383,26 +3477,26 @@
               </a:lnSpc>
             </a:pPr>
             <a:r>
-              <a:rPr sz="1700" b="0" i="1">
-                <a:solidFill>
-                  <a:srgbClr val="1D115F"/>
+              <a:rPr sz="1700" b="0" i="0">
+                <a:solidFill>
+                  <a:srgbClr val="26231F"/>
                 </a:solidFill>
               </a:rPr>
-              <a:t>태어나서 처음 맞은 여름 이야기입니다</a:t>
-            </a:r>
-          </a:p>
-        </p:txBody>
-      </p:sp>
-      <p:sp>
-        <p:nvSpPr>
-          <p:cNvPr id="5" name="안내 문구"/>
+              <a:t>태어나서 처음 맞은 날들의 이야기입니다</a:t>
+            </a:r>
+          </a:p>
+        </p:txBody>
+      </p:sp>
+      <p:sp>
+        <p:nvSpPr>
+          <p:cNvPr id="7" name="안내 문구"/>
           <p:cNvSpPr txBox="1"/>
           <p:nvPr/>
         </p:nvSpPr>
         <p:spPr>
           <a:xfrm>
-            <a:off x="853418" y="4617720"/>
-            <a:ext cx="6095847" cy="914400"/>
+            <a:off x="822960" y="4754880"/>
+            <a:ext cx="5608179" cy="914400"/>
           </a:xfrm>
           <a:prstGeom prst="rect">
             <a:avLst/>
@@ -3423,10 +3517,10 @@
             <a:r>
               <a:rPr sz="1400" b="0" i="0">
                 <a:solidFill>
-                  <a:srgbClr val="666666"/>
+                  <a:srgbClr val="26231F"/>
                 </a:solidFill>
               </a:rPr>
-              <a:t>아기 이름 · 2027. 00. 00</a:t>
+              <a:t>아기 이름 · 날짜 입력</a:t>
             </a:r>
           </a:p>
           <a:p>
@@ -3438,7 +3532,7 @@
             <a:r>
               <a:rPr sz="1400" b="0" i="0">
                 <a:solidFill>
-                  <a:srgbClr val="666666"/>
+                  <a:srgbClr val="26231F"/>
                 </a:solidFill>
               </a:rPr>
               <a:t>장소를 입력하세요</a:t>
@@ -3460,7 +3554,7 @@
     <p:bg>
       <p:bgPr>
         <a:solidFill>
-          <a:srgbClr val="3D26C5"/>
+          <a:srgbClr val="FDEAF4"/>
         </a:solidFill>
         <a:effectLst/>
       </p:bgPr>
@@ -3474,22 +3568,20 @@
       <p:grpSpPr/>
       <p:sp>
         <p:nvSpPr>
-          <p:cNvPr id="3" name="장식"/>
+          <p:cNvPr id="3" name="포인트"/>
           <p:cNvSpPr/>
           <p:nvPr/>
         </p:nvSpPr>
         <p:spPr>
           <a:xfrm>
-            <a:off x="274320" y="274320"/>
-            <a:ext cx="11643055" cy="6309360"/>
-          </a:xfrm>
-          <a:prstGeom prst="roundRect">
-            <a:avLst>
-              <a:gd name="adj" fmla="val 3500"/>
-            </a:avLst>
+            <a:off x="5958687" y="246888"/>
+            <a:ext cx="274320" cy="274320"/>
+          </a:xfrm>
+          <a:prstGeom prst="star4">
+            <a:avLst/>
           </a:prstGeom>
           <a:solidFill>
-            <a:srgbClr val="FFFFFF"/>
+            <a:srgbClr val="EA7BB3"/>
           </a:solidFill>
           <a:ln>
             <a:noFill/>
@@ -3500,6 +3592,73 @@
           <a:lstStyle/>
           <a:p>
             <a:pPr algn="ctr"/>
+          </a:p>
+        </p:txBody>
+      </p:sp>
+      <p:sp>
+        <p:nvSpPr>
+          <p:cNvPr id="4" name="장식"/>
+          <p:cNvSpPr/>
+          <p:nvPr/>
+        </p:nvSpPr>
+        <p:spPr>
+          <a:xfrm>
+            <a:off x="5684367" y="1572768"/>
+            <a:ext cx="822960" cy="22860"/>
+          </a:xfrm>
+          <a:prstGeom prst="rect">
+            <a:avLst/>
+          </a:prstGeom>
+          <a:solidFill>
+            <a:srgbClr val="EA7BB3"/>
+          </a:solidFill>
+          <a:ln>
+            <a:noFill/>
+          </a:ln>
+        </p:spPr>
+        <p:txBody>
+          <a:bodyPr rtlCol="0" anchor="ctr"/>
+          <a:lstStyle/>
+          <a:p>
+            <a:pPr algn="ctr"/>
+          </a:p>
+        </p:txBody>
+      </p:sp>
+      <p:sp>
+        <p:nvSpPr>
+          <p:cNvPr id="5" name="상단 라벨"/>
+          <p:cNvSpPr txBox="1"/>
+          <p:nvPr/>
+        </p:nvSpPr>
+        <p:spPr>
+          <a:xfrm>
+            <a:off x="640080" y="182880"/>
+            <a:ext cx="3657600" cy="274320"/>
+          </a:xfrm>
+          <a:prstGeom prst="rect">
+            <a:avLst/>
+          </a:prstGeom>
+          <a:noFill/>
+        </p:spPr>
+        <p:txBody>
+          <a:bodyPr wrap="square" lIns="54864" rIns="54864" tIns="27432" bIns="27432" anchor="ctr">
+            <a:noAutofit/>
+          </a:bodyPr>
+          <a:lstStyle/>
+          <a:p>
+            <a:pPr algn="l">
+              <a:lnSpc>
+                <a:spcPct val="115000"/>
+              </a:lnSpc>
+            </a:pPr>
+            <a:r>
+              <a:rPr sz="800" b="1" i="0" spc="250">
+                <a:solidFill>
+                  <a:srgbClr val="8E8780"/>
+                </a:solidFill>
+              </a:rPr>
+              <a:t>FIRST BIRTHDAY</a:t>
+            </a:r>
           </a:p>
         </p:txBody>
       </p:sp>
@@ -3515,7 +3674,7 @@
         </p:nvSpPr>
         <p:spPr>
           <a:xfrm>
-            <a:off x="731520" y="548640"/>
+            <a:off x="1371600" y="640080"/>
             <a:ext cx="9448495" cy="868680"/>
           </a:xfrm>
         </p:spPr>
@@ -3525,7 +3684,7 @@
           </a:bodyPr>
           <a:lstStyle/>
           <a:p>
-            <a:pPr algn="l">
+            <a:pPr algn="ctr">
               <a:lnSpc>
                 <a:spcPct val="105000"/>
               </a:lnSpc>
@@ -3533,7 +3692,7 @@
             <a:r>
               <a:rPr sz="3000" b="1" i="0">
                 <a:solidFill>
-                  <a:srgbClr val="1D115F"/>
+                  <a:srgbClr val="26231F"/>
                 </a:solidFill>
               </a:rPr>
               <a:t>우리 아기를 소개합니다</a:t>
@@ -3543,14 +3702,14 @@
       </p:sp>
       <p:sp>
         <p:nvSpPr>
-          <p:cNvPr id="4" name="사진 자리"/>
+          <p:cNvPr id="6" name="사진 자리"/>
           <p:cNvSpPr/>
           <p:nvPr/>
         </p:nvSpPr>
         <p:spPr>
           <a:xfrm>
-            <a:off x="731520" y="1600200"/>
-            <a:ext cx="3840480" cy="4434840"/>
+            <a:off x="640080" y="1783080"/>
+            <a:ext cx="3840480" cy="4389120"/>
           </a:xfrm>
           <a:prstGeom prst="roundRect">
             <a:avLst>
@@ -3558,12 +3717,10 @@
             </a:avLst>
           </a:prstGeom>
           <a:solidFill>
-            <a:srgbClr val="D7D1FA"/>
+            <a:srgbClr val="FAD1E6"/>
           </a:solidFill>
           <a:ln w="19050">
-            <a:solidFill>
-              <a:srgbClr val="3D26C5"/>
-            </a:solidFill>
+            <a:noFill/>
             <a:prstDash val="dash"/>
           </a:ln>
         </p:spPr>
@@ -3581,7 +3738,7 @@
             <a:r>
               <a:rPr sz="1400" b="0" i="0">
                 <a:solidFill>
-                  <a:srgbClr val="1D115F"/>
+                  <a:srgbClr val="8E8780"/>
                 </a:solidFill>
               </a:rPr>
               <a:t>아기 사진을 넣어 주세요</a:t>
@@ -3591,15 +3748,15 @@
       </p:sp>
       <p:graphicFrame>
         <p:nvGraphicFramePr>
-          <p:cNvPr id="5" name="표"/>
+          <p:cNvPr id="7" name="표"/>
           <p:cNvGraphicFramePr>
             <a:graphicFrameLocks noGrp="1"/>
           </p:cNvGraphicFramePr>
           <p:nvPr/>
         </p:nvGraphicFramePr>
         <p:xfrm>
-          <a:off x="4937759" y="1600200"/>
-          <a:ext cx="6522415" cy="3950208"/>
+          <a:off x="4846320" y="1783080"/>
+          <a:ext cx="6705295" cy="3950208"/>
         </p:xfrm>
         <a:graphic>
           <a:graphicData uri="http://schemas.openxmlformats.org/drawingml/2006/table">
@@ -3609,7 +3766,7 @@
               </a:tblPr>
               <a:tblGrid>
                 <a:gridCol w="1828800"/>
-                <a:gridCol w="4693615"/>
+                <a:gridCol w="4876495"/>
               </a:tblGrid>
               <a:tr h="658368">
                 <a:tc>
@@ -3621,7 +3778,7 @@
                       <a:r>
                         <a:rPr sz="1500" b="1">
                           <a:solidFill>
-                            <a:srgbClr val="1D115F"/>
+                            <a:srgbClr val="492738"/>
                           </a:solidFill>
                         </a:rPr>
                         <a:t>이름</a:t>
@@ -3631,30 +3788,30 @@
                   <a:tcPr anchor="ctr" marL="73152" marR="73152">
                     <a:lnL w="9525" cap="flat" cmpd="sng" algn="ctr">
                       <a:solidFill>
-                        <a:srgbClr val="D7D1FA"/>
+                        <a:srgbClr val="FAD1E6"/>
                       </a:solidFill>
                       <a:prstDash val="solid"/>
                     </a:lnL>
                     <a:lnR w="9525" cap="flat" cmpd="sng" algn="ctr">
                       <a:solidFill>
-                        <a:srgbClr val="D7D1FA"/>
+                        <a:srgbClr val="FAD1E6"/>
                       </a:solidFill>
                       <a:prstDash val="solid"/>
                     </a:lnR>
                     <a:lnT w="9525" cap="flat" cmpd="sng" algn="ctr">
                       <a:solidFill>
-                        <a:srgbClr val="D7D1FA"/>
+                        <a:srgbClr val="FAD1E6"/>
                       </a:solidFill>
                       <a:prstDash val="solid"/>
                     </a:lnT>
                     <a:lnB w="9525" cap="flat" cmpd="sng" algn="ctr">
                       <a:solidFill>
-                        <a:srgbClr val="D7D1FA"/>
+                        <a:srgbClr val="FAD1E6"/>
                       </a:solidFill>
                       <a:prstDash val="solid"/>
                     </a:lnB>
                     <a:solidFill>
-                      <a:srgbClr val="D7D1FA"/>
+                      <a:srgbClr val="FAD1E6"/>
                     </a:solidFill>
                   </a:tcPr>
                 </a:tc>
@@ -3667,7 +3824,7 @@
                       <a:r>
                         <a:rPr sz="1500" b="0">
                           <a:solidFill>
-                            <a:srgbClr val="2B2B2B"/>
+                            <a:srgbClr val="26231F"/>
                           </a:solidFill>
                         </a:rPr>
                         <a:t>입력하세요</a:t>
@@ -3677,30 +3834,30 @@
                   <a:tcPr anchor="ctr" marL="73152" marR="73152">
                     <a:lnL w="9525" cap="flat" cmpd="sng" algn="ctr">
                       <a:solidFill>
-                        <a:srgbClr val="D7D1FA"/>
+                        <a:srgbClr val="FAD1E6"/>
                       </a:solidFill>
                       <a:prstDash val="solid"/>
                     </a:lnL>
                     <a:lnR w="9525" cap="flat" cmpd="sng" algn="ctr">
                       <a:solidFill>
-                        <a:srgbClr val="D7D1FA"/>
+                        <a:srgbClr val="FAD1E6"/>
                       </a:solidFill>
                       <a:prstDash val="solid"/>
                     </a:lnR>
                     <a:lnT w="9525" cap="flat" cmpd="sng" algn="ctr">
                       <a:solidFill>
-                        <a:srgbClr val="D7D1FA"/>
+                        <a:srgbClr val="FAD1E6"/>
                       </a:solidFill>
                       <a:prstDash val="solid"/>
                     </a:lnT>
                     <a:lnB w="9525" cap="flat" cmpd="sng" algn="ctr">
                       <a:solidFill>
-                        <a:srgbClr val="D7D1FA"/>
+                        <a:srgbClr val="FAD1E6"/>
                       </a:solidFill>
                       <a:prstDash val="solid"/>
                     </a:lnB>
                     <a:solidFill>
-                      <a:srgbClr val="F0EEFC"/>
+                      <a:srgbClr val="FDEAF4"/>
                     </a:solidFill>
                   </a:tcPr>
                 </a:tc>
@@ -3715,7 +3872,7 @@
                       <a:r>
                         <a:rPr sz="1500" b="1">
                           <a:solidFill>
-                            <a:srgbClr val="1D115F"/>
+                            <a:srgbClr val="492738"/>
                           </a:solidFill>
                         </a:rPr>
                         <a:t>생일</a:t>
@@ -3725,30 +3882,30 @@
                   <a:tcPr anchor="ctr" marL="73152" marR="73152">
                     <a:lnL w="9525" cap="flat" cmpd="sng" algn="ctr">
                       <a:solidFill>
-                        <a:srgbClr val="D7D1FA"/>
+                        <a:srgbClr val="FAD1E6"/>
                       </a:solidFill>
                       <a:prstDash val="solid"/>
                     </a:lnL>
                     <a:lnR w="9525" cap="flat" cmpd="sng" algn="ctr">
                       <a:solidFill>
-                        <a:srgbClr val="D7D1FA"/>
+                        <a:srgbClr val="FAD1E6"/>
                       </a:solidFill>
                       <a:prstDash val="solid"/>
                     </a:lnR>
                     <a:lnT w="9525" cap="flat" cmpd="sng" algn="ctr">
                       <a:solidFill>
-                        <a:srgbClr val="D7D1FA"/>
+                        <a:srgbClr val="FAD1E6"/>
                       </a:solidFill>
                       <a:prstDash val="solid"/>
                     </a:lnT>
                     <a:lnB w="9525" cap="flat" cmpd="sng" algn="ctr">
                       <a:solidFill>
-                        <a:srgbClr val="D7D1FA"/>
+                        <a:srgbClr val="FAD1E6"/>
                       </a:solidFill>
                       <a:prstDash val="solid"/>
                     </a:lnB>
                     <a:solidFill>
-                      <a:srgbClr val="D7D1FA"/>
+                      <a:srgbClr val="FAD1E6"/>
                     </a:solidFill>
                   </a:tcPr>
                 </a:tc>
@@ -3761,7 +3918,7 @@
                       <a:r>
                         <a:rPr sz="1500" b="0">
                           <a:solidFill>
-                            <a:srgbClr val="2B2B2B"/>
+                            <a:srgbClr val="26231F"/>
                           </a:solidFill>
                         </a:rPr>
                         <a:t>입력하세요</a:t>
@@ -3771,25 +3928,25 @@
                   <a:tcPr anchor="ctr" marL="73152" marR="73152">
                     <a:lnL w="9525" cap="flat" cmpd="sng" algn="ctr">
                       <a:solidFill>
-                        <a:srgbClr val="D7D1FA"/>
+                        <a:srgbClr val="FAD1E6"/>
                       </a:solidFill>
                       <a:prstDash val="solid"/>
                     </a:lnL>
                     <a:lnR w="9525" cap="flat" cmpd="sng" algn="ctr">
                       <a:solidFill>
-                        <a:srgbClr val="D7D1FA"/>
+                        <a:srgbClr val="FAD1E6"/>
                       </a:solidFill>
                       <a:prstDash val="solid"/>
                     </a:lnR>
                     <a:lnT w="9525" cap="flat" cmpd="sng" algn="ctr">
                       <a:solidFill>
-                        <a:srgbClr val="D7D1FA"/>
+                        <a:srgbClr val="FAD1E6"/>
                       </a:solidFill>
                       <a:prstDash val="solid"/>
                     </a:lnT>
                     <a:lnB w="9525" cap="flat" cmpd="sng" algn="ctr">
                       <a:solidFill>
-                        <a:srgbClr val="D7D1FA"/>
+                        <a:srgbClr val="FAD1E6"/>
                       </a:solidFill>
                       <a:prstDash val="solid"/>
                     </a:lnB>
@@ -3809,7 +3966,7 @@
                       <a:r>
                         <a:rPr sz="1500" b="1">
                           <a:solidFill>
-                            <a:srgbClr val="1D115F"/>
+                            <a:srgbClr val="492738"/>
                           </a:solidFill>
                         </a:rPr>
                         <a:t>키 · 몸무게</a:t>
@@ -3819,30 +3976,30 @@
                   <a:tcPr anchor="ctr" marL="73152" marR="73152">
                     <a:lnL w="9525" cap="flat" cmpd="sng" algn="ctr">
                       <a:solidFill>
-                        <a:srgbClr val="D7D1FA"/>
+                        <a:srgbClr val="FAD1E6"/>
                       </a:solidFill>
                       <a:prstDash val="solid"/>
                     </a:lnL>
                     <a:lnR w="9525" cap="flat" cmpd="sng" algn="ctr">
                       <a:solidFill>
-                        <a:srgbClr val="D7D1FA"/>
+                        <a:srgbClr val="FAD1E6"/>
                       </a:solidFill>
                       <a:prstDash val="solid"/>
                     </a:lnR>
                     <a:lnT w="9525" cap="flat" cmpd="sng" algn="ctr">
                       <a:solidFill>
-                        <a:srgbClr val="D7D1FA"/>
+                        <a:srgbClr val="FAD1E6"/>
                       </a:solidFill>
                       <a:prstDash val="solid"/>
                     </a:lnT>
                     <a:lnB w="9525" cap="flat" cmpd="sng" algn="ctr">
                       <a:solidFill>
-                        <a:srgbClr val="D7D1FA"/>
+                        <a:srgbClr val="FAD1E6"/>
                       </a:solidFill>
                       <a:prstDash val="solid"/>
                     </a:lnB>
                     <a:solidFill>
-                      <a:srgbClr val="D7D1FA"/>
+                      <a:srgbClr val="FAD1E6"/>
                     </a:solidFill>
                   </a:tcPr>
                 </a:tc>
@@ -3855,7 +4012,7 @@
                       <a:r>
                         <a:rPr sz="1500" b="0">
                           <a:solidFill>
-                            <a:srgbClr val="2B2B2B"/>
+                            <a:srgbClr val="26231F"/>
                           </a:solidFill>
                         </a:rPr>
                         <a:t>입력하세요</a:t>
@@ -3865,30 +4022,30 @@
                   <a:tcPr anchor="ctr" marL="73152" marR="73152">
                     <a:lnL w="9525" cap="flat" cmpd="sng" algn="ctr">
                       <a:solidFill>
-                        <a:srgbClr val="D7D1FA"/>
+                        <a:srgbClr val="FAD1E6"/>
                       </a:solidFill>
                       <a:prstDash val="solid"/>
                     </a:lnL>
                     <a:lnR w="9525" cap="flat" cmpd="sng" algn="ctr">
                       <a:solidFill>
-                        <a:srgbClr val="D7D1FA"/>
+                        <a:srgbClr val="FAD1E6"/>
                       </a:solidFill>
                       <a:prstDash val="solid"/>
                     </a:lnR>
                     <a:lnT w="9525" cap="flat" cmpd="sng" algn="ctr">
                       <a:solidFill>
-                        <a:srgbClr val="D7D1FA"/>
+                        <a:srgbClr val="FAD1E6"/>
                       </a:solidFill>
                       <a:prstDash val="solid"/>
                     </a:lnT>
                     <a:lnB w="9525" cap="flat" cmpd="sng" algn="ctr">
                       <a:solidFill>
-                        <a:srgbClr val="D7D1FA"/>
+                        <a:srgbClr val="FAD1E6"/>
                       </a:solidFill>
                       <a:prstDash val="solid"/>
                     </a:lnB>
                     <a:solidFill>
-                      <a:srgbClr val="F0EEFC"/>
+                      <a:srgbClr val="FDEAF4"/>
                     </a:solidFill>
                   </a:tcPr>
                 </a:tc>
@@ -3903,7 +4060,7 @@
                       <a:r>
                         <a:rPr sz="1500" b="1">
                           <a:solidFill>
-                            <a:srgbClr val="1D115F"/>
+                            <a:srgbClr val="492738"/>
                           </a:solidFill>
                         </a:rPr>
                         <a:t>좋아하는 것</a:t>
@@ -3913,30 +4070,30 @@
                   <a:tcPr anchor="ctr" marL="73152" marR="73152">
                     <a:lnL w="9525" cap="flat" cmpd="sng" algn="ctr">
                       <a:solidFill>
-                        <a:srgbClr val="D7D1FA"/>
+                        <a:srgbClr val="FAD1E6"/>
                       </a:solidFill>
                       <a:prstDash val="solid"/>
                     </a:lnL>
                     <a:lnR w="9525" cap="flat" cmpd="sng" algn="ctr">
                       <a:solidFill>
-                        <a:srgbClr val="D7D1FA"/>
+                        <a:srgbClr val="FAD1E6"/>
                       </a:solidFill>
                       <a:prstDash val="solid"/>
                     </a:lnR>
                     <a:lnT w="9525" cap="flat" cmpd="sng" algn="ctr">
                       <a:solidFill>
-                        <a:srgbClr val="D7D1FA"/>
+                        <a:srgbClr val="FAD1E6"/>
                       </a:solidFill>
                       <a:prstDash val="solid"/>
                     </a:lnT>
                     <a:lnB w="9525" cap="flat" cmpd="sng" algn="ctr">
                       <a:solidFill>
-                        <a:srgbClr val="D7D1FA"/>
+                        <a:srgbClr val="FAD1E6"/>
                       </a:solidFill>
                       <a:prstDash val="solid"/>
                     </a:lnB>
                     <a:solidFill>
-                      <a:srgbClr val="D7D1FA"/>
+                      <a:srgbClr val="FAD1E6"/>
                     </a:solidFill>
                   </a:tcPr>
                 </a:tc>
@@ -3949,7 +4106,7 @@
                       <a:r>
                         <a:rPr sz="1500" b="0">
                           <a:solidFill>
-                            <a:srgbClr val="2B2B2B"/>
+                            <a:srgbClr val="26231F"/>
                           </a:solidFill>
                         </a:rPr>
                         <a:t>입력하세요</a:t>
@@ -3959,25 +4116,25 @@
                   <a:tcPr anchor="ctr" marL="73152" marR="73152">
                     <a:lnL w="9525" cap="flat" cmpd="sng" algn="ctr">
                       <a:solidFill>
-                        <a:srgbClr val="D7D1FA"/>
+                        <a:srgbClr val="FAD1E6"/>
                       </a:solidFill>
                       <a:prstDash val="solid"/>
                     </a:lnL>
                     <a:lnR w="9525" cap="flat" cmpd="sng" algn="ctr">
                       <a:solidFill>
-                        <a:srgbClr val="D7D1FA"/>
+                        <a:srgbClr val="FAD1E6"/>
                       </a:solidFill>
                       <a:prstDash val="solid"/>
                     </a:lnR>
                     <a:lnT w="9525" cap="flat" cmpd="sng" algn="ctr">
                       <a:solidFill>
-                        <a:srgbClr val="D7D1FA"/>
+                        <a:srgbClr val="FAD1E6"/>
                       </a:solidFill>
                       <a:prstDash val="solid"/>
                     </a:lnT>
                     <a:lnB w="9525" cap="flat" cmpd="sng" algn="ctr">
                       <a:solidFill>
-                        <a:srgbClr val="D7D1FA"/>
+                        <a:srgbClr val="FAD1E6"/>
                       </a:solidFill>
                       <a:prstDash val="solid"/>
                     </a:lnB>
@@ -3997,7 +4154,7 @@
                       <a:r>
                         <a:rPr sz="1500" b="1">
                           <a:solidFill>
-                            <a:srgbClr val="1D115F"/>
+                            <a:srgbClr val="492738"/>
                           </a:solidFill>
                         </a:rPr>
                         <a:t>별명</a:t>
@@ -4007,30 +4164,30 @@
                   <a:tcPr anchor="ctr" marL="73152" marR="73152">
                     <a:lnL w="9525" cap="flat" cmpd="sng" algn="ctr">
                       <a:solidFill>
-                        <a:srgbClr val="D7D1FA"/>
+                        <a:srgbClr val="FAD1E6"/>
                       </a:solidFill>
                       <a:prstDash val="solid"/>
                     </a:lnL>
                     <a:lnR w="9525" cap="flat" cmpd="sng" algn="ctr">
                       <a:solidFill>
-                        <a:srgbClr val="D7D1FA"/>
+                        <a:srgbClr val="FAD1E6"/>
                       </a:solidFill>
                       <a:prstDash val="solid"/>
                     </a:lnR>
                     <a:lnT w="9525" cap="flat" cmpd="sng" algn="ctr">
                       <a:solidFill>
-                        <a:srgbClr val="D7D1FA"/>
+                        <a:srgbClr val="FAD1E6"/>
                       </a:solidFill>
                       <a:prstDash val="solid"/>
                     </a:lnT>
                     <a:lnB w="9525" cap="flat" cmpd="sng" algn="ctr">
                       <a:solidFill>
-                        <a:srgbClr val="D7D1FA"/>
+                        <a:srgbClr val="FAD1E6"/>
                       </a:solidFill>
                       <a:prstDash val="solid"/>
                     </a:lnB>
                     <a:solidFill>
-                      <a:srgbClr val="D7D1FA"/>
+                      <a:srgbClr val="FAD1E6"/>
                     </a:solidFill>
                   </a:tcPr>
                 </a:tc>
@@ -4043,7 +4200,7 @@
                       <a:r>
                         <a:rPr sz="1500" b="0">
                           <a:solidFill>
-                            <a:srgbClr val="2B2B2B"/>
+                            <a:srgbClr val="26231F"/>
                           </a:solidFill>
                         </a:rPr>
                         <a:t>입력하세요</a:t>
@@ -4053,30 +4210,30 @@
                   <a:tcPr anchor="ctr" marL="73152" marR="73152">
                     <a:lnL w="9525" cap="flat" cmpd="sng" algn="ctr">
                       <a:solidFill>
-                        <a:srgbClr val="D7D1FA"/>
+                        <a:srgbClr val="FAD1E6"/>
                       </a:solidFill>
                       <a:prstDash val="solid"/>
                     </a:lnL>
                     <a:lnR w="9525" cap="flat" cmpd="sng" algn="ctr">
                       <a:solidFill>
-                        <a:srgbClr val="D7D1FA"/>
+                        <a:srgbClr val="FAD1E6"/>
                       </a:solidFill>
                       <a:prstDash val="solid"/>
                     </a:lnR>
                     <a:lnT w="9525" cap="flat" cmpd="sng" algn="ctr">
                       <a:solidFill>
-                        <a:srgbClr val="D7D1FA"/>
+                        <a:srgbClr val="FAD1E6"/>
                       </a:solidFill>
                       <a:prstDash val="solid"/>
                     </a:lnT>
                     <a:lnB w="9525" cap="flat" cmpd="sng" algn="ctr">
                       <a:solidFill>
-                        <a:srgbClr val="D7D1FA"/>
+                        <a:srgbClr val="FAD1E6"/>
                       </a:solidFill>
                       <a:prstDash val="solid"/>
                     </a:lnB>
                     <a:solidFill>
-                      <a:srgbClr val="F0EEFC"/>
+                      <a:srgbClr val="FDEAF4"/>
                     </a:solidFill>
                   </a:tcPr>
                 </a:tc>
@@ -4091,7 +4248,7 @@
                       <a:r>
                         <a:rPr sz="1500" b="1">
                           <a:solidFill>
-                            <a:srgbClr val="1D115F"/>
+                            <a:srgbClr val="492738"/>
                           </a:solidFill>
                         </a:rPr>
                         <a:t>부모의 마음</a:t>
@@ -4101,30 +4258,30 @@
                   <a:tcPr anchor="ctr" marL="73152" marR="73152">
                     <a:lnL w="9525" cap="flat" cmpd="sng" algn="ctr">
                       <a:solidFill>
-                        <a:srgbClr val="D7D1FA"/>
+                        <a:srgbClr val="FAD1E6"/>
                       </a:solidFill>
                       <a:prstDash val="solid"/>
                     </a:lnL>
                     <a:lnR w="9525" cap="flat" cmpd="sng" algn="ctr">
                       <a:solidFill>
-                        <a:srgbClr val="D7D1FA"/>
+                        <a:srgbClr val="FAD1E6"/>
                       </a:solidFill>
                       <a:prstDash val="solid"/>
                     </a:lnR>
                     <a:lnT w="9525" cap="flat" cmpd="sng" algn="ctr">
                       <a:solidFill>
-                        <a:srgbClr val="D7D1FA"/>
+                        <a:srgbClr val="FAD1E6"/>
                       </a:solidFill>
                       <a:prstDash val="solid"/>
                     </a:lnT>
                     <a:lnB w="9525" cap="flat" cmpd="sng" algn="ctr">
                       <a:solidFill>
-                        <a:srgbClr val="D7D1FA"/>
+                        <a:srgbClr val="FAD1E6"/>
                       </a:solidFill>
                       <a:prstDash val="solid"/>
                     </a:lnB>
                     <a:solidFill>
-                      <a:srgbClr val="D7D1FA"/>
+                      <a:srgbClr val="FAD1E6"/>
                     </a:solidFill>
                   </a:tcPr>
                 </a:tc>
@@ -4137,7 +4294,7 @@
                       <a:r>
                         <a:rPr sz="1500" b="0">
                           <a:solidFill>
-                            <a:srgbClr val="2B2B2B"/>
+                            <a:srgbClr val="26231F"/>
                           </a:solidFill>
                         </a:rPr>
                         <a:t>입력하세요</a:t>
@@ -4147,25 +4304,25 @@
                   <a:tcPr anchor="ctr" marL="73152" marR="73152">
                     <a:lnL w="9525" cap="flat" cmpd="sng" algn="ctr">
                       <a:solidFill>
-                        <a:srgbClr val="D7D1FA"/>
+                        <a:srgbClr val="FAD1E6"/>
                       </a:solidFill>
                       <a:prstDash val="solid"/>
                     </a:lnL>
                     <a:lnR w="9525" cap="flat" cmpd="sng" algn="ctr">
                       <a:solidFill>
-                        <a:srgbClr val="D7D1FA"/>
+                        <a:srgbClr val="FAD1E6"/>
                       </a:solidFill>
                       <a:prstDash val="solid"/>
                     </a:lnR>
                     <a:lnT w="9525" cap="flat" cmpd="sng" algn="ctr">
                       <a:solidFill>
-                        <a:srgbClr val="D7D1FA"/>
+                        <a:srgbClr val="FAD1E6"/>
                       </a:solidFill>
                       <a:prstDash val="solid"/>
                     </a:lnT>
                     <a:lnB w="9525" cap="flat" cmpd="sng" algn="ctr">
                       <a:solidFill>
-                        <a:srgbClr val="D7D1FA"/>
+                        <a:srgbClr val="FAD1E6"/>
                       </a:solidFill>
                       <a:prstDash val="solid"/>
                     </a:lnB>
@@ -4193,7 +4350,7 @@
     <p:bg>
       <p:bgPr>
         <a:solidFill>
-          <a:srgbClr val="3D26C5"/>
+          <a:srgbClr val="FDEAF4"/>
         </a:solidFill>
         <a:effectLst/>
       </p:bgPr>
@@ -4207,22 +4364,20 @@
       <p:grpSpPr/>
       <p:sp>
         <p:nvSpPr>
-          <p:cNvPr id="3" name="장식"/>
+          <p:cNvPr id="3" name="포인트"/>
           <p:cNvSpPr/>
           <p:nvPr/>
         </p:nvSpPr>
         <p:spPr>
           <a:xfrm>
-            <a:off x="274320" y="274320"/>
-            <a:ext cx="11643055" cy="6309360"/>
-          </a:xfrm>
-          <a:prstGeom prst="roundRect">
-            <a:avLst>
-              <a:gd name="adj" fmla="val 3500"/>
-            </a:avLst>
+            <a:off x="5958687" y="246888"/>
+            <a:ext cx="274320" cy="274320"/>
+          </a:xfrm>
+          <a:prstGeom prst="star4">
+            <a:avLst/>
           </a:prstGeom>
           <a:solidFill>
-            <a:srgbClr val="FFFFFF"/>
+            <a:srgbClr val="EA7BB3"/>
           </a:solidFill>
           <a:ln>
             <a:noFill/>
@@ -4233,6 +4388,73 @@
           <a:lstStyle/>
           <a:p>
             <a:pPr algn="ctr"/>
+          </a:p>
+        </p:txBody>
+      </p:sp>
+      <p:sp>
+        <p:nvSpPr>
+          <p:cNvPr id="4" name="장식"/>
+          <p:cNvSpPr/>
+          <p:nvPr/>
+        </p:nvSpPr>
+        <p:spPr>
+          <a:xfrm>
+            <a:off x="5684367" y="1572768"/>
+            <a:ext cx="822960" cy="22860"/>
+          </a:xfrm>
+          <a:prstGeom prst="rect">
+            <a:avLst/>
+          </a:prstGeom>
+          <a:solidFill>
+            <a:srgbClr val="EA7BB3"/>
+          </a:solidFill>
+          <a:ln>
+            <a:noFill/>
+          </a:ln>
+        </p:spPr>
+        <p:txBody>
+          <a:bodyPr rtlCol="0" anchor="ctr"/>
+          <a:lstStyle/>
+          <a:p>
+            <a:pPr algn="ctr"/>
+          </a:p>
+        </p:txBody>
+      </p:sp>
+      <p:sp>
+        <p:nvSpPr>
+          <p:cNvPr id="5" name="상단 라벨"/>
+          <p:cNvSpPr txBox="1"/>
+          <p:nvPr/>
+        </p:nvSpPr>
+        <p:spPr>
+          <a:xfrm>
+            <a:off x="640080" y="182880"/>
+            <a:ext cx="3657600" cy="274320"/>
+          </a:xfrm>
+          <a:prstGeom prst="rect">
+            <a:avLst/>
+          </a:prstGeom>
+          <a:noFill/>
+        </p:spPr>
+        <p:txBody>
+          <a:bodyPr wrap="square" lIns="54864" rIns="54864" tIns="27432" bIns="27432" anchor="ctr">
+            <a:noAutofit/>
+          </a:bodyPr>
+          <a:lstStyle/>
+          <a:p>
+            <a:pPr algn="l">
+              <a:lnSpc>
+                <a:spcPct val="115000"/>
+              </a:lnSpc>
+            </a:pPr>
+            <a:r>
+              <a:rPr sz="800" b="1" i="0" spc="250">
+                <a:solidFill>
+                  <a:srgbClr val="8E8780"/>
+                </a:solidFill>
+              </a:rPr>
+              <a:t>FIRST BIRTHDAY</a:t>
+            </a:r>
           </a:p>
         </p:txBody>
       </p:sp>
@@ -4248,7 +4470,7 @@
         </p:nvSpPr>
         <p:spPr>
           <a:xfrm>
-            <a:off x="731520" y="548640"/>
+            <a:off x="1371600" y="640080"/>
             <a:ext cx="9448495" cy="868680"/>
           </a:xfrm>
         </p:spPr>
@@ -4258,7 +4480,7 @@
           </a:bodyPr>
           <a:lstStyle/>
           <a:p>
-            <a:pPr algn="l">
+            <a:pPr algn="ctr">
               <a:lnSpc>
                 <a:spcPct val="105000"/>
               </a:lnSpc>
@@ -4266,7 +4488,7 @@
             <a:r>
               <a:rPr sz="3000" b="1" i="0">
                 <a:solidFill>
-                  <a:srgbClr val="1D115F"/>
+                  <a:srgbClr val="26231F"/>
                 </a:solidFill>
               </a:rPr>
               <a:t>태어난 날 이야기</a:t>
@@ -4276,20 +4498,20 @@
       </p:sp>
       <p:sp>
         <p:nvSpPr>
-          <p:cNvPr id="4" name="타임라인 선"/>
+          <p:cNvPr id="6" name="타임라인 선"/>
           <p:cNvSpPr/>
           <p:nvPr/>
         </p:nvSpPr>
         <p:spPr>
           <a:xfrm>
-            <a:off x="731520" y="3337560"/>
-            <a:ext cx="10728655" cy="54864"/>
+            <a:off x="640080" y="3520440"/>
+            <a:ext cx="10911535" cy="54864"/>
           </a:xfrm>
           <a:prstGeom prst="rect">
             <a:avLst/>
           </a:prstGeom>
           <a:solidFill>
-            <a:srgbClr val="D7D1FA"/>
+            <a:srgbClr val="FAD1E6"/>
           </a:solidFill>
           <a:ln>
             <a:noFill/>
@@ -4305,20 +4527,20 @@
       </p:sp>
       <p:sp>
         <p:nvSpPr>
-          <p:cNvPr id="5" name="때 1"/>
+          <p:cNvPr id="7" name="때 1"/>
           <p:cNvSpPr/>
           <p:nvPr/>
         </p:nvSpPr>
         <p:spPr>
           <a:xfrm>
-            <a:off x="1871433" y="3154680"/>
+            <a:off x="1802853" y="3337560"/>
             <a:ext cx="402336" cy="402336"/>
           </a:xfrm>
           <a:prstGeom prst="ellipse">
             <a:avLst/>
           </a:prstGeom>
           <a:solidFill>
-            <a:srgbClr val="3D26C5"/>
+            <a:srgbClr val="EA7BB3"/>
           </a:solidFill>
           <a:ln w="38100">
             <a:solidFill>
@@ -4336,14 +4558,14 @@
       </p:sp>
       <p:sp>
         <p:nvSpPr>
-          <p:cNvPr id="6" name="TextBox 5"/>
+          <p:cNvPr id="8" name="TextBox 7"/>
           <p:cNvSpPr txBox="1"/>
           <p:nvPr/>
         </p:nvSpPr>
         <p:spPr>
           <a:xfrm>
-            <a:off x="777240" y="2514600"/>
-            <a:ext cx="2590723" cy="457200"/>
+            <a:off x="685800" y="2697480"/>
+            <a:ext cx="2636443" cy="457200"/>
           </a:xfrm>
           <a:prstGeom prst="rect">
             <a:avLst/>
@@ -4364,7 +4586,7 @@
             <a:r>
               <a:rPr sz="1600" b="1" i="0">
                 <a:solidFill>
-                  <a:srgbClr val="3D26C5"/>
+                  <a:srgbClr val="EA7BB3"/>
                 </a:solidFill>
               </a:rPr>
               <a:t>임신</a:t>
@@ -4374,14 +4596,14 @@
       </p:sp>
       <p:sp>
         <p:nvSpPr>
-          <p:cNvPr id="7" name="TextBox 6"/>
+          <p:cNvPr id="9" name="TextBox 8"/>
           <p:cNvSpPr txBox="1"/>
           <p:nvPr/>
         </p:nvSpPr>
         <p:spPr>
           <a:xfrm>
-            <a:off x="822960" y="3703320"/>
-            <a:ext cx="2499283" cy="457200"/>
+            <a:off x="731519" y="3886200"/>
+            <a:ext cx="2545003" cy="457200"/>
           </a:xfrm>
           <a:prstGeom prst="rect">
             <a:avLst/>
@@ -4402,7 +4624,7 @@
             <a:r>
               <a:rPr sz="1800" b="1" i="0">
                 <a:solidFill>
-                  <a:srgbClr val="1D115F"/>
+                  <a:srgbClr val="492738"/>
                 </a:solidFill>
               </a:rPr>
               <a:t>소식을 들은 날</a:t>
@@ -4412,14 +4634,14 @@
       </p:sp>
       <p:sp>
         <p:nvSpPr>
-          <p:cNvPr id="8" name="TextBox 7"/>
+          <p:cNvPr id="10" name="TextBox 9"/>
           <p:cNvSpPr txBox="1"/>
           <p:nvPr/>
         </p:nvSpPr>
         <p:spPr>
           <a:xfrm>
-            <a:off x="822960" y="4206240"/>
-            <a:ext cx="2499283" cy="1645920"/>
+            <a:off x="731519" y="4389120"/>
+            <a:ext cx="2545003" cy="1645920"/>
           </a:xfrm>
           <a:prstGeom prst="rect">
             <a:avLst/>
@@ -4440,7 +4662,7 @@
             <a:r>
               <a:rPr sz="1500" b="0" i="0">
                 <a:solidFill>
-                  <a:srgbClr val="2B2B2B"/>
+                  <a:srgbClr val="26231F"/>
                 </a:solidFill>
               </a:rPr>
               <a:t>기억을 적어 주세요</a:t>
@@ -4450,20 +4672,20 @@
       </p:sp>
       <p:sp>
         <p:nvSpPr>
-          <p:cNvPr id="9" name="때 2"/>
+          <p:cNvPr id="11" name="때 2"/>
           <p:cNvSpPr/>
           <p:nvPr/>
         </p:nvSpPr>
         <p:spPr>
           <a:xfrm>
-            <a:off x="4553597" y="3154680"/>
+            <a:off x="4530737" y="3337560"/>
             <a:ext cx="402336" cy="402336"/>
           </a:xfrm>
           <a:prstGeom prst="ellipse">
             <a:avLst/>
           </a:prstGeom>
           <a:solidFill>
-            <a:srgbClr val="3D26C5"/>
+            <a:srgbClr val="EA7BB3"/>
           </a:solidFill>
           <a:ln w="38100">
             <a:solidFill>
@@ -4481,14 +4703,14 @@
       </p:sp>
       <p:sp>
         <p:nvSpPr>
-          <p:cNvPr id="10" name="TextBox 9"/>
+          <p:cNvPr id="12" name="TextBox 11"/>
           <p:cNvSpPr txBox="1"/>
           <p:nvPr/>
         </p:nvSpPr>
         <p:spPr>
           <a:xfrm>
-            <a:off x="3459403" y="2514600"/>
-            <a:ext cx="2590723" cy="457200"/>
+            <a:off x="3413683" y="2697480"/>
+            <a:ext cx="2636443" cy="457200"/>
           </a:xfrm>
           <a:prstGeom prst="rect">
             <a:avLst/>
@@ -4509,7 +4731,7 @@
             <a:r>
               <a:rPr sz="1600" b="1" i="0">
                 <a:solidFill>
-                  <a:srgbClr val="3D26C5"/>
+                  <a:srgbClr val="EA7BB3"/>
                 </a:solidFill>
               </a:rPr>
               <a:t>출산</a:t>
@@ -4519,14 +4741,14 @@
       </p:sp>
       <p:sp>
         <p:nvSpPr>
-          <p:cNvPr id="11" name="TextBox 10"/>
+          <p:cNvPr id="13" name="TextBox 12"/>
           <p:cNvSpPr txBox="1"/>
           <p:nvPr/>
         </p:nvSpPr>
         <p:spPr>
           <a:xfrm>
-            <a:off x="3505123" y="3703320"/>
-            <a:ext cx="2499283" cy="457200"/>
+            <a:off x="3459403" y="3886200"/>
+            <a:ext cx="2545003" cy="457200"/>
           </a:xfrm>
           <a:prstGeom prst="rect">
             <a:avLst/>
@@ -4547,7 +4769,7 @@
             <a:r>
               <a:rPr sz="1800" b="1" i="0">
                 <a:solidFill>
-                  <a:srgbClr val="1D115F"/>
+                  <a:srgbClr val="492738"/>
                 </a:solidFill>
               </a:rPr>
               <a:t>태어난 날</a:t>
@@ -4557,14 +4779,14 @@
       </p:sp>
       <p:sp>
         <p:nvSpPr>
-          <p:cNvPr id="12" name="TextBox 11"/>
+          <p:cNvPr id="14" name="TextBox 13"/>
           <p:cNvSpPr txBox="1"/>
           <p:nvPr/>
         </p:nvSpPr>
         <p:spPr>
           <a:xfrm>
-            <a:off x="3505123" y="4206240"/>
-            <a:ext cx="2499283" cy="1645920"/>
+            <a:off x="3459403" y="4389120"/>
+            <a:ext cx="2545003" cy="1645920"/>
           </a:xfrm>
           <a:prstGeom prst="rect">
             <a:avLst/>
@@ -4585,7 +4807,7 @@
             <a:r>
               <a:rPr sz="1500" b="0" i="0">
                 <a:solidFill>
-                  <a:srgbClr val="2B2B2B"/>
+                  <a:srgbClr val="26231F"/>
                 </a:solidFill>
               </a:rPr>
               <a:t>기억을 적어 주세요</a:t>
@@ -4595,20 +4817,20 @@
       </p:sp>
       <p:sp>
         <p:nvSpPr>
-          <p:cNvPr id="13" name="때 3"/>
+          <p:cNvPr id="15" name="때 3"/>
           <p:cNvSpPr/>
           <p:nvPr/>
         </p:nvSpPr>
         <p:spPr>
           <a:xfrm>
-            <a:off x="7235761" y="3154680"/>
+            <a:off x="7258621" y="3337560"/>
             <a:ext cx="402336" cy="402336"/>
           </a:xfrm>
           <a:prstGeom prst="ellipse">
             <a:avLst/>
           </a:prstGeom>
           <a:solidFill>
-            <a:srgbClr val="3D26C5"/>
+            <a:srgbClr val="EA7BB3"/>
           </a:solidFill>
           <a:ln w="38100">
             <a:solidFill>
@@ -4626,14 +4848,14 @@
       </p:sp>
       <p:sp>
         <p:nvSpPr>
-          <p:cNvPr id="14" name="TextBox 13"/>
+          <p:cNvPr id="16" name="TextBox 15"/>
           <p:cNvSpPr txBox="1"/>
           <p:nvPr/>
         </p:nvSpPr>
         <p:spPr>
           <a:xfrm>
-            <a:off x="6141567" y="2514600"/>
-            <a:ext cx="2590723" cy="457200"/>
+            <a:off x="6141567" y="2697480"/>
+            <a:ext cx="2636443" cy="457200"/>
           </a:xfrm>
           <a:prstGeom prst="rect">
             <a:avLst/>
@@ -4654,7 +4876,7 @@
             <a:r>
               <a:rPr sz="1600" b="1" i="0">
                 <a:solidFill>
-                  <a:srgbClr val="3D26C5"/>
+                  <a:srgbClr val="EA7BB3"/>
                 </a:solidFill>
               </a:rPr>
               <a:t>첫 만남</a:t>
@@ -4664,14 +4886,14 @@
       </p:sp>
       <p:sp>
         <p:nvSpPr>
-          <p:cNvPr id="15" name="TextBox 14"/>
+          <p:cNvPr id="17" name="TextBox 16"/>
           <p:cNvSpPr txBox="1"/>
           <p:nvPr/>
         </p:nvSpPr>
         <p:spPr>
           <a:xfrm>
-            <a:off x="6187287" y="3703320"/>
-            <a:ext cx="2499283" cy="457200"/>
+            <a:off x="6187287" y="3886200"/>
+            <a:ext cx="2545003" cy="457200"/>
           </a:xfrm>
           <a:prstGeom prst="rect">
             <a:avLst/>
@@ -4692,7 +4914,7 @@
             <a:r>
               <a:rPr sz="1800" b="1" i="0">
                 <a:solidFill>
-                  <a:srgbClr val="1D115F"/>
+                  <a:srgbClr val="492738"/>
                 </a:solidFill>
               </a:rPr>
               <a:t>품에 안은 순간</a:t>
@@ -4702,14 +4924,14 @@
       </p:sp>
       <p:sp>
         <p:nvSpPr>
-          <p:cNvPr id="16" name="TextBox 15"/>
+          <p:cNvPr id="18" name="TextBox 17"/>
           <p:cNvSpPr txBox="1"/>
           <p:nvPr/>
         </p:nvSpPr>
         <p:spPr>
           <a:xfrm>
-            <a:off x="6187287" y="4206240"/>
-            <a:ext cx="2499283" cy="1645920"/>
+            <a:off x="6187287" y="4389120"/>
+            <a:ext cx="2545003" cy="1645920"/>
           </a:xfrm>
           <a:prstGeom prst="rect">
             <a:avLst/>
@@ -4730,7 +4952,7 @@
             <a:r>
               <a:rPr sz="1500" b="0" i="0">
                 <a:solidFill>
-                  <a:srgbClr val="2B2B2B"/>
+                  <a:srgbClr val="26231F"/>
                 </a:solidFill>
               </a:rPr>
               <a:t>기억을 적어 주세요</a:t>
@@ -4740,20 +4962,20 @@
       </p:sp>
       <p:sp>
         <p:nvSpPr>
-          <p:cNvPr id="17" name="때 4"/>
+          <p:cNvPr id="19" name="때 4"/>
           <p:cNvSpPr/>
           <p:nvPr/>
         </p:nvSpPr>
         <p:spPr>
           <a:xfrm>
-            <a:off x="9917925" y="3154680"/>
+            <a:off x="9986505" y="3337560"/>
             <a:ext cx="402336" cy="402336"/>
           </a:xfrm>
           <a:prstGeom prst="ellipse">
             <a:avLst/>
           </a:prstGeom>
           <a:solidFill>
-            <a:srgbClr val="3D26C5"/>
+            <a:srgbClr val="EA7BB3"/>
           </a:solidFill>
           <a:ln w="38100">
             <a:solidFill>
@@ -4771,14 +4993,14 @@
       </p:sp>
       <p:sp>
         <p:nvSpPr>
-          <p:cNvPr id="18" name="TextBox 17"/>
+          <p:cNvPr id="20" name="TextBox 19"/>
           <p:cNvSpPr txBox="1"/>
           <p:nvPr/>
         </p:nvSpPr>
         <p:spPr>
           <a:xfrm>
-            <a:off x="8823731" y="2514600"/>
-            <a:ext cx="2590723" cy="457200"/>
+            <a:off x="8869451" y="2697480"/>
+            <a:ext cx="2636443" cy="457200"/>
           </a:xfrm>
           <a:prstGeom prst="rect">
             <a:avLst/>
@@ -4799,7 +5021,7 @@
             <a:r>
               <a:rPr sz="1600" b="1" i="0">
                 <a:solidFill>
-                  <a:srgbClr val="3D26C5"/>
+                  <a:srgbClr val="EA7BB3"/>
                 </a:solidFill>
               </a:rPr>
               <a:t>집으로</a:t>
@@ -4809,14 +5031,14 @@
       </p:sp>
       <p:sp>
         <p:nvSpPr>
-          <p:cNvPr id="19" name="TextBox 18"/>
+          <p:cNvPr id="21" name="TextBox 20"/>
           <p:cNvSpPr txBox="1"/>
           <p:nvPr/>
         </p:nvSpPr>
         <p:spPr>
           <a:xfrm>
-            <a:off x="8869451" y="3703320"/>
-            <a:ext cx="2499283" cy="457200"/>
+            <a:off x="8915171" y="3886200"/>
+            <a:ext cx="2545003" cy="457200"/>
           </a:xfrm>
           <a:prstGeom prst="rect">
             <a:avLst/>
@@ -4837,7 +5059,7 @@
             <a:r>
               <a:rPr sz="1800" b="1" i="0">
                 <a:solidFill>
-                  <a:srgbClr val="1D115F"/>
+                  <a:srgbClr val="492738"/>
                 </a:solidFill>
               </a:rPr>
               <a:t>함께 돌아온 날</a:t>
@@ -4847,14 +5069,14 @@
       </p:sp>
       <p:sp>
         <p:nvSpPr>
-          <p:cNvPr id="20" name="TextBox 19"/>
+          <p:cNvPr id="22" name="TextBox 21"/>
           <p:cNvSpPr txBox="1"/>
           <p:nvPr/>
         </p:nvSpPr>
         <p:spPr>
           <a:xfrm>
-            <a:off x="8869451" y="4206240"/>
-            <a:ext cx="2499283" cy="1645920"/>
+            <a:off x="8915171" y="4389120"/>
+            <a:ext cx="2545003" cy="1645920"/>
           </a:xfrm>
           <a:prstGeom prst="rect">
             <a:avLst/>
@@ -4875,7 +5097,7 @@
             <a:r>
               <a:rPr sz="1500" b="0" i="0">
                 <a:solidFill>
-                  <a:srgbClr val="2B2B2B"/>
+                  <a:srgbClr val="26231F"/>
                 </a:solidFill>
               </a:rPr>
               <a:t>기억을 적어 주세요</a:t>
@@ -4897,7 +5119,7 @@
     <p:bg>
       <p:bgPr>
         <a:solidFill>
-          <a:srgbClr val="3D26C5"/>
+          <a:srgbClr val="FDEAF4"/>
         </a:solidFill>
         <a:effectLst/>
       </p:bgPr>
@@ -4911,22 +5133,20 @@
       <p:grpSpPr/>
       <p:sp>
         <p:nvSpPr>
-          <p:cNvPr id="3" name="장식"/>
+          <p:cNvPr id="3" name="포인트"/>
           <p:cNvSpPr/>
           <p:nvPr/>
         </p:nvSpPr>
         <p:spPr>
           <a:xfrm>
-            <a:off x="274320" y="274320"/>
-            <a:ext cx="11643055" cy="6309360"/>
-          </a:xfrm>
-          <a:prstGeom prst="roundRect">
-            <a:avLst>
-              <a:gd name="adj" fmla="val 3500"/>
-            </a:avLst>
+            <a:off x="5958687" y="246888"/>
+            <a:ext cx="274320" cy="274320"/>
+          </a:xfrm>
+          <a:prstGeom prst="star4">
+            <a:avLst/>
           </a:prstGeom>
           <a:solidFill>
-            <a:srgbClr val="FFFFFF"/>
+            <a:srgbClr val="EA7BB3"/>
           </a:solidFill>
           <a:ln>
             <a:noFill/>
@@ -4937,6 +5157,73 @@
           <a:lstStyle/>
           <a:p>
             <a:pPr algn="ctr"/>
+          </a:p>
+        </p:txBody>
+      </p:sp>
+      <p:sp>
+        <p:nvSpPr>
+          <p:cNvPr id="4" name="장식"/>
+          <p:cNvSpPr/>
+          <p:nvPr/>
+        </p:nvSpPr>
+        <p:spPr>
+          <a:xfrm>
+            <a:off x="5684367" y="1572768"/>
+            <a:ext cx="822960" cy="22860"/>
+          </a:xfrm>
+          <a:prstGeom prst="rect">
+            <a:avLst/>
+          </a:prstGeom>
+          <a:solidFill>
+            <a:srgbClr val="EA7BB3"/>
+          </a:solidFill>
+          <a:ln>
+            <a:noFill/>
+          </a:ln>
+        </p:spPr>
+        <p:txBody>
+          <a:bodyPr rtlCol="0" anchor="ctr"/>
+          <a:lstStyle/>
+          <a:p>
+            <a:pPr algn="ctr"/>
+          </a:p>
+        </p:txBody>
+      </p:sp>
+      <p:sp>
+        <p:nvSpPr>
+          <p:cNvPr id="5" name="상단 라벨"/>
+          <p:cNvSpPr txBox="1"/>
+          <p:nvPr/>
+        </p:nvSpPr>
+        <p:spPr>
+          <a:xfrm>
+            <a:off x="640080" y="182880"/>
+            <a:ext cx="3657600" cy="274320"/>
+          </a:xfrm>
+          <a:prstGeom prst="rect">
+            <a:avLst/>
+          </a:prstGeom>
+          <a:noFill/>
+        </p:spPr>
+        <p:txBody>
+          <a:bodyPr wrap="square" lIns="54864" rIns="54864" tIns="27432" bIns="27432" anchor="ctr">
+            <a:noAutofit/>
+          </a:bodyPr>
+          <a:lstStyle/>
+          <a:p>
+            <a:pPr algn="l">
+              <a:lnSpc>
+                <a:spcPct val="115000"/>
+              </a:lnSpc>
+            </a:pPr>
+            <a:r>
+              <a:rPr sz="800" b="1" i="0" spc="250">
+                <a:solidFill>
+                  <a:srgbClr val="8E8780"/>
+                </a:solidFill>
+              </a:rPr>
+              <a:t>FIRST BIRTHDAY</a:t>
+            </a:r>
           </a:p>
         </p:txBody>
       </p:sp>
@@ -4952,7 +5239,7 @@
         </p:nvSpPr>
         <p:spPr>
           <a:xfrm>
-            <a:off x="731520" y="548640"/>
+            <a:off x="1371600" y="640080"/>
             <a:ext cx="9448495" cy="868680"/>
           </a:xfrm>
         </p:spPr>
@@ -4962,7 +5249,7 @@
           </a:bodyPr>
           <a:lstStyle/>
           <a:p>
-            <a:pPr algn="l">
+            <a:pPr algn="ctr">
               <a:lnSpc>
                 <a:spcPct val="105000"/>
               </a:lnSpc>
@@ -4970,7 +5257,7 @@
             <a:r>
               <a:rPr sz="3000" b="1" i="0">
                 <a:solidFill>
-                  <a:srgbClr val="1D115F"/>
+                  <a:srgbClr val="26231F"/>
                 </a:solidFill>
               </a:rPr>
               <a:t>첫 번째 순간들</a:t>
@@ -4980,26 +5267,26 @@
       </p:sp>
       <p:sp>
         <p:nvSpPr>
-          <p:cNvPr id="4" name="카드 1"/>
+          <p:cNvPr id="6" name="카드 1"/>
           <p:cNvSpPr/>
           <p:nvPr/>
         </p:nvSpPr>
         <p:spPr>
           <a:xfrm>
-            <a:off x="731520" y="1600200"/>
-            <a:ext cx="2510713" cy="4617720"/>
+            <a:off x="640080" y="1783080"/>
+            <a:ext cx="2556433" cy="4572000"/>
           </a:xfrm>
           <a:prstGeom prst="roundRect">
             <a:avLst>
-              <a:gd name="adj" fmla="val 8000"/>
+              <a:gd name="adj" fmla="val 7000"/>
             </a:avLst>
           </a:prstGeom>
           <a:solidFill>
-            <a:srgbClr val="F0EEFC"/>
+            <a:srgbClr val="FFFFFF"/>
           </a:solidFill>
-          <a:ln w="15875">
+          <a:ln w="12700">
             <a:solidFill>
-              <a:srgbClr val="D7D1FA"/>
+              <a:srgbClr val="F3A5CC"/>
             </a:solidFill>
           </a:ln>
         </p:spPr>
@@ -5013,57 +5300,14 @@
       </p:sp>
       <p:sp>
         <p:nvSpPr>
-          <p:cNvPr id="5" name="번호 1"/>
-          <p:cNvSpPr/>
-          <p:nvPr/>
-        </p:nvSpPr>
-        <p:spPr>
-          <a:xfrm>
-            <a:off x="914400" y="1783080"/>
-            <a:ext cx="457200" cy="457200"/>
-          </a:xfrm>
-          <a:prstGeom prst="ellipse">
-            <a:avLst/>
-          </a:prstGeom>
-          <a:solidFill>
-            <a:srgbClr val="3D26C5"/>
-          </a:solidFill>
-          <a:ln>
-            <a:noFill/>
-          </a:ln>
-        </p:spPr>
-        <p:txBody>
-          <a:bodyPr rtlCol="0" anchor="ctr" wrap="square" lIns="54864" rIns="54864" tIns="27432" bIns="27432">
-            <a:noAutofit/>
-          </a:bodyPr>
-          <a:lstStyle/>
-          <a:p>
-            <a:pPr algn="ctr">
-              <a:lnSpc>
-                <a:spcPct val="100000"/>
-              </a:lnSpc>
-            </a:pPr>
-            <a:r>
-              <a:rPr sz="1600" b="1" i="0">
-                <a:solidFill>
-                  <a:srgbClr val="FFFFFF"/>
-                </a:solidFill>
-              </a:rPr>
-              <a:t>1</a:t>
-            </a:r>
-          </a:p>
-        </p:txBody>
-      </p:sp>
-      <p:sp>
-        <p:nvSpPr>
-          <p:cNvPr id="6" name="TextBox 5"/>
+          <p:cNvPr id="7" name="번호 1"/>
           <p:cNvSpPr txBox="1"/>
           <p:nvPr/>
         </p:nvSpPr>
         <p:spPr>
           <a:xfrm>
-            <a:off x="868680" y="2377440"/>
-            <a:ext cx="2236393" cy="640080"/>
+            <a:off x="731519" y="1920240"/>
+            <a:ext cx="914400" cy="548640"/>
           </a:xfrm>
           <a:prstGeom prst="rect">
             <a:avLst/>
@@ -5082,9 +5326,47 @@
               </a:lnSpc>
             </a:pPr>
             <a:r>
+              <a:rPr sz="2400" b="1" i="0">
+                <a:solidFill>
+                  <a:srgbClr val="EA7BB3"/>
+                </a:solidFill>
+              </a:rPr>
+              <a:t>01</a:t>
+            </a:r>
+          </a:p>
+        </p:txBody>
+      </p:sp>
+      <p:sp>
+        <p:nvSpPr>
+          <p:cNvPr id="8" name="TextBox 7"/>
+          <p:cNvSpPr txBox="1"/>
+          <p:nvPr/>
+        </p:nvSpPr>
+        <p:spPr>
+          <a:xfrm>
+            <a:off x="777240" y="2560320"/>
+            <a:ext cx="2282113" cy="640080"/>
+          </a:xfrm>
+          <a:prstGeom prst="rect">
+            <a:avLst/>
+          </a:prstGeom>
+          <a:noFill/>
+        </p:spPr>
+        <p:txBody>
+          <a:bodyPr wrap="square" lIns="54864" rIns="54864" tIns="27432" bIns="27432" anchor="ctr">
+            <a:noAutofit/>
+          </a:bodyPr>
+          <a:lstStyle/>
+          <a:p>
+            <a:pPr algn="l">
+              <a:lnSpc>
+                <a:spcPct val="115000"/>
+              </a:lnSpc>
+            </a:pPr>
+            <a:r>
               <a:rPr sz="1800" b="1" i="0">
                 <a:solidFill>
-                  <a:srgbClr val="1D115F"/>
+                  <a:srgbClr val="492738"/>
                 </a:solidFill>
               </a:rPr>
               <a:t>첫 웃음</a:t>
@@ -5094,14 +5376,14 @@
       </p:sp>
       <p:sp>
         <p:nvSpPr>
-          <p:cNvPr id="7" name="TextBox 6"/>
+          <p:cNvPr id="9" name="TextBox 8"/>
           <p:cNvSpPr txBox="1"/>
           <p:nvPr/>
         </p:nvSpPr>
         <p:spPr>
           <a:xfrm>
-            <a:off x="868680" y="3063240"/>
-            <a:ext cx="2236393" cy="3017520"/>
+            <a:off x="777240" y="3246120"/>
+            <a:ext cx="2282113" cy="2971800"/>
           </a:xfrm>
           <a:prstGeom prst="rect">
             <a:avLst/>
@@ -5122,7 +5404,7 @@
             <a:r>
               <a:rPr sz="1500" b="0" i="0">
                 <a:solidFill>
-                  <a:srgbClr val="2B2B2B"/>
+                  <a:srgbClr val="26231F"/>
                 </a:solidFill>
               </a:rPr>
               <a:t>언제였나요?</a:t>
@@ -5132,26 +5414,26 @@
       </p:sp>
       <p:sp>
         <p:nvSpPr>
-          <p:cNvPr id="8" name="카드 2"/>
+          <p:cNvPr id="10" name="카드 2"/>
           <p:cNvSpPr/>
           <p:nvPr/>
         </p:nvSpPr>
         <p:spPr>
           <a:xfrm>
-            <a:off x="3470833" y="1600200"/>
-            <a:ext cx="2510713" cy="4617720"/>
+            <a:off x="3425113" y="1783080"/>
+            <a:ext cx="2556433" cy="4572000"/>
           </a:xfrm>
           <a:prstGeom prst="roundRect">
             <a:avLst>
-              <a:gd name="adj" fmla="val 8000"/>
+              <a:gd name="adj" fmla="val 7000"/>
             </a:avLst>
           </a:prstGeom>
           <a:solidFill>
-            <a:srgbClr val="F0EEFC"/>
+            <a:srgbClr val="FFFFFF"/>
           </a:solidFill>
-          <a:ln w="15875">
+          <a:ln w="12700">
             <a:solidFill>
-              <a:srgbClr val="D7D1FA"/>
+              <a:srgbClr val="F3A5CC"/>
             </a:solidFill>
           </a:ln>
         </p:spPr>
@@ -5165,57 +5447,14 @@
       </p:sp>
       <p:sp>
         <p:nvSpPr>
-          <p:cNvPr id="9" name="번호 2"/>
-          <p:cNvSpPr/>
-          <p:nvPr/>
-        </p:nvSpPr>
-        <p:spPr>
-          <a:xfrm>
-            <a:off x="3653713" y="1783080"/>
-            <a:ext cx="457200" cy="457200"/>
-          </a:xfrm>
-          <a:prstGeom prst="ellipse">
-            <a:avLst/>
-          </a:prstGeom>
-          <a:solidFill>
-            <a:srgbClr val="3D26C5"/>
-          </a:solidFill>
-          <a:ln>
-            <a:noFill/>
-          </a:ln>
-        </p:spPr>
-        <p:txBody>
-          <a:bodyPr rtlCol="0" anchor="ctr" wrap="square" lIns="54864" rIns="54864" tIns="27432" bIns="27432">
-            <a:noAutofit/>
-          </a:bodyPr>
-          <a:lstStyle/>
-          <a:p>
-            <a:pPr algn="ctr">
-              <a:lnSpc>
-                <a:spcPct val="100000"/>
-              </a:lnSpc>
-            </a:pPr>
-            <a:r>
-              <a:rPr sz="1600" b="1" i="0">
-                <a:solidFill>
-                  <a:srgbClr val="FFFFFF"/>
-                </a:solidFill>
-              </a:rPr>
-              <a:t>2</a:t>
-            </a:r>
-          </a:p>
-        </p:txBody>
-      </p:sp>
-      <p:sp>
-        <p:nvSpPr>
-          <p:cNvPr id="10" name="TextBox 9"/>
+          <p:cNvPr id="11" name="번호 2"/>
           <p:cNvSpPr txBox="1"/>
           <p:nvPr/>
         </p:nvSpPr>
         <p:spPr>
           <a:xfrm>
-            <a:off x="3607993" y="2377440"/>
-            <a:ext cx="2236393" cy="640080"/>
+            <a:off x="3516553" y="1920240"/>
+            <a:ext cx="914400" cy="548640"/>
           </a:xfrm>
           <a:prstGeom prst="rect">
             <a:avLst/>
@@ -5234,9 +5473,47 @@
               </a:lnSpc>
             </a:pPr>
             <a:r>
+              <a:rPr sz="2400" b="1" i="0">
+                <a:solidFill>
+                  <a:srgbClr val="EA7BB3"/>
+                </a:solidFill>
+              </a:rPr>
+              <a:t>02</a:t>
+            </a:r>
+          </a:p>
+        </p:txBody>
+      </p:sp>
+      <p:sp>
+        <p:nvSpPr>
+          <p:cNvPr id="12" name="TextBox 11"/>
+          <p:cNvSpPr txBox="1"/>
+          <p:nvPr/>
+        </p:nvSpPr>
+        <p:spPr>
+          <a:xfrm>
+            <a:off x="3562273" y="2560320"/>
+            <a:ext cx="2282113" cy="640080"/>
+          </a:xfrm>
+          <a:prstGeom prst="rect">
+            <a:avLst/>
+          </a:prstGeom>
+          <a:noFill/>
+        </p:spPr>
+        <p:txBody>
+          <a:bodyPr wrap="square" lIns="54864" rIns="54864" tIns="27432" bIns="27432" anchor="ctr">
+            <a:noAutofit/>
+          </a:bodyPr>
+          <a:lstStyle/>
+          <a:p>
+            <a:pPr algn="l">
+              <a:lnSpc>
+                <a:spcPct val="115000"/>
+              </a:lnSpc>
+            </a:pPr>
+            <a:r>
               <a:rPr sz="1800" b="1" i="0">
                 <a:solidFill>
-                  <a:srgbClr val="1D115F"/>
+                  <a:srgbClr val="492738"/>
                 </a:solidFill>
               </a:rPr>
               <a:t>첫 뒤집기</a:t>
@@ -5246,14 +5523,14 @@
       </p:sp>
       <p:sp>
         <p:nvSpPr>
-          <p:cNvPr id="11" name="TextBox 10"/>
+          <p:cNvPr id="13" name="TextBox 12"/>
           <p:cNvSpPr txBox="1"/>
           <p:nvPr/>
         </p:nvSpPr>
         <p:spPr>
           <a:xfrm>
-            <a:off x="3607993" y="3063240"/>
-            <a:ext cx="2236393" cy="3017520"/>
+            <a:off x="3562273" y="3246120"/>
+            <a:ext cx="2282113" cy="2971800"/>
           </a:xfrm>
           <a:prstGeom prst="rect">
             <a:avLst/>
@@ -5274,7 +5551,7 @@
             <a:r>
               <a:rPr sz="1500" b="0" i="0">
                 <a:solidFill>
-                  <a:srgbClr val="2B2B2B"/>
+                  <a:srgbClr val="26231F"/>
                 </a:solidFill>
               </a:rPr>
               <a:t>언제였나요?</a:t>
@@ -5284,26 +5561,26 @@
       </p:sp>
       <p:sp>
         <p:nvSpPr>
-          <p:cNvPr id="12" name="카드 3"/>
+          <p:cNvPr id="14" name="카드 3"/>
           <p:cNvSpPr/>
           <p:nvPr/>
         </p:nvSpPr>
         <p:spPr>
           <a:xfrm>
-            <a:off x="6210147" y="1600200"/>
-            <a:ext cx="2510713" cy="4617720"/>
+            <a:off x="6210147" y="1783080"/>
+            <a:ext cx="2556433" cy="4572000"/>
           </a:xfrm>
           <a:prstGeom prst="roundRect">
             <a:avLst>
-              <a:gd name="adj" fmla="val 8000"/>
+              <a:gd name="adj" fmla="val 7000"/>
             </a:avLst>
           </a:prstGeom>
           <a:solidFill>
-            <a:srgbClr val="F0EEFC"/>
+            <a:srgbClr val="FFFFFF"/>
           </a:solidFill>
-          <a:ln w="15875">
+          <a:ln w="12700">
             <a:solidFill>
-              <a:srgbClr val="D7D1FA"/>
+              <a:srgbClr val="F3A5CC"/>
             </a:solidFill>
           </a:ln>
         </p:spPr>
@@ -5317,57 +5594,14 @@
       </p:sp>
       <p:sp>
         <p:nvSpPr>
-          <p:cNvPr id="13" name="번호 3"/>
-          <p:cNvSpPr/>
-          <p:nvPr/>
-        </p:nvSpPr>
-        <p:spPr>
-          <a:xfrm>
-            <a:off x="6393027" y="1783080"/>
-            <a:ext cx="457200" cy="457200"/>
-          </a:xfrm>
-          <a:prstGeom prst="ellipse">
-            <a:avLst/>
-          </a:prstGeom>
-          <a:solidFill>
-            <a:srgbClr val="3D26C5"/>
-          </a:solidFill>
-          <a:ln>
-            <a:noFill/>
-          </a:ln>
-        </p:spPr>
-        <p:txBody>
-          <a:bodyPr rtlCol="0" anchor="ctr" wrap="square" lIns="54864" rIns="54864" tIns="27432" bIns="27432">
-            <a:noAutofit/>
-          </a:bodyPr>
-          <a:lstStyle/>
-          <a:p>
-            <a:pPr algn="ctr">
-              <a:lnSpc>
-                <a:spcPct val="100000"/>
-              </a:lnSpc>
-            </a:pPr>
-            <a:r>
-              <a:rPr sz="1600" b="1" i="0">
-                <a:solidFill>
-                  <a:srgbClr val="FFFFFF"/>
-                </a:solidFill>
-              </a:rPr>
-              <a:t>3</a:t>
-            </a:r>
-          </a:p>
-        </p:txBody>
-      </p:sp>
-      <p:sp>
-        <p:nvSpPr>
-          <p:cNvPr id="14" name="TextBox 13"/>
+          <p:cNvPr id="15" name="번호 3"/>
           <p:cNvSpPr txBox="1"/>
           <p:nvPr/>
         </p:nvSpPr>
         <p:spPr>
           <a:xfrm>
-            <a:off x="6347307" y="2377440"/>
-            <a:ext cx="2236393" cy="640080"/>
+            <a:off x="6301587" y="1920240"/>
+            <a:ext cx="914400" cy="548640"/>
           </a:xfrm>
           <a:prstGeom prst="rect">
             <a:avLst/>
@@ -5386,9 +5620,47 @@
               </a:lnSpc>
             </a:pPr>
             <a:r>
+              <a:rPr sz="2400" b="1" i="0">
+                <a:solidFill>
+                  <a:srgbClr val="EA7BB3"/>
+                </a:solidFill>
+              </a:rPr>
+              <a:t>03</a:t>
+            </a:r>
+          </a:p>
+        </p:txBody>
+      </p:sp>
+      <p:sp>
+        <p:nvSpPr>
+          <p:cNvPr id="16" name="TextBox 15"/>
+          <p:cNvSpPr txBox="1"/>
+          <p:nvPr/>
+        </p:nvSpPr>
+        <p:spPr>
+          <a:xfrm>
+            <a:off x="6347307" y="2560320"/>
+            <a:ext cx="2282113" cy="640080"/>
+          </a:xfrm>
+          <a:prstGeom prst="rect">
+            <a:avLst/>
+          </a:prstGeom>
+          <a:noFill/>
+        </p:spPr>
+        <p:txBody>
+          <a:bodyPr wrap="square" lIns="54864" rIns="54864" tIns="27432" bIns="27432" anchor="ctr">
+            <a:noAutofit/>
+          </a:bodyPr>
+          <a:lstStyle/>
+          <a:p>
+            <a:pPr algn="l">
+              <a:lnSpc>
+                <a:spcPct val="115000"/>
+              </a:lnSpc>
+            </a:pPr>
+            <a:r>
               <a:rPr sz="1800" b="1" i="0">
                 <a:solidFill>
-                  <a:srgbClr val="1D115F"/>
+                  <a:srgbClr val="492738"/>
                 </a:solidFill>
               </a:rPr>
               <a:t>첫 이</a:t>
@@ -5398,14 +5670,14 @@
       </p:sp>
       <p:sp>
         <p:nvSpPr>
-          <p:cNvPr id="15" name="TextBox 14"/>
+          <p:cNvPr id="17" name="TextBox 16"/>
           <p:cNvSpPr txBox="1"/>
           <p:nvPr/>
         </p:nvSpPr>
         <p:spPr>
           <a:xfrm>
-            <a:off x="6347307" y="3063240"/>
-            <a:ext cx="2236393" cy="3017520"/>
+            <a:off x="6347307" y="3246120"/>
+            <a:ext cx="2282113" cy="2971800"/>
           </a:xfrm>
           <a:prstGeom prst="rect">
             <a:avLst/>
@@ -5426,7 +5698,7 @@
             <a:r>
               <a:rPr sz="1500" b="0" i="0">
                 <a:solidFill>
-                  <a:srgbClr val="2B2B2B"/>
+                  <a:srgbClr val="26231F"/>
                 </a:solidFill>
               </a:rPr>
               <a:t>언제였나요?</a:t>
@@ -5436,26 +5708,26 @@
       </p:sp>
       <p:sp>
         <p:nvSpPr>
-          <p:cNvPr id="16" name="카드 4"/>
+          <p:cNvPr id="18" name="카드 4"/>
           <p:cNvSpPr/>
           <p:nvPr/>
         </p:nvSpPr>
         <p:spPr>
           <a:xfrm>
-            <a:off x="8949461" y="1600200"/>
-            <a:ext cx="2510713" cy="4617720"/>
+            <a:off x="8995181" y="1783080"/>
+            <a:ext cx="2556433" cy="4572000"/>
           </a:xfrm>
           <a:prstGeom prst="roundRect">
             <a:avLst>
-              <a:gd name="adj" fmla="val 8000"/>
+              <a:gd name="adj" fmla="val 7000"/>
             </a:avLst>
           </a:prstGeom>
           <a:solidFill>
-            <a:srgbClr val="F0EEFC"/>
+            <a:srgbClr val="FFFFFF"/>
           </a:solidFill>
-          <a:ln w="15875">
+          <a:ln w="12700">
             <a:solidFill>
-              <a:srgbClr val="D7D1FA"/>
+              <a:srgbClr val="F3A5CC"/>
             </a:solidFill>
           </a:ln>
         </p:spPr>
@@ -5469,57 +5741,14 @@
       </p:sp>
       <p:sp>
         <p:nvSpPr>
-          <p:cNvPr id="17" name="번호 4"/>
-          <p:cNvSpPr/>
-          <p:nvPr/>
-        </p:nvSpPr>
-        <p:spPr>
-          <a:xfrm>
-            <a:off x="9132341" y="1783080"/>
-            <a:ext cx="457200" cy="457200"/>
-          </a:xfrm>
-          <a:prstGeom prst="ellipse">
-            <a:avLst/>
-          </a:prstGeom>
-          <a:solidFill>
-            <a:srgbClr val="3D26C5"/>
-          </a:solidFill>
-          <a:ln>
-            <a:noFill/>
-          </a:ln>
-        </p:spPr>
-        <p:txBody>
-          <a:bodyPr rtlCol="0" anchor="ctr" wrap="square" lIns="54864" rIns="54864" tIns="27432" bIns="27432">
-            <a:noAutofit/>
-          </a:bodyPr>
-          <a:lstStyle/>
-          <a:p>
-            <a:pPr algn="ctr">
-              <a:lnSpc>
-                <a:spcPct val="100000"/>
-              </a:lnSpc>
-            </a:pPr>
-            <a:r>
-              <a:rPr sz="1600" b="1" i="0">
-                <a:solidFill>
-                  <a:srgbClr val="FFFFFF"/>
-                </a:solidFill>
-              </a:rPr>
-              <a:t>4</a:t>
-            </a:r>
-          </a:p>
-        </p:txBody>
-      </p:sp>
-      <p:sp>
-        <p:nvSpPr>
-          <p:cNvPr id="18" name="TextBox 17"/>
+          <p:cNvPr id="19" name="번호 4"/>
           <p:cNvSpPr txBox="1"/>
           <p:nvPr/>
         </p:nvSpPr>
         <p:spPr>
           <a:xfrm>
-            <a:off x="9086621" y="2377440"/>
-            <a:ext cx="2236393" cy="640080"/>
+            <a:off x="9086621" y="1920240"/>
+            <a:ext cx="914400" cy="548640"/>
           </a:xfrm>
           <a:prstGeom prst="rect">
             <a:avLst/>
@@ -5538,9 +5767,47 @@
               </a:lnSpc>
             </a:pPr>
             <a:r>
+              <a:rPr sz="2400" b="1" i="0">
+                <a:solidFill>
+                  <a:srgbClr val="EA7BB3"/>
+                </a:solidFill>
+              </a:rPr>
+              <a:t>04</a:t>
+            </a:r>
+          </a:p>
+        </p:txBody>
+      </p:sp>
+      <p:sp>
+        <p:nvSpPr>
+          <p:cNvPr id="20" name="TextBox 19"/>
+          <p:cNvSpPr txBox="1"/>
+          <p:nvPr/>
+        </p:nvSpPr>
+        <p:spPr>
+          <a:xfrm>
+            <a:off x="9132341" y="2560320"/>
+            <a:ext cx="2282113" cy="640080"/>
+          </a:xfrm>
+          <a:prstGeom prst="rect">
+            <a:avLst/>
+          </a:prstGeom>
+          <a:noFill/>
+        </p:spPr>
+        <p:txBody>
+          <a:bodyPr wrap="square" lIns="54864" rIns="54864" tIns="27432" bIns="27432" anchor="ctr">
+            <a:noAutofit/>
+          </a:bodyPr>
+          <a:lstStyle/>
+          <a:p>
+            <a:pPr algn="l">
+              <a:lnSpc>
+                <a:spcPct val="115000"/>
+              </a:lnSpc>
+            </a:pPr>
+            <a:r>
               <a:rPr sz="1800" b="1" i="0">
                 <a:solidFill>
-                  <a:srgbClr val="1D115F"/>
+                  <a:srgbClr val="492738"/>
                 </a:solidFill>
               </a:rPr>
               <a:t>첫 걸음</a:t>
@@ -5550,14 +5817,14 @@
       </p:sp>
       <p:sp>
         <p:nvSpPr>
-          <p:cNvPr id="19" name="TextBox 18"/>
+          <p:cNvPr id="21" name="TextBox 20"/>
           <p:cNvSpPr txBox="1"/>
           <p:nvPr/>
         </p:nvSpPr>
         <p:spPr>
           <a:xfrm>
-            <a:off x="9086621" y="3063240"/>
-            <a:ext cx="2236393" cy="3017520"/>
+            <a:off x="9132341" y="3246120"/>
+            <a:ext cx="2282113" cy="2971800"/>
           </a:xfrm>
           <a:prstGeom prst="rect">
             <a:avLst/>
@@ -5578,7 +5845,7 @@
             <a:r>
               <a:rPr sz="1500" b="0" i="0">
                 <a:solidFill>
-                  <a:srgbClr val="2B2B2B"/>
+                  <a:srgbClr val="26231F"/>
                 </a:solidFill>
               </a:rPr>
               <a:t>언제였나요?</a:t>
@@ -5600,7 +5867,7 @@
     <p:bg>
       <p:bgPr>
         <a:solidFill>
-          <a:srgbClr val="3D26C5"/>
+          <a:srgbClr val="FDEAF4"/>
         </a:solidFill>
         <a:effectLst/>
       </p:bgPr>
@@ -5614,22 +5881,20 @@
       <p:grpSpPr/>
       <p:sp>
         <p:nvSpPr>
-          <p:cNvPr id="3" name="장식"/>
+          <p:cNvPr id="3" name="포인트"/>
           <p:cNvSpPr/>
           <p:nvPr/>
         </p:nvSpPr>
         <p:spPr>
           <a:xfrm>
-            <a:off x="274320" y="274320"/>
-            <a:ext cx="11643055" cy="6309360"/>
-          </a:xfrm>
-          <a:prstGeom prst="roundRect">
-            <a:avLst>
-              <a:gd name="adj" fmla="val 3500"/>
-            </a:avLst>
+            <a:off x="5958687" y="246888"/>
+            <a:ext cx="274320" cy="274320"/>
+          </a:xfrm>
+          <a:prstGeom prst="star4">
+            <a:avLst/>
           </a:prstGeom>
           <a:solidFill>
-            <a:srgbClr val="FFFFFF"/>
+            <a:srgbClr val="EA7BB3"/>
           </a:solidFill>
           <a:ln>
             <a:noFill/>
@@ -5640,6 +5905,73 @@
           <a:lstStyle/>
           <a:p>
             <a:pPr algn="ctr"/>
+          </a:p>
+        </p:txBody>
+      </p:sp>
+      <p:sp>
+        <p:nvSpPr>
+          <p:cNvPr id="4" name="장식"/>
+          <p:cNvSpPr/>
+          <p:nvPr/>
+        </p:nvSpPr>
+        <p:spPr>
+          <a:xfrm>
+            <a:off x="5684367" y="1572768"/>
+            <a:ext cx="822960" cy="22860"/>
+          </a:xfrm>
+          <a:prstGeom prst="rect">
+            <a:avLst/>
+          </a:prstGeom>
+          <a:solidFill>
+            <a:srgbClr val="EA7BB3"/>
+          </a:solidFill>
+          <a:ln>
+            <a:noFill/>
+          </a:ln>
+        </p:spPr>
+        <p:txBody>
+          <a:bodyPr rtlCol="0" anchor="ctr"/>
+          <a:lstStyle/>
+          <a:p>
+            <a:pPr algn="ctr"/>
+          </a:p>
+        </p:txBody>
+      </p:sp>
+      <p:sp>
+        <p:nvSpPr>
+          <p:cNvPr id="5" name="상단 라벨"/>
+          <p:cNvSpPr txBox="1"/>
+          <p:nvPr/>
+        </p:nvSpPr>
+        <p:spPr>
+          <a:xfrm>
+            <a:off x="640080" y="182880"/>
+            <a:ext cx="3657600" cy="274320"/>
+          </a:xfrm>
+          <a:prstGeom prst="rect">
+            <a:avLst/>
+          </a:prstGeom>
+          <a:noFill/>
+        </p:spPr>
+        <p:txBody>
+          <a:bodyPr wrap="square" lIns="54864" rIns="54864" tIns="27432" bIns="27432" anchor="ctr">
+            <a:noAutofit/>
+          </a:bodyPr>
+          <a:lstStyle/>
+          <a:p>
+            <a:pPr algn="l">
+              <a:lnSpc>
+                <a:spcPct val="115000"/>
+              </a:lnSpc>
+            </a:pPr>
+            <a:r>
+              <a:rPr sz="800" b="1" i="0" spc="250">
+                <a:solidFill>
+                  <a:srgbClr val="8E8780"/>
+                </a:solidFill>
+              </a:rPr>
+              <a:t>FIRST BIRTHDAY</a:t>
+            </a:r>
           </a:p>
         </p:txBody>
       </p:sp>
@@ -5655,7 +5987,7 @@
         </p:nvSpPr>
         <p:spPr>
           <a:xfrm>
-            <a:off x="731520" y="548640"/>
+            <a:off x="1371600" y="640080"/>
             <a:ext cx="9448495" cy="868680"/>
           </a:xfrm>
         </p:spPr>
@@ -5665,7 +5997,7 @@
           </a:bodyPr>
           <a:lstStyle/>
           <a:p>
-            <a:pPr algn="l">
+            <a:pPr algn="ctr">
               <a:lnSpc>
                 <a:spcPct val="105000"/>
               </a:lnSpc>
@@ -5673,7 +6005,7 @@
             <a:r>
               <a:rPr sz="3000" b="1" i="0">
                 <a:solidFill>
-                  <a:srgbClr val="1D115F"/>
+                  <a:srgbClr val="26231F"/>
                 </a:solidFill>
               </a:rPr>
               <a:t>사진 모음</a:t>
@@ -5683,14 +6015,14 @@
       </p:sp>
       <p:sp>
         <p:nvSpPr>
-          <p:cNvPr id="4" name="사진 자리"/>
+          <p:cNvPr id="6" name="사진 자리"/>
           <p:cNvSpPr/>
           <p:nvPr/>
         </p:nvSpPr>
         <p:spPr>
           <a:xfrm>
-            <a:off x="731520" y="1600200"/>
-            <a:ext cx="2545003" cy="2217420"/>
+            <a:off x="640080" y="1783080"/>
+            <a:ext cx="2590723" cy="2194560"/>
           </a:xfrm>
           <a:prstGeom prst="roundRect">
             <a:avLst>
@@ -5698,12 +6030,10 @@
             </a:avLst>
           </a:prstGeom>
           <a:solidFill>
-            <a:srgbClr val="D7D1FA"/>
+            <a:srgbClr val="FAD1E6"/>
           </a:solidFill>
           <a:ln w="19050">
-            <a:solidFill>
-              <a:srgbClr val="3D26C5"/>
-            </a:solidFill>
+            <a:noFill/>
             <a:prstDash val="dash"/>
           </a:ln>
         </p:spPr>
@@ -5721,7 +6051,7 @@
             <a:r>
               <a:rPr sz="1200" b="0" i="0">
                 <a:solidFill>
-                  <a:srgbClr val="1D115F"/>
+                  <a:srgbClr val="8E8780"/>
                 </a:solidFill>
               </a:rPr>
               <a:t>사진 1</a:t>
@@ -5731,14 +6061,14 @@
       </p:sp>
       <p:sp>
         <p:nvSpPr>
-          <p:cNvPr id="5" name="사진 자리"/>
+          <p:cNvPr id="7" name="사진 자리"/>
           <p:cNvSpPr/>
           <p:nvPr/>
         </p:nvSpPr>
         <p:spPr>
           <a:xfrm>
-            <a:off x="3459403" y="1600200"/>
-            <a:ext cx="2545003" cy="2217420"/>
+            <a:off x="3413683" y="1783080"/>
+            <a:ext cx="2590723" cy="2194560"/>
           </a:xfrm>
           <a:prstGeom prst="roundRect">
             <a:avLst>
@@ -5746,12 +6076,10 @@
             </a:avLst>
           </a:prstGeom>
           <a:solidFill>
-            <a:srgbClr val="D7D1FA"/>
+            <a:srgbClr val="FAD1E6"/>
           </a:solidFill>
           <a:ln w="19050">
-            <a:solidFill>
-              <a:srgbClr val="3D26C5"/>
-            </a:solidFill>
+            <a:noFill/>
             <a:prstDash val="dash"/>
           </a:ln>
         </p:spPr>
@@ -5769,7 +6097,7 @@
             <a:r>
               <a:rPr sz="1200" b="0" i="0">
                 <a:solidFill>
-                  <a:srgbClr val="1D115F"/>
+                  <a:srgbClr val="8E8780"/>
                 </a:solidFill>
               </a:rPr>
               <a:t>사진 2</a:t>
@@ -5779,14 +6107,14 @@
       </p:sp>
       <p:sp>
         <p:nvSpPr>
-          <p:cNvPr id="6" name="사진 자리"/>
+          <p:cNvPr id="8" name="사진 자리"/>
           <p:cNvSpPr/>
           <p:nvPr/>
         </p:nvSpPr>
         <p:spPr>
           <a:xfrm>
-            <a:off x="6187287" y="1600200"/>
-            <a:ext cx="2545003" cy="2217420"/>
+            <a:off x="6187287" y="1783080"/>
+            <a:ext cx="2590723" cy="2194560"/>
           </a:xfrm>
           <a:prstGeom prst="roundRect">
             <a:avLst>
@@ -5794,12 +6122,10 @@
             </a:avLst>
           </a:prstGeom>
           <a:solidFill>
-            <a:srgbClr val="D7D1FA"/>
+            <a:srgbClr val="FAD1E6"/>
           </a:solidFill>
           <a:ln w="19050">
-            <a:solidFill>
-              <a:srgbClr val="3D26C5"/>
-            </a:solidFill>
+            <a:noFill/>
             <a:prstDash val="dash"/>
           </a:ln>
         </p:spPr>
@@ -5817,7 +6143,7 @@
             <a:r>
               <a:rPr sz="1200" b="0" i="0">
                 <a:solidFill>
-                  <a:srgbClr val="1D115F"/>
+                  <a:srgbClr val="8E8780"/>
                 </a:solidFill>
               </a:rPr>
               <a:t>사진 3</a:t>
@@ -5827,14 +6153,14 @@
       </p:sp>
       <p:sp>
         <p:nvSpPr>
-          <p:cNvPr id="7" name="사진 자리"/>
+          <p:cNvPr id="9" name="사진 자리"/>
           <p:cNvSpPr/>
           <p:nvPr/>
         </p:nvSpPr>
         <p:spPr>
           <a:xfrm>
-            <a:off x="8915171" y="1600200"/>
-            <a:ext cx="2545003" cy="2217420"/>
+            <a:off x="8960891" y="1783080"/>
+            <a:ext cx="2590723" cy="2194560"/>
           </a:xfrm>
           <a:prstGeom prst="roundRect">
             <a:avLst>
@@ -5842,12 +6168,10 @@
             </a:avLst>
           </a:prstGeom>
           <a:solidFill>
-            <a:srgbClr val="D7D1FA"/>
+            <a:srgbClr val="FAD1E6"/>
           </a:solidFill>
           <a:ln w="19050">
-            <a:solidFill>
-              <a:srgbClr val="3D26C5"/>
-            </a:solidFill>
+            <a:noFill/>
             <a:prstDash val="dash"/>
           </a:ln>
         </p:spPr>
@@ -5865,7 +6189,7 @@
             <a:r>
               <a:rPr sz="1200" b="0" i="0">
                 <a:solidFill>
-                  <a:srgbClr val="1D115F"/>
+                  <a:srgbClr val="8E8780"/>
                 </a:solidFill>
               </a:rPr>
               <a:t>사진 4</a:t>
@@ -5875,14 +6199,14 @@
       </p:sp>
       <p:sp>
         <p:nvSpPr>
-          <p:cNvPr id="8" name="사진 자리"/>
+          <p:cNvPr id="10" name="사진 자리"/>
           <p:cNvSpPr/>
           <p:nvPr/>
         </p:nvSpPr>
         <p:spPr>
           <a:xfrm>
-            <a:off x="731520" y="4000500"/>
-            <a:ext cx="2545003" cy="2217420"/>
+            <a:off x="640080" y="4160520"/>
+            <a:ext cx="2590723" cy="2194560"/>
           </a:xfrm>
           <a:prstGeom prst="roundRect">
             <a:avLst>
@@ -5890,12 +6214,10 @@
             </a:avLst>
           </a:prstGeom>
           <a:solidFill>
-            <a:srgbClr val="D7D1FA"/>
+            <a:srgbClr val="FAD1E6"/>
           </a:solidFill>
           <a:ln w="19050">
-            <a:solidFill>
-              <a:srgbClr val="3D26C5"/>
-            </a:solidFill>
+            <a:noFill/>
             <a:prstDash val="dash"/>
           </a:ln>
         </p:spPr>
@@ -5913,7 +6235,7 @@
             <a:r>
               <a:rPr sz="1200" b="0" i="0">
                 <a:solidFill>
-                  <a:srgbClr val="1D115F"/>
+                  <a:srgbClr val="8E8780"/>
                 </a:solidFill>
               </a:rPr>
               <a:t>사진 5</a:t>
@@ -5923,14 +6245,14 @@
       </p:sp>
       <p:sp>
         <p:nvSpPr>
-          <p:cNvPr id="9" name="사진 자리"/>
+          <p:cNvPr id="11" name="사진 자리"/>
           <p:cNvSpPr/>
           <p:nvPr/>
         </p:nvSpPr>
         <p:spPr>
           <a:xfrm>
-            <a:off x="3459403" y="4000500"/>
-            <a:ext cx="2545003" cy="2217420"/>
+            <a:off x="3413683" y="4160520"/>
+            <a:ext cx="2590723" cy="2194560"/>
           </a:xfrm>
           <a:prstGeom prst="roundRect">
             <a:avLst>
@@ -5938,12 +6260,10 @@
             </a:avLst>
           </a:prstGeom>
           <a:solidFill>
-            <a:srgbClr val="D7D1FA"/>
+            <a:srgbClr val="FAD1E6"/>
           </a:solidFill>
           <a:ln w="19050">
-            <a:solidFill>
-              <a:srgbClr val="3D26C5"/>
-            </a:solidFill>
+            <a:noFill/>
             <a:prstDash val="dash"/>
           </a:ln>
         </p:spPr>
@@ -5961,7 +6281,7 @@
             <a:r>
               <a:rPr sz="1200" b="0" i="0">
                 <a:solidFill>
-                  <a:srgbClr val="1D115F"/>
+                  <a:srgbClr val="8E8780"/>
                 </a:solidFill>
               </a:rPr>
               <a:t>사진 6</a:t>
@@ -5971,14 +6291,14 @@
       </p:sp>
       <p:sp>
         <p:nvSpPr>
-          <p:cNvPr id="10" name="사진 자리"/>
+          <p:cNvPr id="12" name="사진 자리"/>
           <p:cNvSpPr/>
           <p:nvPr/>
         </p:nvSpPr>
         <p:spPr>
           <a:xfrm>
-            <a:off x="6187287" y="4000500"/>
-            <a:ext cx="2545003" cy="2217420"/>
+            <a:off x="6187287" y="4160520"/>
+            <a:ext cx="2590723" cy="2194560"/>
           </a:xfrm>
           <a:prstGeom prst="roundRect">
             <a:avLst>
@@ -5986,12 +6306,10 @@
             </a:avLst>
           </a:prstGeom>
           <a:solidFill>
-            <a:srgbClr val="D7D1FA"/>
+            <a:srgbClr val="FAD1E6"/>
           </a:solidFill>
           <a:ln w="19050">
-            <a:solidFill>
-              <a:srgbClr val="3D26C5"/>
-            </a:solidFill>
+            <a:noFill/>
             <a:prstDash val="dash"/>
           </a:ln>
         </p:spPr>
@@ -6009,7 +6327,7 @@
             <a:r>
               <a:rPr sz="1200" b="0" i="0">
                 <a:solidFill>
-                  <a:srgbClr val="1D115F"/>
+                  <a:srgbClr val="8E8780"/>
                 </a:solidFill>
               </a:rPr>
               <a:t>사진 7</a:t>
@@ -6019,14 +6337,14 @@
       </p:sp>
       <p:sp>
         <p:nvSpPr>
-          <p:cNvPr id="11" name="사진 자리"/>
+          <p:cNvPr id="13" name="사진 자리"/>
           <p:cNvSpPr/>
           <p:nvPr/>
         </p:nvSpPr>
         <p:spPr>
           <a:xfrm>
-            <a:off x="8915171" y="4000500"/>
-            <a:ext cx="2545003" cy="2217420"/>
+            <a:off x="8960891" y="4160520"/>
+            <a:ext cx="2590723" cy="2194560"/>
           </a:xfrm>
           <a:prstGeom prst="roundRect">
             <a:avLst>
@@ -6034,12 +6352,10 @@
             </a:avLst>
           </a:prstGeom>
           <a:solidFill>
-            <a:srgbClr val="D7D1FA"/>
+            <a:srgbClr val="FAD1E6"/>
           </a:solidFill>
           <a:ln w="19050">
-            <a:solidFill>
-              <a:srgbClr val="3D26C5"/>
-            </a:solidFill>
+            <a:noFill/>
             <a:prstDash val="dash"/>
           </a:ln>
         </p:spPr>
@@ -6057,7 +6373,7 @@
             <a:r>
               <a:rPr sz="1200" b="0" i="0">
                 <a:solidFill>
-                  <a:srgbClr val="1D115F"/>
+                  <a:srgbClr val="8E8780"/>
                 </a:solidFill>
               </a:rPr>
               <a:t>사진 8</a:t>
@@ -6076,6 +6392,14 @@
 <file path=ppt/slides/slide6.xml><?xml version="1.0" encoding="utf-8"?>
 <p:sld xmlns:a="http://schemas.openxmlformats.org/drawingml/2006/main" xmlns:p="http://schemas.openxmlformats.org/presentationml/2006/main" xmlns:r="http://schemas.openxmlformats.org/officeDocument/2006/relationships">
   <p:cSld>
+    <p:bg>
+      <p:bgPr>
+        <a:solidFill>
+          <a:srgbClr val="FDEAF4"/>
+        </a:solidFill>
+        <a:effectLst/>
+      </p:bgPr>
+    </p:bg>
     <p:spTree>
       <p:nvGrpSpPr>
         <p:cNvPr id="1" name=""/>
@@ -6083,30 +6407,116 @@
         <p:nvPr/>
       </p:nvGrpSpPr>
       <p:grpSpPr/>
-      <p:pic>
-        <p:nvPicPr>
-          <p:cNvPr id="3" name="표지 그림" descr="birthday-25.jpg"/>
-          <p:cNvPicPr>
-            <a:picLocks noChangeAspect="1"/>
-          </p:cNvPicPr>
+      <p:sp>
+        <p:nvSpPr>
+          <p:cNvPr id="3" name="사진 자리"/>
+          <p:cNvSpPr/>
           <p:nvPr/>
-        </p:nvPicPr>
-        <p:blipFill>
-          <a:blip r:embed="rId2"/>
-          <a:stretch>
-            <a:fillRect/>
-          </a:stretch>
-        </p:blipFill>
-        <p:spPr>
-          <a:xfrm>
-            <a:off x="0" y="0"/>
-            <a:ext cx="12191695" cy="6858000"/>
+        </p:nvSpPr>
+        <p:spPr>
+          <a:xfrm>
+            <a:off x="7802684" y="0"/>
+            <a:ext cx="4389010" cy="6858000"/>
           </a:xfrm>
           <a:prstGeom prst="rect">
             <a:avLst/>
           </a:prstGeom>
-        </p:spPr>
-      </p:pic>
+          <a:solidFill>
+            <a:srgbClr val="F3A5CC"/>
+          </a:solidFill>
+          <a:ln>
+            <a:noFill/>
+          </a:ln>
+        </p:spPr>
+        <p:txBody>
+          <a:bodyPr rtlCol="0" anchor="ctr" wrap="square" lIns="54864" rIns="54864" tIns="27432" bIns="27432">
+            <a:noAutofit/>
+          </a:bodyPr>
+          <a:lstStyle/>
+          <a:p>
+            <a:pPr algn="ctr">
+              <a:lnSpc>
+                <a:spcPct val="100000"/>
+              </a:lnSpc>
+            </a:pPr>
+            <a:r>
+              <a:rPr sz="1400" b="0" i="0">
+                <a:solidFill>
+                  <a:srgbClr val="492738"/>
+                </a:solidFill>
+              </a:rPr>
+              <a:t>사진을 넣어 주세요</a:t>
+            </a:r>
+          </a:p>
+        </p:txBody>
+      </p:sp>
+      <p:sp>
+        <p:nvSpPr>
+          <p:cNvPr id="4" name="장식"/>
+          <p:cNvSpPr/>
+          <p:nvPr/>
+        </p:nvSpPr>
+        <p:spPr>
+          <a:xfrm>
+            <a:off x="8168435" y="365760"/>
+            <a:ext cx="3657508" cy="6126480"/>
+          </a:xfrm>
+          <a:prstGeom prst="rect">
+            <a:avLst/>
+          </a:prstGeom>
+          <a:noFill/>
+          <a:ln w="9525">
+            <a:solidFill>
+              <a:srgbClr val="26231F"/>
+            </a:solidFill>
+          </a:ln>
+        </p:spPr>
+        <p:txBody>
+          <a:bodyPr rtlCol="0" anchor="ctr"/>
+          <a:lstStyle/>
+          <a:p>
+            <a:pPr algn="ctr"/>
+          </a:p>
+        </p:txBody>
+      </p:sp>
+      <p:sp>
+        <p:nvSpPr>
+          <p:cNvPr id="5" name="라벨"/>
+          <p:cNvSpPr txBox="1"/>
+          <p:nvPr/>
+        </p:nvSpPr>
+        <p:spPr>
+          <a:xfrm>
+            <a:off x="822960" y="2148840"/>
+            <a:ext cx="5608179" cy="274320"/>
+          </a:xfrm>
+          <a:prstGeom prst="rect">
+            <a:avLst/>
+          </a:prstGeom>
+          <a:noFill/>
+        </p:spPr>
+        <p:txBody>
+          <a:bodyPr wrap="square" lIns="54864" rIns="54864" tIns="27432" bIns="27432" anchor="t">
+            <a:noAutofit/>
+          </a:bodyPr>
+          <a:lstStyle/>
+          <a:p>
+            <a:pPr algn="l">
+              <a:lnSpc>
+                <a:spcPct val="115000"/>
+              </a:lnSpc>
+            </a:pPr>
+            <a:r>
+              <a:rPr sz="1000" b="1" i="0" spc="250">
+                <a:solidFill>
+                  <a:srgbClr val="26231F"/>
+                </a:solidFill>
+              </a:rPr>
+              <a:t>FIRST BIRTHDAY</a:t>
+            </a:r>
+          </a:p>
+        </p:txBody>
+      </p:sp>
       <p:sp>
         <p:nvSpPr>
           <p:cNvPr id="2" name="Title 1"/>
@@ -6119,8 +6529,8 @@
         </p:nvSpPr>
         <p:spPr>
           <a:xfrm>
-            <a:off x="853418" y="2057400"/>
-            <a:ext cx="6095847" cy="1554480"/>
+            <a:off x="822960" y="2606040"/>
+            <a:ext cx="5608179" cy="1188720"/>
           </a:xfrm>
         </p:spPr>
         <p:txBody>
@@ -6137,7 +6547,7 @@
             <a:r>
               <a:rPr sz="3400" b="1" i="0">
                 <a:solidFill>
-                  <a:srgbClr val="1D115F"/>
+                  <a:srgbClr val="26231F"/>
                 </a:solidFill>
               </a:rPr>
               <a:t>와 주셔서 고맙습니다</a:t>
@@ -6147,14 +6557,14 @@
       </p:sp>
       <p:sp>
         <p:nvSpPr>
-          <p:cNvPr id="4" name="한 줄 문구"/>
+          <p:cNvPr id="6" name="한 줄 문구"/>
           <p:cNvSpPr txBox="1"/>
           <p:nvPr/>
         </p:nvSpPr>
         <p:spPr>
           <a:xfrm>
-            <a:off x="853418" y="3749039"/>
-            <a:ext cx="6095847" cy="822960"/>
+            <a:off x="822960" y="3886200"/>
+            <a:ext cx="5608179" cy="822960"/>
           </a:xfrm>
           <a:prstGeom prst="rect">
             <a:avLst/>
@@ -6173,9 +6583,9 @@
               </a:lnSpc>
             </a:pPr>
             <a:r>
-              <a:rPr sz="1700" b="0" i="1">
-                <a:solidFill>
-                  <a:srgbClr val="1D115F"/>
+              <a:rPr sz="1700" b="0" i="0">
+                <a:solidFill>
+                  <a:srgbClr val="26231F"/>
                 </a:solidFill>
               </a:rPr>
               <a:t>아이가 한 살이 되었습니다</a:t>
@@ -6185,14 +6595,14 @@
       </p:sp>
       <p:sp>
         <p:nvSpPr>
-          <p:cNvPr id="5" name="안내 문구"/>
+          <p:cNvPr id="7" name="안내 문구"/>
           <p:cNvSpPr txBox="1"/>
           <p:nvPr/>
         </p:nvSpPr>
         <p:spPr>
           <a:xfrm>
-            <a:off x="853418" y="4617720"/>
-            <a:ext cx="6095847" cy="914400"/>
+            <a:off x="822960" y="4754880"/>
+            <a:ext cx="5608179" cy="914400"/>
           </a:xfrm>
           <a:prstGeom prst="rect">
             <a:avLst/>
@@ -6213,7 +6623,7 @@
             <a:r>
               <a:rPr sz="1400" b="0" i="0">
                 <a:solidFill>
-                  <a:srgbClr val="666666"/>
+                  <a:srgbClr val="26231F"/>
                 </a:solidFill>
               </a:rPr>
               <a:t>아기 이름 · 부모 이름</a:t>
@@ -6240,34 +6650,34 @@
         <a:sysClr val="window" lastClr="FFFFFF"/>
       </a:lt1>
       <a:dk2>
-        <a:srgbClr val="1D115F"/>
+        <a:srgbClr val="492738"/>
       </a:dk2>
       <a:lt2>
-        <a:srgbClr val="F0EEFC"/>
+        <a:srgbClr val="FDEAF4"/>
       </a:lt2>
       <a:accent1>
-        <a:srgbClr val="3D26C5"/>
+        <a:srgbClr val="EA7BB3"/>
       </a:accent1>
       <a:accent2>
-        <a:srgbClr val="209DB6"/>
+        <a:srgbClr val="EF9FA1"/>
       </a:accent2>
       <a:accent3>
-        <a:srgbClr val="1D115F"/>
+        <a:srgbClr val="492738"/>
       </a:accent3>
       <a:accent4>
-        <a:srgbClr val="D7D1FA"/>
+        <a:srgbClr val="FAD1E6"/>
       </a:accent4>
       <a:accent5>
-        <a:srgbClr val="2E62BE"/>
+        <a:srgbClr val="EC8DAA"/>
       </a:accent5>
       <a:accent6>
-        <a:srgbClr val="77709F"/>
+        <a:srgbClr val="927D88"/>
       </a:accent6>
       <a:hlink>
-        <a:srgbClr val="3D26C5"/>
+        <a:srgbClr val="EA7BB3"/>
       </a:hlink>
       <a:folHlink>
-        <a:srgbClr val="1D115F"/>
+        <a:srgbClr val="492738"/>
       </a:folHlink>
     </a:clrScheme>
     <a:fontScheme name="Office">
